--- a/slides/Module 5 Running the pipeline on your country's genomes.pptx
+++ b/slides/Module 5 Running the pipeline on your country's genomes.pptx
@@ -4,6 +4,9 @@
   <p:sldMasterIdLst>
     <p:sldMasterId id="2147483648" r:id="rId1"/>
   </p:sldMasterIdLst>
+  <p:notesMasterIdLst>
+    <p:notesMasterId r:id="rId28"/>
+  </p:notesMasterIdLst>
   <p:sldIdLst>
     <p:sldId id="256" r:id="rId2"/>
     <p:sldId id="257" r:id="rId3"/>
@@ -32,9 +35,6 @@
     <p:sldId id="280" r:id="rId26"/>
     <p:sldId id="281" r:id="rId27"/>
   </p:sldIdLst>
-  <p:notesMasterIdLst>
-    <p:notesMasterId r:id="rId28"/>
-  </p:notesMasterIdLst>
   <p:sldSz cx="12192000" cy="6858000"/>
   <p:notesSz cx="6858000" cy="12192000"/>
   <p:defaultTextStyle>
@@ -129,6 +129,11 @@
       </a:defRPr>
     </a:lvl9pPr>
   </p:defaultTextStyle>
+  <p:extLst>
+    <p:ext uri="{EFAFB233-063F-42B5-8137-9DF3F51BA10A}">
+      <p15:sldGuideLst xmlns:p15="http://schemas.microsoft.com/office/powerpoint/2012/main"/>
+    </p:ext>
+  </p:extLst>
 </p:presentation>
 </file>
 
@@ -154,234 +159,10 @@
           <a:chExt cx="0" cy="0"/>
         </a:xfrm>
       </p:grpSpPr>
-      <p:sp>
-        <p:nvSpPr>
-          <p:cNvPr id="2" name="Header Placeholder 1"/>
-          <p:cNvSpPr>
-            <a:spLocks noGrp="1"/>
-          </p:cNvSpPr>
-          <p:nvPr>
-            <p:ph type="hdr" sz="quarter"/>
-          </p:nvPr>
-        </p:nvSpPr>
-        <p:spPr>
-          <a:xfrm>
-            <a:off x="0" y="0"/>
-            <a:ext cx="2971800" cy="458788"/>
-          </a:xfrm>
-          <a:prstGeom prst="rect">
-            <a:avLst/>
-          </a:prstGeom>
-        </p:spPr>
-        <p:txBody>
-          <a:bodyPr vert="horz" lIns="91440" tIns="45720" rIns="91440" bIns="45720" rtlCol="0"/>
-          <a:lstStyle>
-            <a:lvl1pPr algn="l">
-              <a:defRPr sz="1200"/>
-            </a:lvl1pPr>
-          </a:lstStyle>
-          <a:p>
-            <a:endParaRPr lang="en-US"/>
-          </a:p>
-        </p:txBody>
-      </p:sp>
-      <p:sp>
-        <p:nvSpPr>
-          <p:cNvPr id="3" name="Date Placeholder 2"/>
-          <p:cNvSpPr>
-            <a:spLocks noGrp="1"/>
-          </p:cNvSpPr>
-          <p:nvPr>
-            <p:ph type="dt" idx="1"/>
-          </p:nvPr>
-        </p:nvSpPr>
-        <p:spPr>
-          <a:xfrm>
-            <a:off x="3884613" y="0"/>
-            <a:ext cx="2971800" cy="458788"/>
-          </a:xfrm>
-          <a:prstGeom prst="rect">
-            <a:avLst/>
-          </a:prstGeom>
-        </p:spPr>
-        <p:txBody>
-          <a:bodyPr vert="horz" lIns="91440" tIns="45720" rIns="91440" bIns="45720" rtlCol="0"/>
-          <a:lstStyle>
-            <a:lvl1pPr algn="r">
-              <a:defRPr sz="1200"/>
-            </a:lvl1pPr>
-          </a:lstStyle>
-          <a:p>
-            <a:fld id="{5282F153-3F37-0F45-9E97-73ACFA13230C}" type="datetimeFigureOut">
-              <a:rPr lang="en-US"/>
-              <a:t>7/23/19</a:t>
-            </a:fld>
-            <a:endParaRPr lang="en-US"/>
-          </a:p>
-        </p:txBody>
-      </p:sp>
-      <p:sp>
-        <p:nvSpPr>
-          <p:cNvPr id="4" name="Slide Image Placeholder 3"/>
-          <p:cNvSpPr>
-            <a:spLocks noGrp="1" noRot="1" noChangeAspect="1"/>
-          </p:cNvSpPr>
-          <p:nvPr>
-            <p:ph type="sldImg" idx="2"/>
-          </p:nvPr>
-        </p:nvSpPr>
-        <p:spPr>
-          <a:xfrm>
-            <a:off x="685800" y="1143000"/>
-            <a:ext cx="5486400" cy="3086100"/>
-          </a:xfrm>
-          <a:prstGeom prst="rect">
-            <a:avLst/>
-          </a:prstGeom>
-          <a:noFill/>
-          <a:ln w="12700">
-            <a:solidFill>
-              <a:prstClr val="black"/>
-            </a:solidFill>
-          </a:ln>
-        </p:spPr>
-        <p:txBody>
-          <a:bodyPr vert="horz" lIns="91440" tIns="45720" rIns="91440" bIns="45720" rtlCol="0" anchor="ctr"/>
-          <a:lstStyle/>
-          <a:p>
-            <a:endParaRPr lang="en-US"/>
-          </a:p>
-        </p:txBody>
-      </p:sp>
-      <p:sp>
-        <p:nvSpPr>
-          <p:cNvPr id="5" name="Notes Placeholder 4"/>
-          <p:cNvSpPr>
-            <a:spLocks noGrp="1"/>
-          </p:cNvSpPr>
-          <p:nvPr>
-            <p:ph type="body" sz="quarter" idx="3"/>
-          </p:nvPr>
-        </p:nvSpPr>
-        <p:spPr>
-          <a:xfrm>
-            <a:off x="685800" y="4400550"/>
-            <a:ext cx="5486400" cy="3600450"/>
-          </a:xfrm>
-          <a:prstGeom prst="rect">
-            <a:avLst/>
-          </a:prstGeom>
-        </p:spPr>
-        <p:txBody>
-          <a:bodyPr vert="horz" lIns="91440" tIns="45720" rIns="91440" bIns="45720" rtlCol="0"/>
-          <a:lstStyle/>
-          <a:p>
-            <a:pPr lvl="0"/>
-            <a:r>
-              <a:rPr lang="en-US"/>
-              <a:t>Click to edit Master text styles</a:t>
-            </a:r>
-          </a:p>
-          <a:p>
-            <a:pPr lvl="1"/>
-            <a:r>
-              <a:rPr lang="en-US"/>
-              <a:t>Second level</a:t>
-            </a:r>
-          </a:p>
-          <a:p>
-            <a:pPr lvl="2"/>
-            <a:r>
-              <a:rPr lang="en-US"/>
-              <a:t>Third level</a:t>
-            </a:r>
-          </a:p>
-          <a:p>
-            <a:pPr lvl="3"/>
-            <a:r>
-              <a:rPr lang="en-US"/>
-              <a:t>Fourth level</a:t>
-            </a:r>
-          </a:p>
-          <a:p>
-            <a:pPr lvl="4"/>
-            <a:r>
-              <a:rPr lang="en-US"/>
-              <a:t>Fifth level</a:t>
-            </a:r>
-          </a:p>
-        </p:txBody>
-      </p:sp>
-      <p:sp>
-        <p:nvSpPr>
-          <p:cNvPr id="6" name="Footer Placeholder 5"/>
-          <p:cNvSpPr>
-            <a:spLocks noGrp="1"/>
-          </p:cNvSpPr>
-          <p:nvPr>
-            <p:ph type="ftr" sz="quarter" idx="4"/>
-          </p:nvPr>
-        </p:nvSpPr>
-        <p:spPr>
-          <a:xfrm>
-            <a:off x="0" y="8685213"/>
-            <a:ext cx="2971800" cy="458787"/>
-          </a:xfrm>
-          <a:prstGeom prst="rect">
-            <a:avLst/>
-          </a:prstGeom>
-        </p:spPr>
-        <p:txBody>
-          <a:bodyPr vert="horz" lIns="91440" tIns="45720" rIns="91440" bIns="45720" rtlCol="0" anchor="b"/>
-          <a:lstStyle>
-            <a:lvl1pPr algn="l">
-              <a:defRPr sz="1200"/>
-            </a:lvl1pPr>
-          </a:lstStyle>
-          <a:p>
-            <a:endParaRPr lang="en-US"/>
-          </a:p>
-        </p:txBody>
-      </p:sp>
-      <p:sp>
-        <p:nvSpPr>
-          <p:cNvPr id="7" name="Slide Number Placeholder 6"/>
-          <p:cNvSpPr>
-            <a:spLocks noGrp="1"/>
-          </p:cNvSpPr>
-          <p:nvPr>
-            <p:ph type="sldNum" sz="quarter" idx="5"/>
-          </p:nvPr>
-        </p:nvSpPr>
-        <p:spPr>
-          <a:xfrm>
-            <a:off x="3884613" y="8685213"/>
-            <a:ext cx="2971800" cy="458787"/>
-          </a:xfrm>
-          <a:prstGeom prst="rect">
-            <a:avLst/>
-          </a:prstGeom>
-        </p:spPr>
-        <p:txBody>
-          <a:bodyPr vert="horz" lIns="91440" tIns="45720" rIns="91440" bIns="45720" rtlCol="0" anchor="b"/>
-          <a:lstStyle>
-            <a:lvl1pPr algn="r">
-              <a:defRPr sz="1200"/>
-            </a:lvl1pPr>
-          </a:lstStyle>
-          <a:p>
-            <a:fld id="{CE5E9CC1-C706-0F49-92D6-E571CC5EEA8F}" type="slidenum">
-              <a:rPr lang="en-US"/>
-              <a:t>‹#›</a:t>
-            </a:fld>
-            <a:endParaRPr lang="en-US"/>
-          </a:p>
-        </p:txBody>
-      </p:sp>
     </p:spTree>
     <p:extLst>
       <p:ext uri="{BB962C8B-B14F-4D97-AF65-F5344CB8AC3E}">
-        <p14:creationId xmlns:p14="http://schemas.microsoft.com/office/powerpoint/2010/main" val="1024086991"/>
+        <p14:creationId xmlns:p14="http://schemas.microsoft.com/office/powerpoint/2010/main" val="2551286731"/>
       </p:ext>
     </p:extLst>
   </p:cSld>
@@ -529,7 +310,6 @@
               <a:rPr lang="en-US" dirty="0"/>
               <a:t>Day 5 afternoon. Everything trainees have done by hand since Day 1 is in one Nextflow pipeline, neonatal-amr-nf. Session 3 shows how it is built and runs a test. Session 4 runs it on real data: each country's own assemblies, one run per country and species.</a:t>
             </a:r>
-            <a:endParaRPr lang="en-US" dirty="0"/>
           </a:p>
         </p:txBody>
       </p:sp>
@@ -617,7 +397,6 @@
               <a:rPr lang="en-US" dirty="0"/>
               <a:t>Session 4. Each country team brings genomes that were already assembled at home, as contigs, with a metadata table. The pipeline starts from the contigs, so read QC and assembly are skipped. Most of the session is preparing the inputs correctly; the run itself is one command.</a:t>
             </a:r>
-            <a:endParaRPr lang="en-US" dirty="0"/>
           </a:p>
         </p:txBody>
       </p:sp>
@@ -705,7 +484,6 @@
               <a:rPr lang="en-US" dirty="0"/>
               <a:t>Same workflow as before, with the steps that need reads crossed out. --input_type auto is the default: a samplesheet with a fasta column is an assembly run. Because there are no reads, there is no Kraken2 contamination check and no read-level QC; the checks that replace them come later in this session. SNPs called from contigs are only as good as the assemblies.</a:t>
             </a:r>
-            <a:endParaRPr lang="en-US" dirty="0"/>
           </a:p>
         </p:txBody>
       </p:sp>
@@ -793,7 +571,6 @@
               <a:rPr lang="en-US" dirty="0"/>
               <a:t>Why one submitter: every run starts many Slurm jobs, and participant accounts have limited computing allowances. Two people submitting the same country would double the load and write two copies of the results. A run is named country_species (for example kenya_kpneumoniae), so each has its own output folder and its own resume history. Whoever submits, the inputs are the country team's work, and so is reading the results.</a:t>
             </a:r>
-            <a:endParaRPr lang="en-US" dirty="0"/>
           </a:p>
         </p:txBody>
       </p:sp>
@@ -881,7 +658,6 @@
               <a:rPr lang="en-US" dirty="0"/>
               <a:t>Two inputs, one script, three outputs per species split. &lt;species&gt; is kpneumoniae or ecoli. Isolates of any other organism, for example Acinetobacter, are written to the other-species list with their contigs path; the pipeline does not type them. The next three slides cover the contigs, the metadata and the script in turn.</a:t>
             </a:r>
-            <a:endParaRPr lang="en-US" dirty="0"/>
           </a:p>
         </p:txBody>
       </p:sp>
@@ -969,7 +745,6 @@
               <a:rPr lang="en-US" dirty="0"/>
               <a:t>The script looks for &lt;ID&gt;_contigs.fasta first, then &lt;ID&gt;.fasta, .fa, .fna, _contigs.fa and _contigs.fna; another pattern can be set with --suffix. Compressed files are reported, not used: unzip them with gunzip first, because not every tool reads gzipped contigs. The pipeline itself refuses duplicate IDs and IDs with spaces or slashes, so fix them in the metadata and file names before you start. The IDs here are examples.</a:t>
             </a:r>
-            <a:endParaRPr lang="en-US" dirty="0"/>
           </a:p>
         </p:txBody>
       </p:sp>
@@ -1057,7 +832,6 @@
               <a:rPr lang="en-US" dirty="0"/>
               <a:t>The rows are made-up examples, not real isolates. The defaults match the Ethiopia table; every other country maps its own column names with the options at the bottom, so nobody needs to rename columns by hand. Months can be numbers or names; a missing day gives a year-month date. A single date column must be written YYYY-MM-DD (or YYYY-MM); a date such as 14/03/2023 keeps only its year. Organism spellings such as K. pneumoniae, Klebsiella pneumoniae, E. coli and Escherichia coli are all recognised; ETH003 here would go to the other-species list. Every original column is kept in the metadata the script writes, so nothing is lost. Do not put patient names or record numbers in this table.</a:t>
             </a:r>
-            <a:endParaRPr lang="en-US" dirty="0"/>
           </a:p>
         </p:txBody>
       </p:sp>
@@ -1145,7 +919,6 @@
               <a:rPr lang="en-US" dirty="0"/>
               <a:t>This example assumes a table with columns sample_id, organism, collection_date and ward; replace them with your own column names. The contigs folder path is an example too: use wherever your country's contigs are on the HPC. The script never drops an isolate silently: anything it leaves out is printed with the reason. Fix the problems and run it again until the messages are only the ones you expect, such as non-Klebsiella organisms.</a:t>
             </a:r>
-            <a:endParaRPr lang="en-US" dirty="0"/>
           </a:p>
         </p:txBody>
       </p:sp>
@@ -1233,7 +1006,6 @@
               <a:rPr lang="en-US" dirty="0"/>
               <a:t>Open both files and check them before submitting: the number of rows, the paths, and that the dates and wards came through. head and column -t make the TSV readable. The sample IDs here are made up. The E. coli files have the same layout. If your country has its own grouping, for example a known outbreak, --group-col fills phylo_group, and the run then needs --phylo_grouping samplesheet.</a:t>
             </a:r>
-            <a:endParaRPr lang="en-US" dirty="0"/>
           </a:p>
         </p:txBody>
       </p:sp>
@@ -1321,7 +1093,6 @@
               <a:rPr lang="en-US" dirty="0"/>
               <a:t>The submission script reads its settings from environment variables, so the exports set the country and species without editing the script. Replace the e-mail address with your own: the script's default sends Slurm messages to the course organiser. When a trainer submits on a country's behalf, it is the same commands from the trainer's account, with INPUT pointing to the country's checked samplesheet; results then land in the trainer's scratch folder (/var/scratch/global/&lt;trainer&gt;/neonatal-amr/outdir_&lt;country&gt;_&lt;species&gt;) and are shared back. The run uses the shared AMRFinderPlus database and Snippy by default; PHYLO_METHOD=both also runs SKA2.</a:t>
             </a:r>
-            <a:endParaRPr lang="en-US" dirty="0"/>
           </a:p>
         </p:txBody>
       </p:sp>
@@ -1409,7 +1180,6 @@
               <a:rPr lang="en-US" dirty="0"/>
               <a:t>Each run name has its own launch folder, so a resubmission always resumes the right run; never change RUN_NAME between attempts. A country run on a few dozen genomes takes hours, not minutes; the job keeps running after you log out, so there is no need to stay connected. The pipeline_info folder has an execution report: which step took longest and used most memory.</a:t>
             </a:r>
-            <a:endParaRPr lang="en-US" dirty="0"/>
           </a:p>
         </p:txBody>
       </p:sp>
@@ -1497,7 +1267,6 @@
               <a:rPr lang="en-US" dirty="0"/>
               <a:t>Session 3 uses the pipeline on test data, so everyone can follow at the same time. Session 4 is the real thing: each country team prepares its own inputs, and one run per country and species is submitted to the HPC, by one participant per country or by a trainer on the country's behalf.</a:t>
             </a:r>
-            <a:endParaRPr lang="en-US" dirty="0"/>
           </a:p>
         </p:txBody>
       </p:sp>
@@ -1585,7 +1354,6 @@
               <a:rPr lang="en-US" dirty="0"/>
               <a:t>These are the same checks as Day 2, now on assemblies made elsewhere. If the original reads exist, a read run of those isolates adds the contamination check. A genome that fails these checks can still be typed, but should be left out of transmission analysis and reported as uncertain.</a:t>
             </a:r>
-            <a:endParaRPr lang="en-US" dirty="0"/>
           </a:p>
         </p:txBody>
       </p:sp>
@@ -1673,7 +1441,6 @@
               <a:rPr lang="en-US" dirty="0"/>
               <a:t>Every folder matches a day of hand work, so trainees already know how to read each result. A phylogeny group needs at least 3 isolates of one ST for a tree (--phylo_min_group_size); a country with few isolates per ST may get few or no trees. pipeline_info/software_versions records exactly which tool versions produced the results: keep it with any report.</a:t>
             </a:r>
-            <a:endParaRPr lang="en-US" dirty="0"/>
           </a:p>
         </p:txBody>
       </p:sp>
@@ -1761,7 +1528,6 @@
               <a:rPr lang="en-US" dirty="0"/>
               <a:t>These three settings are at the top of bin/plot_results.sbatch, which runs the transmission pairs, the figures and, optionally, BactDating after the pipeline. The training set stays the teaching example on the following days; each country team then repeats the analysis on its own results.</a:t>
             </a:r>
-            <a:endParaRPr lang="en-US" dirty="0"/>
           </a:p>
         </p:txBody>
       </p:sp>
@@ -1849,7 +1615,6 @@
               <a:rPr lang="en-US" dirty="0"/>
               <a:t>Agree with each country team at the start of the session who may see its results and where they will be kept after the course. Ward and date are needed for the transmission analysis inside the team, but they can identify patients in a small neonatal unit, so they stay inside the team.</a:t>
             </a:r>
-            <a:endParaRPr lang="en-US" dirty="0"/>
           </a:p>
         </p:txBody>
       </p:sp>
@@ -1937,7 +1702,6 @@
               <a:rPr lang="en-US" dirty="0"/>
               <a:t>Answers. 1: QUAST (size, contigs, N50), Kleborate's species, contig statistics and QC warnings, and the MultiQC overview. 2: the samplesheet script leaves it out and lists it in samplesheet_assemblies_other_species.tsv with its contigs path; the pipeline types only the K. pneumoniae complex and E. coli. 3: submit exactly the same command again, with the same RUN_NAME: the run starts in the same launch folder and -resume reuses every finished step. 4: one submitter avoids duplicate runs and saves the limited computing allowance; one run per species gives each its own output folder, metadata and figures.</a:t>
             </a:r>
-            <a:endParaRPr lang="en-US" dirty="0"/>
           </a:p>
         </p:txBody>
       </p:sp>
@@ -2025,7 +1789,6 @@
               <a:rPr lang="en-US" dirty="0"/>
               <a:t>Country runs will usually finish overnight. Start Day 6 by checking each run's log and the QC slide's checks before moving to the trees.</a:t>
             </a:r>
-            <a:endParaRPr lang="en-US" dirty="0"/>
           </a:p>
         </p:txBody>
       </p:sp>
@@ -2113,7 +1876,6 @@
               <a:rPr lang="en-US" dirty="0"/>
               <a:t>Wrap up: the pipeline runs everything from Days 1 to 5 in one command, and each country now has its own run on its own genomes.</a:t>
             </a:r>
-            <a:endParaRPr lang="en-US" dirty="0"/>
           </a:p>
         </p:txBody>
       </p:sp>
@@ -2201,7 +1963,6 @@
               <a:rPr lang="en-US" dirty="0"/>
               <a:t>Objective 1 is Session 3. Objectives 2 to 4 are Session 4, on each country's own data.</a:t>
             </a:r>
-            <a:endParaRPr lang="en-US" dirty="0"/>
           </a:p>
         </p:txBody>
       </p:sp>
@@ -2289,7 +2050,6 @@
               <a:rPr lang="en-US" dirty="0"/>
               <a:t>Session 3. A pipeline makes the analysis repeatable: the same steps, the same software versions and the same settings for every isolate and every country. Nextflow runs each step as its own job, keeps track of what has finished, and can resume after a stop.</a:t>
             </a:r>
-            <a:endParaRPr lang="en-US" dirty="0"/>
           </a:p>
         </p:txBody>
       </p:sp>
@@ -2377,7 +2137,6 @@
               <a:rPr lang="en-US" dirty="0"/>
               <a:t>This is the workflow figure from the pipeline README, laid out left to right. The names in capitals are the Nextflow processes you will see in the progress log. Each box is a subworkflow, and the module numbers match the course days: read QC on Day 1, assembly on Day 2, typing and AMR on Days 3 to 5, phylogeny on Days 6 and 7, capsule types on Day 8. Kleborate's species and ST decide the phylogeny groups: one tree per ST. The dashed boxes are switched on with the options shown.</a:t>
             </a:r>
-            <a:endParaRPr lang="en-US" dirty="0"/>
           </a:p>
         </p:txBody>
       </p:sp>
@@ -2465,7 +2224,6 @@
               <a:rPr lang="en-US" dirty="0"/>
               <a:t>Look inside one module: cat modules/local/kleborate/main.nf and environment.yml in $SHARED/neonatal-amr-nf. nf-core modules are shared by the whole community and updated centrally; local modules follow the same layout for tools nf-core does not cover yet, such as Kleborate version 3 and Autocycler.</a:t>
             </a:r>
-            <a:endParaRPr lang="en-US" dirty="0"/>
           </a:p>
         </p:txBody>
       </p:sp>
@@ -2553,7 +2311,6 @@
               <a:rPr lang="en-US" dirty="0"/>
               <a:t>These are the same images use_tools has used all week. If an image is missing, the run stops before it starts with a message saying so: tell a trainer; it cannot be fixed from a participant account, by design. MANIFEST.tsv in the containers folder records where each image came from.</a:t>
             </a:r>
-            <a:endParaRPr lang="en-US" dirty="0"/>
           </a:p>
         </p:txBody>
       </p:sp>
@@ -2641,7 +2398,6 @@
               <a:rPr lang="en-US" dirty="0"/>
               <a:t>Everyone runs this on the head node: it is light. Compare the folder tree it creates with the workflow figure: one folder per stage, numbered in course order.</a:t>
             </a:r>
-            <a:endParaRPr lang="en-US" dirty="0"/>
           </a:p>
         </p:txBody>
       </p:sp>
@@ -2729,7 +2485,6 @@
               <a:rPr lang="en-US" dirty="0"/>
               <a:t>Answer: fastp re-runs, because its command changed. Every step that uses the trimmed Illumina reads, directly or indirectly, also re-runs: Shovill, short-read polishing, typing, AMR, plasmids, phylogeny and MultiQC. Steps that use only the Nanopore reads (Filtlong, NanoPlot, Autocycler, Medaka) and the AMRFinderPlus database download are reused from the cache. -resume is what lets a stopped country run continue later without repeating finished work.</a:t>
             </a:r>
-            <a:endParaRPr lang="en-US" dirty="0"/>
           </a:p>
         </p:txBody>
       </p:sp>
@@ -2807,6 +2562,7 @@
         <a:solidFill>
           <a:srgbClr val="F9F2EA"/>
         </a:solidFill>
+        <a:effectLst/>
       </p:bgPr>
     </p:bg>
     <p:spTree>
@@ -2826,7 +2582,9 @@
       <p:sp>
         <p:nvSpPr>
           <p:cNvPr id="2" name="Title Placeholder 1"/>
-          <p:cNvSpPr/>
+          <p:cNvSpPr>
+            <a:spLocks noGrp="1"/>
+          </p:cNvSpPr>
           <p:nvPr>
             <p:ph type="title"/>
           </p:nvPr>
@@ -2845,7 +2603,7 @@
         <p:txBody>
           <a:bodyPr wrap="square" lIns="0" tIns="0" rIns="0" bIns="0" rtlCol="0" anchor="t"/>
           <a:lstStyle>
-            <a:lvl1pPr algn="l" indent="0" marL="0">
+            <a:lvl1pPr marL="0" indent="0" algn="l">
               <a:lnSpc>
                 <a:spcPct val="115000"/>
               </a:lnSpc>
@@ -2861,7 +2619,7 @@
             </a:lvl1pPr>
           </a:lstStyle>
           <a:p>
-            <a:pPr algn="l" indent="0" marL="0">
+            <a:pPr marL="0" indent="0" algn="l">
               <a:lnSpc>
                 <a:spcPct val="115000"/>
               </a:lnSpc>
@@ -2874,9 +2632,11 @@
       <p:sp>
         <p:nvSpPr>
           <p:cNvPr id="3" name="Text Placeholder 2"/>
-          <p:cNvSpPr/>
+          <p:cNvSpPr>
+            <a:spLocks noGrp="1"/>
+          </p:cNvSpPr>
           <p:nvPr>
-            <p:ph idx="101" type="body"/>
+            <p:ph type="body" idx="101"/>
           </p:nvPr>
         </p:nvSpPr>
         <p:spPr>
@@ -2893,7 +2653,7 @@
         <p:txBody>
           <a:bodyPr wrap="square" lIns="0" tIns="0" rIns="0" bIns="0" rtlCol="0" anchor="t"/>
           <a:lstStyle>
-            <a:lvl1pPr algn="l" indent="0" marL="0">
+            <a:lvl1pPr marL="0" indent="0" algn="l">
               <a:lnSpc>
                 <a:spcPct val="140000"/>
               </a:lnSpc>
@@ -2909,7 +2669,7 @@
             </a:lvl1pPr>
           </a:lstStyle>
           <a:p>
-            <a:pPr algn="l" indent="0" marL="0">
+            <a:pPr marL="0" indent="0" algn="l">
               <a:lnSpc>
                 <a:spcPct val="140000"/>
               </a:lnSpc>
@@ -2935,6 +2695,7 @@
         <a:solidFill>
           <a:srgbClr val="F9F2EA"/>
         </a:solidFill>
+        <a:effectLst/>
       </p:bgPr>
     </p:bg>
     <p:spTree>
@@ -2954,7 +2715,9 @@
       <p:sp>
         <p:nvSpPr>
           <p:cNvPr id="2" name="Title Placeholder 1"/>
-          <p:cNvSpPr/>
+          <p:cNvSpPr>
+            <a:spLocks noGrp="1"/>
+          </p:cNvSpPr>
           <p:nvPr>
             <p:ph type="title"/>
           </p:nvPr>
@@ -2973,7 +2736,7 @@
         <p:txBody>
           <a:bodyPr wrap="square" lIns="0" tIns="0" rIns="0" bIns="0" rtlCol="0" anchor="t"/>
           <a:lstStyle>
-            <a:lvl1pPr algn="l" indent="0" marL="0">
+            <a:lvl1pPr marL="0" indent="0" algn="l">
               <a:lnSpc>
                 <a:spcPct val="115000"/>
               </a:lnSpc>
@@ -2989,7 +2752,7 @@
             </a:lvl1pPr>
           </a:lstStyle>
           <a:p>
-            <a:pPr algn="l" indent="0" marL="0">
+            <a:pPr marL="0" indent="0" algn="l">
               <a:lnSpc>
                 <a:spcPct val="115000"/>
               </a:lnSpc>
@@ -3002,9 +2765,11 @@
       <p:sp>
         <p:nvSpPr>
           <p:cNvPr id="3" name="Text Placeholder 2"/>
-          <p:cNvSpPr/>
+          <p:cNvSpPr>
+            <a:spLocks noGrp="1"/>
+          </p:cNvSpPr>
           <p:nvPr>
-            <p:ph idx="101" type="body"/>
+            <p:ph type="body" idx="101"/>
           </p:nvPr>
         </p:nvSpPr>
         <p:spPr>
@@ -3021,7 +2786,7 @@
         <p:txBody>
           <a:bodyPr wrap="square" lIns="0" tIns="0" rIns="0" bIns="0" rtlCol="0" anchor="t"/>
           <a:lstStyle>
-            <a:lvl1pPr algn="l" indent="0" marL="0">
+            <a:lvl1pPr marL="0" indent="0" algn="l">
               <a:lnSpc>
                 <a:spcPct val="140000"/>
               </a:lnSpc>
@@ -3037,7 +2802,7 @@
             </a:lvl1pPr>
           </a:lstStyle>
           <a:p>
-            <a:pPr algn="l" indent="0" marL="0">
+            <a:pPr marL="0" indent="0" algn="l">
               <a:lnSpc>
                 <a:spcPct val="140000"/>
               </a:lnSpc>
@@ -3316,6 +3081,7 @@
         <a:solidFill>
           <a:srgbClr val="891F15"/>
         </a:solidFill>
+        <a:effectLst/>
       </p:bgPr>
     </p:bg>
     <p:spTree>
@@ -3334,15 +3100,15 @@
       </p:grpSpPr>
       <p:pic>
         <p:nvPicPr>
-          <p:cNvPr id="2" name="Image 0" descr="Pastoralists walking with their cattle at dawn">    </p:cNvPr>
+          <p:cNvPr id="2" name="Image 0" descr="Pastoralists walking with their cattle at dawn"/>
           <p:cNvPicPr>
             <a:picLocks noChangeAspect="1"/>
           </p:cNvPicPr>
           <p:nvPr/>
         </p:nvPicPr>
         <p:blipFill>
-          <a:blip r:embed="rId1"/>
-          <a:srcRect l="0" r="0" t="0" b="0"/>
+          <a:blip r:embed="rId3"/>
+          <a:srcRect/>
           <a:stretch/>
         </p:blipFill>
         <p:spPr>
@@ -3357,15 +3123,15 @@
       </p:pic>
       <p:pic>
         <p:nvPicPr>
-          <p:cNvPr id="3" name="Image 1" descr="ILRI and CGIAR logos">    </p:cNvPr>
+          <p:cNvPr id="3" name="Image 1" descr="ILRI and CGIAR logos"/>
           <p:cNvPicPr>
             <a:picLocks noChangeAspect="1"/>
           </p:cNvPicPr>
           <p:nvPr/>
         </p:nvPicPr>
         <p:blipFill>
-          <a:blip r:embed="rId2"/>
-          <a:srcRect l="-36" r="-36" t="0" b="0"/>
+          <a:blip r:embed="rId4"/>
+          <a:srcRect l="-36" r="-36"/>
           <a:stretch/>
         </p:blipFill>
         <p:spPr>
@@ -3401,14 +3167,14 @@
           </a:bodyPr>
           <a:lstStyle/>
           <a:p>
-            <a:pPr algn="l" indent="0" marL="0">
+            <a:pPr marL="0" indent="0" algn="l">
               <a:lnSpc>
                 <a:spcPts val="2240"/>
               </a:lnSpc>
               <a:buNone/>
             </a:pPr>
             <a:r>
-              <a:rPr lang="en-US" sz="1600" b="1" spc="150" kern="0" dirty="0">
+              <a:rPr lang="en-US" sz="1600" b="1" kern="0" spc="150" dirty="0">
                 <a:solidFill>
                   <a:srgbClr val="FFCE00"/>
                 </a:solidFill>
@@ -3425,7 +3191,9 @@
       <p:sp>
         <p:nvSpPr>
           <p:cNvPr id="5" name="Text 1"/>
-          <p:cNvSpPr/>
+          <p:cNvSpPr>
+            <a:spLocks noGrp="1"/>
+          </p:cNvSpPr>
           <p:nvPr>
             <p:ph type="title"/>
           </p:nvPr>
@@ -3447,7 +3215,7 @@
           </a:bodyPr>
           <a:lstStyle/>
           <a:p>
-            <a:pPr algn="l" indent="0" marL="0">
+            <a:pPr marL="0" indent="0" algn="l">
               <a:lnSpc>
                 <a:spcPts val="5460"/>
               </a:lnSpc>
@@ -3491,7 +3259,7 @@
           </a:bodyPr>
           <a:lstStyle/>
           <a:p>
-            <a:pPr algn="l" indent="0" marL="0">
+            <a:pPr marL="0" indent="0" algn="l">
               <a:lnSpc>
                 <a:spcPts val="2600"/>
               </a:lnSpc>
@@ -3535,7 +3303,7 @@
           </a:bodyPr>
           <a:lstStyle/>
           <a:p>
-            <a:pPr algn="l" indent="0" marL="0">
+            <a:pPr marL="0" indent="0" algn="l">
               <a:lnSpc>
                 <a:spcPts val="1960"/>
               </a:lnSpc>
@@ -3588,7 +3356,7 @@
             <a:endParaRPr lang="en-US" sz="1400" dirty="0"/>
           </a:p>
           <a:p>
-            <a:pPr algn="l" indent="0" marL="0">
+            <a:pPr marL="0" indent="0" algn="l">
               <a:lnSpc>
                 <a:spcPts val="1960"/>
               </a:lnSpc>
@@ -3632,7 +3400,7 @@
           </a:bodyPr>
           <a:lstStyle/>
           <a:p>
-            <a:pPr algn="l" indent="0" marL="0">
+            <a:pPr marL="0" indent="0" algn="l">
               <a:lnSpc>
                 <a:spcPts val="1680"/>
               </a:lnSpc>
@@ -3669,6 +3437,7 @@
         <a:solidFill>
           <a:srgbClr val="273003"/>
         </a:solidFill>
+        <a:effectLst/>
       </p:bgPr>
     </p:bg>
     <p:spTree>
@@ -3687,15 +3456,15 @@
       </p:grpSpPr>
       <p:pic>
         <p:nvPicPr>
-          <p:cNvPr id="2" name="Image 0" descr="preencoded.png">    </p:cNvPr>
+          <p:cNvPr id="2" name="Image 0" descr="preencoded.png"/>
           <p:cNvPicPr>
             <a:picLocks noChangeAspect="1"/>
           </p:cNvPicPr>
           <p:nvPr/>
         </p:nvPicPr>
         <p:blipFill>
-          <a:blip r:embed="rId1"/>
-          <a:srcRect l="0" r="0" t="0" b="0"/>
+          <a:blip r:embed="rId3"/>
+          <a:srcRect/>
           <a:stretch/>
         </p:blipFill>
         <p:spPr>
@@ -3731,14 +3500,14 @@
           </a:bodyPr>
           <a:lstStyle/>
           <a:p>
-            <a:pPr algn="l" indent="0" marL="0">
+            <a:pPr marL="0" indent="0" algn="l">
               <a:lnSpc>
                 <a:spcPts val="2240"/>
               </a:lnSpc>
               <a:buNone/>
             </a:pPr>
             <a:r>
-              <a:rPr lang="en-US" sz="1600" b="1" spc="150" kern="0" dirty="0">
+              <a:rPr lang="en-US" sz="1600" b="1" kern="0" spc="150" dirty="0">
                 <a:solidFill>
                   <a:srgbClr val="C2CA6E"/>
                 </a:solidFill>
@@ -3755,7 +3524,9 @@
       <p:sp>
         <p:nvSpPr>
           <p:cNvPr id="4" name="Text 1"/>
-          <p:cNvSpPr/>
+          <p:cNvSpPr>
+            <a:spLocks noGrp="1"/>
+          </p:cNvSpPr>
           <p:nvPr>
             <p:ph type="title"/>
           </p:nvPr>
@@ -3777,7 +3548,7 @@
           </a:bodyPr>
           <a:lstStyle/>
           <a:p>
-            <a:pPr algn="l" indent="0" marL="0">
+            <a:pPr marL="0" indent="0" algn="l">
               <a:lnSpc>
                 <a:spcPts val="5040"/>
               </a:lnSpc>
@@ -3821,7 +3592,7 @@
           </a:bodyPr>
           <a:lstStyle/>
           <a:p>
-            <a:pPr algn="l" indent="0" marL="0">
+            <a:pPr marL="0" indent="0" algn="l">
               <a:lnSpc>
                 <a:spcPts val="2600"/>
               </a:lnSpc>
@@ -3865,7 +3636,7 @@
           </a:bodyPr>
           <a:lstStyle/>
           <a:p>
-            <a:pPr algn="l" indent="0" marL="0">
+            <a:pPr marL="0" indent="0" algn="l">
               <a:lnSpc>
                 <a:spcPts val="1680"/>
               </a:lnSpc>
@@ -3909,7 +3680,7 @@
           </a:bodyPr>
           <a:lstStyle/>
           <a:p>
-            <a:pPr algn="r" indent="0" marL="0">
+            <a:pPr marL="0" indent="0" algn="r">
               <a:lnSpc>
                 <a:spcPts val="1680"/>
               </a:lnSpc>
@@ -3946,6 +3717,7 @@
         <a:solidFill>
           <a:srgbClr val="F9F2EA"/>
         </a:solidFill>
+        <a:effectLst/>
       </p:bgPr>
     </p:bg>
     <p:spTree>
@@ -3965,7 +3737,9 @@
       <p:sp>
         <p:nvSpPr>
           <p:cNvPr id="2" name="Text 0"/>
-          <p:cNvSpPr/>
+          <p:cNvSpPr>
+            <a:spLocks noGrp="1"/>
+          </p:cNvSpPr>
           <p:nvPr>
             <p:ph type="title"/>
           </p:nvPr>
@@ -3987,7 +3761,7 @@
           </a:bodyPr>
           <a:lstStyle/>
           <a:p>
-            <a:pPr algn="l" indent="0" marL="0">
+            <a:pPr marL="0" indent="0" algn="l">
               <a:lnSpc>
                 <a:spcPts val="3960"/>
               </a:lnSpc>
@@ -4029,6 +3803,13 @@
           </a:solidFill>
           <a:ln/>
         </p:spPr>
+        <p:txBody>
+          <a:bodyPr/>
+          <a:lstStyle/>
+          <a:p>
+            <a:endParaRPr lang="en-KE"/>
+          </a:p>
+        </p:txBody>
       </p:sp>
       <p:sp>
         <p:nvSpPr>
@@ -4051,6 +3832,13 @@
           </a:solidFill>
           <a:ln/>
         </p:spPr>
+        <p:txBody>
+          <a:bodyPr/>
+          <a:lstStyle/>
+          <a:p>
+            <a:endParaRPr lang="en-KE"/>
+          </a:p>
+        </p:txBody>
       </p:sp>
       <p:sp>
         <p:nvSpPr>
@@ -4075,14 +3863,14 @@
           </a:bodyPr>
           <a:lstStyle/>
           <a:p>
-            <a:pPr algn="l" indent="0" marL="0">
+            <a:pPr marL="0" indent="0" algn="l">
               <a:lnSpc>
                 <a:spcPts val="1680"/>
               </a:lnSpc>
               <a:buNone/>
             </a:pPr>
             <a:r>
-              <a:rPr lang="en-US" sz="1200" b="1" spc="100" kern="0" dirty="0">
+              <a:rPr lang="en-US" sz="1200" b="1" kern="0" spc="100" dirty="0">
                 <a:solidFill>
                   <a:srgbClr val="FFCE00"/>
                 </a:solidFill>
@@ -4119,7 +3907,7 @@
           </a:bodyPr>
           <a:lstStyle/>
           <a:p>
-            <a:pPr algn="l" indent="0" marL="0">
+            <a:pPr marL="0" indent="0" algn="l">
               <a:lnSpc>
                 <a:spcPts val="1820"/>
               </a:lnSpc>
@@ -4210,6 +3998,13 @@
             <a:prstDash val="dash"/>
           </a:ln>
         </p:spPr>
+        <p:txBody>
+          <a:bodyPr/>
+          <a:lstStyle/>
+          <a:p>
+            <a:endParaRPr lang="en-KE"/>
+          </a:p>
+        </p:txBody>
       </p:sp>
       <p:sp>
         <p:nvSpPr>
@@ -4234,7 +4029,7 @@
           </a:bodyPr>
           <a:lstStyle/>
           <a:p>
-            <a:pPr algn="l" indent="0" marL="0">
+            <a:pPr marL="0" indent="0" algn="l">
               <a:lnSpc>
                 <a:spcPts val="1820"/>
               </a:lnSpc>
@@ -4278,7 +4073,7 @@
           </a:bodyPr>
           <a:lstStyle/>
           <a:p>
-            <a:pPr algn="l" indent="0" marL="0">
+            <a:pPr marL="0" indent="0" algn="l">
               <a:lnSpc>
                 <a:spcPts val="1680"/>
               </a:lnSpc>
@@ -4322,7 +4117,7 @@
           </a:bodyPr>
           <a:lstStyle/>
           <a:p>
-            <a:pPr algn="l" indent="0" marL="0">
+            <a:pPr marL="0" indent="0" algn="l">
               <a:lnSpc>
                 <a:spcPts val="1560"/>
               </a:lnSpc>
@@ -4366,7 +4161,7 @@
           </a:bodyPr>
           <a:lstStyle/>
           <a:p>
-            <a:pPr algn="l" indent="0" marL="0">
+            <a:pPr marL="0" indent="0" algn="l">
               <a:lnSpc>
                 <a:spcPts val="1680"/>
               </a:lnSpc>
@@ -4389,15 +4184,15 @@
       </p:sp>
       <p:pic>
         <p:nvPicPr>
-          <p:cNvPr id="12" name="Image 0" descr="arrow-right">    </p:cNvPr>
+          <p:cNvPr id="12" name="Image 0" descr="arrow-right"/>
           <p:cNvPicPr>
             <a:picLocks noChangeAspect="1"/>
           </p:cNvPicPr>
           <p:nvPr/>
         </p:nvPicPr>
         <p:blipFill>
-          <a:blip r:embed="rId1"/>
-          <a:srcRect l="0" r="0" t="0" b="0"/>
+          <a:blip r:embed="rId3"/>
+          <a:srcRect/>
           <a:stretch/>
         </p:blipFill>
         <p:spPr>
@@ -4431,6 +4226,13 @@
           </a:solidFill>
           <a:ln/>
         </p:spPr>
+        <p:txBody>
+          <a:bodyPr/>
+          <a:lstStyle/>
+          <a:p>
+            <a:endParaRPr lang="en-KE"/>
+          </a:p>
+        </p:txBody>
       </p:sp>
       <p:sp>
         <p:nvSpPr>
@@ -4457,11 +4259,11 @@
                 <a:lnTo>
                   <a:pt x="0" y="50800"/>
                 </a:lnTo>
-                <a:arcTo hR="50800" wR="50800" stAng="10800000" swAng="5400000"/>
+                <a:arcTo wR="50800" hR="50800" stAng="10800000" swAng="5400000"/>
                 <a:lnTo>
                   <a:pt x="1813570" y="0"/>
                 </a:lnTo>
-                <a:arcTo hR="50800" wR="50800" stAng="16200000" swAng="5400000"/>
+                <a:arcTo wR="50800" hR="50800" stAng="16200000" swAng="5400000"/>
                 <a:lnTo>
                   <a:pt x="1864370" y="50800"/>
                 </a:lnTo>
@@ -4477,6 +4279,13 @@
           </a:solidFill>
           <a:ln/>
         </p:spPr>
+        <p:txBody>
+          <a:bodyPr/>
+          <a:lstStyle/>
+          <a:p>
+            <a:endParaRPr lang="en-KE"/>
+          </a:p>
+        </p:txBody>
       </p:sp>
       <p:sp>
         <p:nvSpPr>
@@ -4501,7 +4310,7 @@
           </a:bodyPr>
           <a:lstStyle/>
           <a:p>
-            <a:pPr algn="l" indent="0" marL="0">
+            <a:pPr marL="0" indent="0" algn="l">
               <a:lnSpc>
                 <a:spcPts val="1820"/>
               </a:lnSpc>
@@ -4545,7 +4354,7 @@
           </a:bodyPr>
           <a:lstStyle/>
           <a:p>
-            <a:pPr algn="l" indent="0" marL="0">
+            <a:pPr marL="0" indent="0" algn="l">
               <a:lnSpc>
                 <a:spcPts val="1680"/>
               </a:lnSpc>
@@ -4589,7 +4398,7 @@
           </a:bodyPr>
           <a:lstStyle/>
           <a:p>
-            <a:pPr algn="l" indent="0" marL="0">
+            <a:pPr marL="0" indent="0" algn="l">
               <a:lnSpc>
                 <a:spcPts val="1560"/>
               </a:lnSpc>
@@ -4633,7 +4442,7 @@
           </a:bodyPr>
           <a:lstStyle/>
           <a:p>
-            <a:pPr algn="l" indent="0" marL="0">
+            <a:pPr marL="0" indent="0" algn="l">
               <a:lnSpc>
                 <a:spcPts val="1560"/>
               </a:lnSpc>
@@ -4688,7 +4497,7 @@
           </a:bodyPr>
           <a:lstStyle/>
           <a:p>
-            <a:pPr algn="l" indent="0" marL="0">
+            <a:pPr marL="0" indent="0" algn="l">
               <a:lnSpc>
                 <a:spcPts val="1560"/>
               </a:lnSpc>
@@ -4711,15 +4520,15 @@
       </p:sp>
       <p:pic>
         <p:nvPicPr>
-          <p:cNvPr id="20" name="Image 1" descr="arrow-right">    </p:cNvPr>
+          <p:cNvPr id="20" name="Image 1" descr="arrow-right"/>
           <p:cNvPicPr>
             <a:picLocks noChangeAspect="1"/>
           </p:cNvPicPr>
           <p:nvPr/>
         </p:nvPicPr>
         <p:blipFill>
-          <a:blip r:embed="rId2"/>
-          <a:srcRect l="0" r="0" t="0" b="0"/>
+          <a:blip r:embed="rId3"/>
+          <a:srcRect/>
           <a:stretch/>
         </p:blipFill>
         <p:spPr>
@@ -4753,6 +4562,13 @@
           </a:solidFill>
           <a:ln/>
         </p:spPr>
+        <p:txBody>
+          <a:bodyPr/>
+          <a:lstStyle/>
+          <a:p>
+            <a:endParaRPr lang="en-KE"/>
+          </a:p>
+        </p:txBody>
       </p:sp>
       <p:sp>
         <p:nvSpPr>
@@ -4779,11 +4595,11 @@
                 <a:lnTo>
                   <a:pt x="0" y="50800"/>
                 </a:lnTo>
-                <a:arcTo hR="50800" wR="50800" stAng="10800000" swAng="5400000"/>
+                <a:arcTo wR="50800" hR="50800" stAng="10800000" swAng="5400000"/>
                 <a:lnTo>
                   <a:pt x="1813570" y="0"/>
                 </a:lnTo>
-                <a:arcTo hR="50800" wR="50800" stAng="16200000" swAng="5400000"/>
+                <a:arcTo wR="50800" hR="50800" stAng="16200000" swAng="5400000"/>
                 <a:lnTo>
                   <a:pt x="1864370" y="50800"/>
                 </a:lnTo>
@@ -4799,6 +4615,13 @@
           </a:solidFill>
           <a:ln/>
         </p:spPr>
+        <p:txBody>
+          <a:bodyPr/>
+          <a:lstStyle/>
+          <a:p>
+            <a:endParaRPr lang="en-KE"/>
+          </a:p>
+        </p:txBody>
       </p:sp>
       <p:sp>
         <p:nvSpPr>
@@ -4823,7 +4646,7 @@
           </a:bodyPr>
           <a:lstStyle/>
           <a:p>
-            <a:pPr algn="l" indent="0" marL="0">
+            <a:pPr marL="0" indent="0" algn="l">
               <a:lnSpc>
                 <a:spcPts val="1820"/>
               </a:lnSpc>
@@ -4867,7 +4690,7 @@
           </a:bodyPr>
           <a:lstStyle/>
           <a:p>
-            <a:pPr algn="l" indent="0" marL="0">
+            <a:pPr marL="0" indent="0" algn="l">
               <a:lnSpc>
                 <a:spcPts val="1680"/>
               </a:lnSpc>
@@ -4911,7 +4734,7 @@
           </a:bodyPr>
           <a:lstStyle/>
           <a:p>
-            <a:pPr algn="l" indent="0" marL="0">
+            <a:pPr marL="0" indent="0" algn="l">
               <a:lnSpc>
                 <a:spcPts val="1560"/>
               </a:lnSpc>
@@ -4955,7 +4778,7 @@
           </a:bodyPr>
           <a:lstStyle/>
           <a:p>
-            <a:pPr algn="l" indent="0" marL="0">
+            <a:pPr marL="0" indent="0" algn="l">
               <a:lnSpc>
                 <a:spcPts val="1560"/>
               </a:lnSpc>
@@ -5010,7 +4833,7 @@
           </a:bodyPr>
           <a:lstStyle/>
           <a:p>
-            <a:pPr algn="l" indent="0" marL="0">
+            <a:pPr marL="0" indent="0" algn="l">
               <a:lnSpc>
                 <a:spcPts val="1560"/>
               </a:lnSpc>
@@ -5054,7 +4877,7 @@
           </a:bodyPr>
           <a:lstStyle/>
           <a:p>
-            <a:pPr algn="l" indent="0" marL="0">
+            <a:pPr marL="0" indent="0" algn="l">
               <a:lnSpc>
                 <a:spcPts val="1560"/>
               </a:lnSpc>
@@ -5077,7 +4900,7 @@
       </p:sp>
       <p:pic>
         <p:nvPicPr>
-          <p:cNvPr id="29" name="Image 2" descr="arrow-right">    </p:cNvPr>
+          <p:cNvPr id="29" name="Image 2" descr="arrow-right"/>
           <p:cNvPicPr>
             <a:picLocks noChangeAspect="1"/>
           </p:cNvPicPr>
@@ -5085,7 +4908,7 @@
         </p:nvPicPr>
         <p:blipFill>
           <a:blip r:embed="rId3"/>
-          <a:srcRect l="0" r="0" t="0" b="0"/>
+          <a:srcRect/>
           <a:stretch/>
         </p:blipFill>
         <p:spPr>
@@ -5119,6 +4942,13 @@
           </a:solidFill>
           <a:ln/>
         </p:spPr>
+        <p:txBody>
+          <a:bodyPr/>
+          <a:lstStyle/>
+          <a:p>
+            <a:endParaRPr lang="en-KE"/>
+          </a:p>
+        </p:txBody>
       </p:sp>
       <p:sp>
         <p:nvSpPr>
@@ -5145,11 +4975,11 @@
                 <a:lnTo>
                   <a:pt x="0" y="50800"/>
                 </a:lnTo>
-                <a:arcTo hR="50800" wR="50800" stAng="10800000" swAng="5400000"/>
+                <a:arcTo wR="50800" hR="50800" stAng="10800000" swAng="5400000"/>
                 <a:lnTo>
                   <a:pt x="1813570" y="0"/>
                 </a:lnTo>
-                <a:arcTo hR="50800" wR="50800" stAng="16200000" swAng="5400000"/>
+                <a:arcTo wR="50800" hR="50800" stAng="16200000" swAng="5400000"/>
                 <a:lnTo>
                   <a:pt x="1864370" y="50800"/>
                 </a:lnTo>
@@ -5165,6 +4995,13 @@
           </a:solidFill>
           <a:ln/>
         </p:spPr>
+        <p:txBody>
+          <a:bodyPr/>
+          <a:lstStyle/>
+          <a:p>
+            <a:endParaRPr lang="en-KE"/>
+          </a:p>
+        </p:txBody>
       </p:sp>
       <p:sp>
         <p:nvSpPr>
@@ -5189,7 +5026,7 @@
           </a:bodyPr>
           <a:lstStyle/>
           <a:p>
-            <a:pPr algn="l" indent="0" marL="0">
+            <a:pPr marL="0" indent="0" algn="l">
               <a:lnSpc>
                 <a:spcPts val="1820"/>
               </a:lnSpc>
@@ -5233,7 +5070,7 @@
           </a:bodyPr>
           <a:lstStyle/>
           <a:p>
-            <a:pPr algn="l" indent="0" marL="0">
+            <a:pPr marL="0" indent="0" algn="l">
               <a:lnSpc>
                 <a:spcPts val="1680"/>
               </a:lnSpc>
@@ -5277,7 +5114,7 @@
           </a:bodyPr>
           <a:lstStyle/>
           <a:p>
-            <a:pPr algn="l" indent="0" marL="0">
+            <a:pPr marL="0" indent="0" algn="l">
               <a:lnSpc>
                 <a:spcPts val="1560"/>
               </a:lnSpc>
@@ -5321,7 +5158,7 @@
           </a:bodyPr>
           <a:lstStyle/>
           <a:p>
-            <a:pPr algn="l" indent="0" marL="0">
+            <a:pPr marL="0" indent="0" algn="l">
               <a:lnSpc>
                 <a:spcPts val="1560"/>
               </a:lnSpc>
@@ -5365,7 +5202,7 @@
           </a:bodyPr>
           <a:lstStyle/>
           <a:p>
-            <a:pPr algn="l" indent="0" marL="0">
+            <a:pPr marL="0" indent="0" algn="l">
               <a:lnSpc>
                 <a:spcPts val="1560"/>
               </a:lnSpc>
@@ -5388,15 +5225,15 @@
       </p:sp>
       <p:pic>
         <p:nvPicPr>
-          <p:cNvPr id="37" name="Image 3" descr="arrow-right">    </p:cNvPr>
+          <p:cNvPr id="37" name="Image 3" descr="arrow-right"/>
           <p:cNvPicPr>
             <a:picLocks noChangeAspect="1"/>
           </p:cNvPicPr>
           <p:nvPr/>
         </p:nvPicPr>
         <p:blipFill>
-          <a:blip r:embed="rId4"/>
-          <a:srcRect l="0" r="0" t="0" b="0"/>
+          <a:blip r:embed="rId3"/>
+          <a:srcRect/>
           <a:stretch/>
         </p:blipFill>
         <p:spPr>
@@ -5430,6 +5267,13 @@
           </a:solidFill>
           <a:ln/>
         </p:spPr>
+        <p:txBody>
+          <a:bodyPr/>
+          <a:lstStyle/>
+          <a:p>
+            <a:endParaRPr lang="en-KE"/>
+          </a:p>
+        </p:txBody>
       </p:sp>
       <p:sp>
         <p:nvSpPr>
@@ -5456,11 +5300,11 @@
                 <a:lnTo>
                   <a:pt x="0" y="50800"/>
                 </a:lnTo>
-                <a:arcTo hR="50800" wR="50800" stAng="10800000" swAng="5400000"/>
+                <a:arcTo wR="50800" hR="50800" stAng="10800000" swAng="5400000"/>
                 <a:lnTo>
                   <a:pt x="1813570" y="0"/>
                 </a:lnTo>
-                <a:arcTo hR="50800" wR="50800" stAng="16200000" swAng="5400000"/>
+                <a:arcTo wR="50800" hR="50800" stAng="16200000" swAng="5400000"/>
                 <a:lnTo>
                   <a:pt x="1864370" y="50800"/>
                 </a:lnTo>
@@ -5476,6 +5320,13 @@
           </a:solidFill>
           <a:ln/>
         </p:spPr>
+        <p:txBody>
+          <a:bodyPr/>
+          <a:lstStyle/>
+          <a:p>
+            <a:endParaRPr lang="en-KE"/>
+          </a:p>
+        </p:txBody>
       </p:sp>
       <p:sp>
         <p:nvSpPr>
@@ -5500,7 +5351,7 @@
           </a:bodyPr>
           <a:lstStyle/>
           <a:p>
-            <a:pPr algn="l" indent="0" marL="0">
+            <a:pPr marL="0" indent="0" algn="l">
               <a:lnSpc>
                 <a:spcPts val="1820"/>
               </a:lnSpc>
@@ -5544,7 +5395,7 @@
           </a:bodyPr>
           <a:lstStyle/>
           <a:p>
-            <a:pPr algn="l" indent="0" marL="0">
+            <a:pPr marL="0" indent="0" algn="l">
               <a:lnSpc>
                 <a:spcPts val="1680"/>
               </a:lnSpc>
@@ -5588,7 +5439,7 @@
           </a:bodyPr>
           <a:lstStyle/>
           <a:p>
-            <a:pPr algn="l" indent="0" marL="0">
+            <a:pPr marL="0" indent="0" algn="l">
               <a:lnSpc>
                 <a:spcPts val="1560"/>
               </a:lnSpc>
@@ -5632,7 +5483,7 @@
           </a:bodyPr>
           <a:lstStyle/>
           <a:p>
-            <a:pPr algn="l" indent="0" marL="0">
+            <a:pPr marL="0" indent="0" algn="l">
               <a:lnSpc>
                 <a:spcPts val="1560"/>
               </a:lnSpc>
@@ -5675,6 +5526,13 @@
             <a:prstDash val="solid"/>
           </a:ln>
         </p:spPr>
+        <p:txBody>
+          <a:bodyPr/>
+          <a:lstStyle/>
+          <a:p>
+            <a:endParaRPr lang="en-KE"/>
+          </a:p>
+        </p:txBody>
       </p:sp>
       <p:sp>
         <p:nvSpPr>
@@ -5699,7 +5557,7 @@
           </a:bodyPr>
           <a:lstStyle/>
           <a:p>
-            <a:pPr algn="l" indent="0" marL="0">
+            <a:pPr marL="0" indent="0" algn="l">
               <a:lnSpc>
                 <a:spcPts val="1890"/>
               </a:lnSpc>
@@ -5766,15 +5624,15 @@
       </p:sp>
       <p:pic>
         <p:nvPicPr>
-          <p:cNvPr id="46" name="Image 4" descr="ILRI and CGIAR logos">    </p:cNvPr>
+          <p:cNvPr id="46" name="Image 4" descr="ILRI and CGIAR logos"/>
           <p:cNvPicPr>
             <a:picLocks noChangeAspect="1"/>
           </p:cNvPicPr>
           <p:nvPr/>
         </p:nvPicPr>
         <p:blipFill>
-          <a:blip r:embed="rId5"/>
-          <a:srcRect l="-56" r="-56" t="0" b="0"/>
+          <a:blip r:embed="rId4"/>
+          <a:srcRect l="-56" r="-56"/>
           <a:stretch/>
         </p:blipFill>
         <p:spPr>
@@ -5810,7 +5668,7 @@
           </a:bodyPr>
           <a:lstStyle/>
           <a:p>
-            <a:pPr algn="l" indent="0" marL="0">
+            <a:pPr marL="0" indent="0" algn="l">
               <a:lnSpc>
                 <a:spcPts val="1680"/>
               </a:lnSpc>
@@ -5854,7 +5712,7 @@
           </a:bodyPr>
           <a:lstStyle/>
           <a:p>
-            <a:pPr algn="r" indent="0" marL="0">
+            <a:pPr marL="0" indent="0" algn="r">
               <a:lnSpc>
                 <a:spcPts val="1680"/>
               </a:lnSpc>
@@ -5891,6 +5749,7 @@
         <a:solidFill>
           <a:srgbClr val="F9F2EA"/>
         </a:solidFill>
+        <a:effectLst/>
       </p:bgPr>
     </p:bg>
     <p:spTree>
@@ -5910,7 +5769,9 @@
       <p:sp>
         <p:nvSpPr>
           <p:cNvPr id="2" name="Text 0"/>
-          <p:cNvSpPr/>
+          <p:cNvSpPr>
+            <a:spLocks noGrp="1"/>
+          </p:cNvSpPr>
           <p:nvPr>
             <p:ph type="title"/>
           </p:nvPr>
@@ -5932,7 +5793,7 @@
           </a:bodyPr>
           <a:lstStyle/>
           <a:p>
-            <a:pPr algn="l" indent="0" marL="0">
+            <a:pPr marL="0" indent="0" algn="l">
               <a:lnSpc>
                 <a:spcPts val="3960"/>
               </a:lnSpc>
@@ -5974,6 +5835,13 @@
           </a:solidFill>
           <a:ln/>
         </p:spPr>
+        <p:txBody>
+          <a:bodyPr/>
+          <a:lstStyle/>
+          <a:p>
+            <a:endParaRPr lang="en-KE"/>
+          </a:p>
+        </p:txBody>
       </p:sp>
       <p:sp>
         <p:nvSpPr>
@@ -5996,6 +5864,13 @@
           </a:solidFill>
           <a:ln/>
         </p:spPr>
+        <p:txBody>
+          <a:bodyPr/>
+          <a:lstStyle/>
+          <a:p>
+            <a:endParaRPr lang="en-KE"/>
+          </a:p>
+        </p:txBody>
       </p:sp>
       <p:sp>
         <p:nvSpPr>
@@ -6020,14 +5895,14 @@
           </a:bodyPr>
           <a:lstStyle/>
           <a:p>
-            <a:pPr algn="l" indent="0" marL="0">
+            <a:pPr marL="0" indent="0" algn="l">
               <a:lnSpc>
                 <a:spcPts val="1680"/>
               </a:lnSpc>
               <a:buNone/>
             </a:pPr>
             <a:r>
-              <a:rPr lang="en-US" sz="1200" b="1" spc="100" kern="0" dirty="0">
+              <a:rPr lang="en-US" sz="1200" b="1" kern="0" spc="100" dirty="0">
                 <a:solidFill>
                   <a:srgbClr val="FFCE00"/>
                 </a:solidFill>
@@ -6064,7 +5939,7 @@
           </a:bodyPr>
           <a:lstStyle/>
           <a:p>
-            <a:pPr algn="l" indent="0" marL="0">
+            <a:pPr marL="0" indent="0" algn="l">
               <a:lnSpc>
                 <a:spcPts val="1690"/>
               </a:lnSpc>
@@ -6087,15 +5962,15 @@
       </p:sp>
       <p:pic>
         <p:nvPicPr>
-          <p:cNvPr id="7" name="Image 0" descr="arrow-right">    </p:cNvPr>
+          <p:cNvPr id="7" name="Image 0" descr="arrow-right"/>
           <p:cNvPicPr>
             <a:picLocks noChangeAspect="1"/>
           </p:cNvPicPr>
           <p:nvPr/>
         </p:nvPicPr>
         <p:blipFill>
-          <a:blip r:embed="rId1"/>
-          <a:srcRect l="0" r="0" t="0" b="0"/>
+          <a:blip r:embed="rId3"/>
+          <a:srcRect/>
           <a:stretch/>
         </p:blipFill>
         <p:spPr>
@@ -6129,6 +6004,13 @@
           </a:solidFill>
           <a:ln/>
         </p:spPr>
+        <p:txBody>
+          <a:bodyPr/>
+          <a:lstStyle/>
+          <a:p>
+            <a:endParaRPr lang="en-KE"/>
+          </a:p>
+        </p:txBody>
       </p:sp>
       <p:sp>
         <p:nvSpPr>
@@ -6153,14 +6035,14 @@
           </a:bodyPr>
           <a:lstStyle/>
           <a:p>
-            <a:pPr algn="l" indent="0" marL="0">
+            <a:pPr marL="0" indent="0" algn="l">
               <a:lnSpc>
                 <a:spcPts val="1680"/>
               </a:lnSpc>
               <a:buNone/>
             </a:pPr>
             <a:r>
-              <a:rPr lang="en-US" sz="1200" b="1" spc="100" kern="0" dirty="0">
+              <a:rPr lang="en-US" sz="1200" b="1" kern="0" spc="100" dirty="0">
                 <a:solidFill>
                   <a:srgbClr val="FFCE00"/>
                 </a:solidFill>
@@ -6197,7 +6079,7 @@
           </a:bodyPr>
           <a:lstStyle/>
           <a:p>
-            <a:pPr algn="l" indent="0" marL="0">
+            <a:pPr marL="0" indent="0" algn="l">
               <a:lnSpc>
                 <a:spcPts val="1690"/>
               </a:lnSpc>
@@ -6253,15 +6135,15 @@
       </p:sp>
       <p:pic>
         <p:nvPicPr>
-          <p:cNvPr id="11" name="Image 1" descr="arrow-right">    </p:cNvPr>
+          <p:cNvPr id="11" name="Image 1" descr="arrow-right"/>
           <p:cNvPicPr>
             <a:picLocks noChangeAspect="1"/>
           </p:cNvPicPr>
           <p:nvPr/>
         </p:nvPicPr>
         <p:blipFill>
-          <a:blip r:embed="rId2"/>
-          <a:srcRect l="0" r="0" t="0" b="0"/>
+          <a:blip r:embed="rId3"/>
+          <a:srcRect/>
           <a:stretch/>
         </p:blipFill>
         <p:spPr>
@@ -6295,6 +6177,13 @@
           </a:solidFill>
           <a:ln/>
         </p:spPr>
+        <p:txBody>
+          <a:bodyPr/>
+          <a:lstStyle/>
+          <a:p>
+            <a:endParaRPr lang="en-KE"/>
+          </a:p>
+        </p:txBody>
       </p:sp>
       <p:sp>
         <p:nvSpPr>
@@ -6319,14 +6208,14 @@
           </a:bodyPr>
           <a:lstStyle/>
           <a:p>
-            <a:pPr algn="l" indent="0" marL="0">
+            <a:pPr marL="0" indent="0" algn="l">
               <a:lnSpc>
                 <a:spcPts val="1680"/>
               </a:lnSpc>
               <a:buNone/>
             </a:pPr>
             <a:r>
-              <a:rPr lang="en-US" sz="1200" b="1" spc="100" kern="0" dirty="0">
+              <a:rPr lang="en-US" sz="1200" b="1" kern="0" spc="100" dirty="0">
                 <a:solidFill>
                   <a:srgbClr val="FFCE00"/>
                 </a:solidFill>
@@ -6363,7 +6252,7 @@
           </a:bodyPr>
           <a:lstStyle/>
           <a:p>
-            <a:pPr algn="l" indent="0" marL="0">
+            <a:pPr marL="0" indent="0" algn="l">
               <a:lnSpc>
                 <a:spcPts val="1690"/>
               </a:lnSpc>
@@ -6386,7 +6275,7 @@
       </p:sp>
       <p:pic>
         <p:nvPicPr>
-          <p:cNvPr id="15" name="Image 2" descr="arrow-right">    </p:cNvPr>
+          <p:cNvPr id="15" name="Image 2" descr="arrow-right"/>
           <p:cNvPicPr>
             <a:picLocks noChangeAspect="1"/>
           </p:cNvPicPr>
@@ -6394,7 +6283,7 @@
         </p:nvPicPr>
         <p:blipFill>
           <a:blip r:embed="rId3"/>
-          <a:srcRect l="0" r="0" t="0" b="0"/>
+          <a:srcRect/>
           <a:stretch/>
         </p:blipFill>
         <p:spPr>
@@ -6428,6 +6317,13 @@
           </a:solidFill>
           <a:ln/>
         </p:spPr>
+        <p:txBody>
+          <a:bodyPr/>
+          <a:lstStyle/>
+          <a:p>
+            <a:endParaRPr lang="en-KE"/>
+          </a:p>
+        </p:txBody>
       </p:sp>
       <p:sp>
         <p:nvSpPr>
@@ -6452,14 +6348,14 @@
           </a:bodyPr>
           <a:lstStyle/>
           <a:p>
-            <a:pPr algn="l" indent="0" marL="0">
+            <a:pPr marL="0" indent="0" algn="l">
               <a:lnSpc>
                 <a:spcPts val="1680"/>
               </a:lnSpc>
               <a:buNone/>
             </a:pPr>
             <a:r>
-              <a:rPr lang="en-US" sz="1200" b="1" spc="100" kern="0" dirty="0">
+              <a:rPr lang="en-US" sz="1200" b="1" kern="0" spc="100" dirty="0">
                 <a:solidFill>
                   <a:srgbClr val="FFCE00"/>
                 </a:solidFill>
@@ -6496,7 +6392,7 @@
           </a:bodyPr>
           <a:lstStyle/>
           <a:p>
-            <a:pPr algn="l" indent="0" marL="0">
+            <a:pPr marL="0" indent="0" algn="l">
               <a:lnSpc>
                 <a:spcPts val="1690"/>
               </a:lnSpc>
@@ -6538,6 +6434,13 @@
           </a:solidFill>
           <a:ln/>
         </p:spPr>
+        <p:txBody>
+          <a:bodyPr/>
+          <a:lstStyle/>
+          <a:p>
+            <a:endParaRPr lang="en-KE"/>
+          </a:p>
+        </p:txBody>
       </p:sp>
       <p:sp>
         <p:nvSpPr>
@@ -6564,11 +6467,11 @@
                 <a:lnTo>
                   <a:pt x="0" y="50800"/>
                 </a:lnTo>
-                <a:arcTo hR="50800" wR="50800" stAng="10800000" swAng="5400000"/>
+                <a:arcTo wR="50800" hR="50800" stAng="10800000" swAng="5400000"/>
                 <a:lnTo>
                   <a:pt x="5105400" y="0"/>
                 </a:lnTo>
-                <a:arcTo hR="50800" wR="50800" stAng="16200000" swAng="5400000"/>
+                <a:arcTo wR="50800" hR="50800" stAng="16200000" swAng="5400000"/>
                 <a:lnTo>
                   <a:pt x="5156200" y="50800"/>
                 </a:lnTo>
@@ -6584,6 +6487,13 @@
           </a:solidFill>
           <a:ln/>
         </p:spPr>
+        <p:txBody>
+          <a:bodyPr/>
+          <a:lstStyle/>
+          <a:p>
+            <a:endParaRPr lang="en-KE"/>
+          </a:p>
+        </p:txBody>
       </p:sp>
       <p:sp>
         <p:nvSpPr>
@@ -6608,7 +6518,7 @@
           </a:bodyPr>
           <a:lstStyle/>
           <a:p>
-            <a:pPr algn="l" indent="0" marL="0">
+            <a:pPr marL="0" indent="0" algn="l">
               <a:lnSpc>
                 <a:spcPts val="1920"/>
               </a:lnSpc>
@@ -6652,7 +6562,7 @@
           </a:bodyPr>
           <a:lstStyle/>
           <a:p>
-            <a:pPr algn="l" indent="0" marL="0">
+            <a:pPr marL="0" indent="0" algn="l">
               <a:lnSpc>
                 <a:spcPts val="1890"/>
               </a:lnSpc>
@@ -6694,6 +6604,13 @@
           </a:solidFill>
           <a:ln/>
         </p:spPr>
+        <p:txBody>
+          <a:bodyPr/>
+          <a:lstStyle/>
+          <a:p>
+            <a:endParaRPr lang="en-KE"/>
+          </a:p>
+        </p:txBody>
       </p:sp>
       <p:sp>
         <p:nvSpPr>
@@ -6720,11 +6637,11 @@
                 <a:lnTo>
                   <a:pt x="0" y="50800"/>
                 </a:lnTo>
-                <a:arcTo hR="50800" wR="50800" stAng="10800000" swAng="5400000"/>
+                <a:arcTo wR="50800" hR="50800" stAng="10800000" swAng="5400000"/>
                 <a:lnTo>
                   <a:pt x="5105400" y="0"/>
                 </a:lnTo>
-                <a:arcTo hR="50800" wR="50800" stAng="16200000" swAng="5400000"/>
+                <a:arcTo wR="50800" hR="50800" stAng="16200000" swAng="5400000"/>
                 <a:lnTo>
                   <a:pt x="5156200" y="50800"/>
                 </a:lnTo>
@@ -6740,6 +6657,13 @@
           </a:solidFill>
           <a:ln/>
         </p:spPr>
+        <p:txBody>
+          <a:bodyPr/>
+          <a:lstStyle/>
+          <a:p>
+            <a:endParaRPr lang="en-KE"/>
+          </a:p>
+        </p:txBody>
       </p:sp>
       <p:sp>
         <p:nvSpPr>
@@ -6764,7 +6688,7 @@
           </a:bodyPr>
           <a:lstStyle/>
           <a:p>
-            <a:pPr algn="l" indent="0" marL="0">
+            <a:pPr marL="0" indent="0" algn="l">
               <a:lnSpc>
                 <a:spcPts val="1920"/>
               </a:lnSpc>
@@ -6808,7 +6732,7 @@
           </a:bodyPr>
           <a:lstStyle/>
           <a:p>
-            <a:pPr algn="l" indent="0" marL="0">
+            <a:pPr marL="0" indent="0" algn="l">
               <a:lnSpc>
                 <a:spcPts val="1890"/>
               </a:lnSpc>
@@ -6831,7 +6755,7 @@
       </p:sp>
       <p:pic>
         <p:nvPicPr>
-          <p:cNvPr id="27" name="Image 3" descr="ILRI and CGIAR logos">    </p:cNvPr>
+          <p:cNvPr id="27" name="Image 3" descr="ILRI and CGIAR logos"/>
           <p:cNvPicPr>
             <a:picLocks noChangeAspect="1"/>
           </p:cNvPicPr>
@@ -6839,7 +6763,7 @@
         </p:nvPicPr>
         <p:blipFill>
           <a:blip r:embed="rId4"/>
-          <a:srcRect l="-56" r="-56" t="0" b="0"/>
+          <a:srcRect l="-56" r="-56"/>
           <a:stretch/>
         </p:blipFill>
         <p:spPr>
@@ -6875,7 +6799,7 @@
           </a:bodyPr>
           <a:lstStyle/>
           <a:p>
-            <a:pPr algn="l" indent="0" marL="0">
+            <a:pPr marL="0" indent="0" algn="l">
               <a:lnSpc>
                 <a:spcPts val="1680"/>
               </a:lnSpc>
@@ -6919,7 +6843,7 @@
           </a:bodyPr>
           <a:lstStyle/>
           <a:p>
-            <a:pPr algn="r" indent="0" marL="0">
+            <a:pPr marL="0" indent="0" algn="r">
               <a:lnSpc>
                 <a:spcPts val="1680"/>
               </a:lnSpc>
@@ -6956,6 +6880,7 @@
         <a:solidFill>
           <a:srgbClr val="F9F2EA"/>
         </a:solidFill>
+        <a:effectLst/>
       </p:bgPr>
     </p:bg>
     <p:spTree>
@@ -6975,7 +6900,9 @@
       <p:sp>
         <p:nvSpPr>
           <p:cNvPr id="2" name="Text 0"/>
-          <p:cNvSpPr/>
+          <p:cNvSpPr>
+            <a:spLocks noGrp="1"/>
+          </p:cNvSpPr>
           <p:nvPr>
             <p:ph type="title"/>
           </p:nvPr>
@@ -6997,7 +6924,7 @@
           </a:bodyPr>
           <a:lstStyle/>
           <a:p>
-            <a:pPr algn="l" indent="0" marL="0">
+            <a:pPr marL="0" indent="0" algn="l">
               <a:lnSpc>
                 <a:spcPts val="3960"/>
               </a:lnSpc>
@@ -7039,6 +6966,13 @@
           </a:solidFill>
           <a:ln/>
         </p:spPr>
+        <p:txBody>
+          <a:bodyPr/>
+          <a:lstStyle/>
+          <a:p>
+            <a:endParaRPr lang="en-KE"/>
+          </a:p>
+        </p:txBody>
       </p:sp>
       <p:sp>
         <p:nvSpPr>
@@ -7061,6 +6995,13 @@
           </a:solidFill>
           <a:ln/>
         </p:spPr>
+        <p:txBody>
+          <a:bodyPr/>
+          <a:lstStyle/>
+          <a:p>
+            <a:endParaRPr lang="en-KE"/>
+          </a:p>
+        </p:txBody>
       </p:sp>
       <p:sp>
         <p:nvSpPr>
@@ -7087,11 +7028,11 @@
                 <a:lnTo>
                   <a:pt x="50800" y="1075630"/>
                 </a:lnTo>
-                <a:arcTo hR="50800" wR="50800" stAng="5400000" swAng="5400000"/>
+                <a:arcTo wR="50800" hR="50800" stAng="5400000" swAng="5400000"/>
                 <a:lnTo>
                   <a:pt x="0" y="50800"/>
                 </a:lnTo>
-                <a:arcTo hR="50800" wR="50800" stAng="10800000" swAng="5400000"/>
+                <a:arcTo wR="50800" hR="50800" stAng="10800000" swAng="5400000"/>
                 <a:lnTo>
                   <a:pt x="50800" y="0"/>
                 </a:lnTo>
@@ -7107,6 +7048,13 @@
           </a:solidFill>
           <a:ln/>
         </p:spPr>
+        <p:txBody>
+          <a:bodyPr/>
+          <a:lstStyle/>
+          <a:p>
+            <a:endParaRPr lang="en-KE"/>
+          </a:p>
+        </p:txBody>
       </p:sp>
       <p:sp>
         <p:nvSpPr>
@@ -7131,14 +7079,14 @@
           </a:bodyPr>
           <a:lstStyle/>
           <a:p>
-            <a:pPr algn="l" indent="0" marL="0">
+            <a:pPr marL="0" indent="0" algn="l">
               <a:lnSpc>
                 <a:spcPts val="1680"/>
               </a:lnSpc>
               <a:buNone/>
             </a:pPr>
             <a:r>
-              <a:rPr lang="en-US" sz="1200" b="1" spc="100" kern="0" dirty="0">
+              <a:rPr lang="en-US" sz="1200" b="1" kern="0" spc="100" dirty="0">
                 <a:solidFill>
                   <a:srgbClr val="273003"/>
                 </a:solidFill>
@@ -7175,7 +7123,7 @@
           </a:bodyPr>
           <a:lstStyle/>
           <a:p>
-            <a:pPr algn="l" indent="0" marL="0">
+            <a:pPr marL="0" indent="0" algn="l">
               <a:lnSpc>
                 <a:spcPts val="2100"/>
               </a:lnSpc>
@@ -7219,7 +7167,7 @@
           </a:bodyPr>
           <a:lstStyle/>
           <a:p>
-            <a:pPr algn="l" indent="0" marL="0">
+            <a:pPr marL="0" indent="0" algn="l">
               <a:lnSpc>
                 <a:spcPts val="1690"/>
               </a:lnSpc>
@@ -7261,6 +7209,13 @@
           </a:solidFill>
           <a:ln/>
         </p:spPr>
+        <p:txBody>
+          <a:bodyPr/>
+          <a:lstStyle/>
+          <a:p>
+            <a:endParaRPr lang="en-KE"/>
+          </a:p>
+        </p:txBody>
       </p:sp>
       <p:sp>
         <p:nvSpPr>
@@ -7287,11 +7242,11 @@
                 <a:lnTo>
                   <a:pt x="50800" y="1075630"/>
                 </a:lnTo>
-                <a:arcTo hR="50800" wR="50800" stAng="5400000" swAng="5400000"/>
+                <a:arcTo wR="50800" hR="50800" stAng="5400000" swAng="5400000"/>
                 <a:lnTo>
                   <a:pt x="0" y="50800"/>
                 </a:lnTo>
-                <a:arcTo hR="50800" wR="50800" stAng="10800000" swAng="5400000"/>
+                <a:arcTo wR="50800" hR="50800" stAng="10800000" swAng="5400000"/>
                 <a:lnTo>
                   <a:pt x="50800" y="0"/>
                 </a:lnTo>
@@ -7307,6 +7262,13 @@
           </a:solidFill>
           <a:ln/>
         </p:spPr>
+        <p:txBody>
+          <a:bodyPr/>
+          <a:lstStyle/>
+          <a:p>
+            <a:endParaRPr lang="en-KE"/>
+          </a:p>
+        </p:txBody>
       </p:sp>
       <p:sp>
         <p:nvSpPr>
@@ -7331,14 +7293,14 @@
           </a:bodyPr>
           <a:lstStyle/>
           <a:p>
-            <a:pPr algn="l" indent="0" marL="0">
+            <a:pPr marL="0" indent="0" algn="l">
               <a:lnSpc>
                 <a:spcPts val="1680"/>
               </a:lnSpc>
               <a:buNone/>
             </a:pPr>
             <a:r>
-              <a:rPr lang="en-US" sz="1200" b="1" spc="100" kern="0" dirty="0">
+              <a:rPr lang="en-US" sz="1200" b="1" kern="0" spc="100" dirty="0">
                 <a:solidFill>
                   <a:srgbClr val="273003"/>
                 </a:solidFill>
@@ -7375,7 +7337,7 @@
           </a:bodyPr>
           <a:lstStyle/>
           <a:p>
-            <a:pPr algn="l" indent="0" marL="0">
+            <a:pPr marL="0" indent="0" algn="l">
               <a:lnSpc>
                 <a:spcPts val="2100"/>
               </a:lnSpc>
@@ -7419,7 +7381,7 @@
           </a:bodyPr>
           <a:lstStyle/>
           <a:p>
-            <a:pPr algn="l" indent="0" marL="0">
+            <a:pPr marL="0" indent="0" algn="l">
               <a:lnSpc>
                 <a:spcPts val="1690"/>
               </a:lnSpc>
@@ -7442,15 +7404,15 @@
       </p:sp>
       <p:pic>
         <p:nvPicPr>
-          <p:cNvPr id="14" name="Image 0" descr="arrow-right">    </p:cNvPr>
+          <p:cNvPr id="14" name="Image 0" descr="arrow-right"/>
           <p:cNvPicPr>
             <a:picLocks noChangeAspect="1"/>
           </p:cNvPicPr>
           <p:nvPr/>
         </p:nvPicPr>
         <p:blipFill>
-          <a:blip r:embed="rId1"/>
-          <a:srcRect l="0" r="0" t="0" b="0"/>
+          <a:blip r:embed="rId3"/>
+          <a:srcRect/>
           <a:stretch/>
         </p:blipFill>
         <p:spPr>
@@ -7484,6 +7446,13 @@
           </a:solidFill>
           <a:ln/>
         </p:spPr>
+        <p:txBody>
+          <a:bodyPr/>
+          <a:lstStyle/>
+          <a:p>
+            <a:endParaRPr lang="en-KE"/>
+          </a:p>
+        </p:txBody>
       </p:sp>
       <p:sp>
         <p:nvSpPr>
@@ -7508,14 +7477,14 @@
           </a:bodyPr>
           <a:lstStyle/>
           <a:p>
-            <a:pPr algn="l" indent="0" marL="0">
+            <a:pPr marL="0" indent="0" algn="l">
               <a:lnSpc>
                 <a:spcPts val="1680"/>
               </a:lnSpc>
               <a:buNone/>
             </a:pPr>
             <a:r>
-              <a:rPr lang="en-US" sz="1200" b="1" spc="100" kern="0" dirty="0">
+              <a:rPr lang="en-US" sz="1200" b="1" kern="0" spc="100" dirty="0">
                 <a:solidFill>
                   <a:srgbClr val="FFCE00"/>
                 </a:solidFill>
@@ -7552,7 +7521,7 @@
           </a:bodyPr>
           <a:lstStyle/>
           <a:p>
-            <a:pPr algn="l" indent="0" marL="0">
+            <a:pPr marL="0" indent="0" algn="l">
               <a:lnSpc>
                 <a:spcPts val="1820"/>
               </a:lnSpc>
@@ -7596,7 +7565,7 @@
           </a:bodyPr>
           <a:lstStyle/>
           <a:p>
-            <a:pPr algn="l" indent="0" marL="0">
+            <a:pPr marL="0" indent="0" algn="l">
               <a:lnSpc>
                 <a:spcPts val="1560"/>
               </a:lnSpc>
@@ -7619,15 +7588,15 @@
       </p:sp>
       <p:pic>
         <p:nvPicPr>
-          <p:cNvPr id="19" name="Image 1" descr="arrow-right">    </p:cNvPr>
+          <p:cNvPr id="19" name="Image 1" descr="arrow-right"/>
           <p:cNvPicPr>
             <a:picLocks noChangeAspect="1"/>
           </p:cNvPicPr>
           <p:nvPr/>
         </p:nvPicPr>
         <p:blipFill>
-          <a:blip r:embed="rId2"/>
-          <a:srcRect l="0" r="0" t="0" b="0"/>
+          <a:blip r:embed="rId3"/>
+          <a:srcRect/>
           <a:stretch/>
         </p:blipFill>
         <p:spPr>
@@ -7661,6 +7630,13 @@
           </a:solidFill>
           <a:ln/>
         </p:spPr>
+        <p:txBody>
+          <a:bodyPr/>
+          <a:lstStyle/>
+          <a:p>
+            <a:endParaRPr lang="en-KE"/>
+          </a:p>
+        </p:txBody>
       </p:sp>
       <p:sp>
         <p:nvSpPr>
@@ -7685,7 +7661,7 @@
           </a:bodyPr>
           <a:lstStyle/>
           <a:p>
-            <a:pPr algn="l" indent="0" marL="0">
+            <a:pPr marL="0" indent="0" algn="l">
               <a:lnSpc>
                 <a:spcPts val="1820"/>
               </a:lnSpc>
@@ -7729,7 +7705,7 @@
           </a:bodyPr>
           <a:lstStyle/>
           <a:p>
-            <a:pPr algn="l" indent="0" marL="0">
+            <a:pPr marL="0" indent="0" algn="l">
               <a:lnSpc>
                 <a:spcPts val="1680"/>
               </a:lnSpc>
@@ -7771,6 +7747,13 @@
           </a:solidFill>
           <a:ln/>
         </p:spPr>
+        <p:txBody>
+          <a:bodyPr/>
+          <a:lstStyle/>
+          <a:p>
+            <a:endParaRPr lang="en-KE"/>
+          </a:p>
+        </p:txBody>
       </p:sp>
       <p:sp>
         <p:nvSpPr>
@@ -7795,7 +7778,7 @@
           </a:bodyPr>
           <a:lstStyle/>
           <a:p>
-            <a:pPr algn="l" indent="0" marL="0">
+            <a:pPr marL="0" indent="0" algn="l">
               <a:lnSpc>
                 <a:spcPts val="1820"/>
               </a:lnSpc>
@@ -7839,7 +7822,7 @@
           </a:bodyPr>
           <a:lstStyle/>
           <a:p>
-            <a:pPr algn="l" indent="0" marL="0">
+            <a:pPr marL="0" indent="0" algn="l">
               <a:lnSpc>
                 <a:spcPts val="1680"/>
               </a:lnSpc>
@@ -7881,6 +7864,13 @@
           </a:solidFill>
           <a:ln/>
         </p:spPr>
+        <p:txBody>
+          <a:bodyPr/>
+          <a:lstStyle/>
+          <a:p>
+            <a:endParaRPr lang="en-KE"/>
+          </a:p>
+        </p:txBody>
       </p:sp>
       <p:sp>
         <p:nvSpPr>
@@ -7905,7 +7895,7 @@
           </a:bodyPr>
           <a:lstStyle/>
           <a:p>
-            <a:pPr algn="l" indent="0" marL="0">
+            <a:pPr marL="0" indent="0" algn="l">
               <a:lnSpc>
                 <a:spcPts val="1820"/>
               </a:lnSpc>
@@ -7949,7 +7939,7 @@
           </a:bodyPr>
           <a:lstStyle/>
           <a:p>
-            <a:pPr algn="l" indent="0" marL="0">
+            <a:pPr marL="0" indent="0" algn="l">
               <a:lnSpc>
                 <a:spcPts val="1680"/>
               </a:lnSpc>
@@ -7972,15 +7962,15 @@
       </p:sp>
       <p:pic>
         <p:nvPicPr>
-          <p:cNvPr id="29" name="Image 2" descr="ILRI and CGIAR logos">    </p:cNvPr>
+          <p:cNvPr id="29" name="Image 2" descr="ILRI and CGIAR logos"/>
           <p:cNvPicPr>
             <a:picLocks noChangeAspect="1"/>
           </p:cNvPicPr>
           <p:nvPr/>
         </p:nvPicPr>
         <p:blipFill>
-          <a:blip r:embed="rId3"/>
-          <a:srcRect l="-56" r="-56" t="0" b="0"/>
+          <a:blip r:embed="rId4"/>
+          <a:srcRect l="-56" r="-56"/>
           <a:stretch/>
         </p:blipFill>
         <p:spPr>
@@ -8016,7 +8006,7 @@
           </a:bodyPr>
           <a:lstStyle/>
           <a:p>
-            <a:pPr algn="l" indent="0" marL="0">
+            <a:pPr marL="0" indent="0" algn="l">
               <a:lnSpc>
                 <a:spcPts val="1680"/>
               </a:lnSpc>
@@ -8060,7 +8050,7 @@
           </a:bodyPr>
           <a:lstStyle/>
           <a:p>
-            <a:pPr algn="r" indent="0" marL="0">
+            <a:pPr marL="0" indent="0" algn="r">
               <a:lnSpc>
                 <a:spcPts val="1680"/>
               </a:lnSpc>
@@ -8097,6 +8087,7 @@
         <a:solidFill>
           <a:srgbClr val="F9F2EA"/>
         </a:solidFill>
+        <a:effectLst/>
       </p:bgPr>
     </p:bg>
     <p:spTree>
@@ -8116,7 +8107,9 @@
       <p:sp>
         <p:nvSpPr>
           <p:cNvPr id="2" name="Text 0"/>
-          <p:cNvSpPr/>
+          <p:cNvSpPr>
+            <a:spLocks noGrp="1"/>
+          </p:cNvSpPr>
           <p:nvPr>
             <p:ph type="title"/>
           </p:nvPr>
@@ -8138,7 +8131,7 @@
           </a:bodyPr>
           <a:lstStyle/>
           <a:p>
-            <a:pPr algn="l" indent="0" marL="0">
+            <a:pPr marL="0" indent="0" algn="l">
               <a:lnSpc>
                 <a:spcPts val="3960"/>
               </a:lnSpc>
@@ -8180,6 +8173,13 @@
           </a:solidFill>
           <a:ln/>
         </p:spPr>
+        <p:txBody>
+          <a:bodyPr/>
+          <a:lstStyle/>
+          <a:p>
+            <a:endParaRPr lang="en-KE"/>
+          </a:p>
+        </p:txBody>
       </p:sp>
       <p:graphicFrame>
         <p:nvGraphicFramePr>
@@ -8197,16 +8197,34 @@
         </p:nvGraphicFramePr>
         <p:xfrm>
           <a:off x="825500" y="1722090"/>
-          <a:ext cx="10553700" cy="2564954"/>
+          <a:ext cx="10553700" cy="2564956"/>
         </p:xfrm>
         <a:graphic>
           <a:graphicData uri="http://schemas.openxmlformats.org/drawingml/2006/table">
             <a:tbl>
               <a:tblPr/>
               <a:tblGrid>
-                <a:gridCol w="4221480"/>
-                <a:gridCol w="3166110"/>
-                <a:gridCol w="3166110"/>
+                <a:gridCol w="4221480">
+                  <a:extLst>
+                    <a:ext uri="{9D8B030D-6E8A-4147-A177-3AD203B41FA5}">
+                      <a16:colId xmlns:a16="http://schemas.microsoft.com/office/drawing/2014/main" val="20000"/>
+                    </a:ext>
+                  </a:extLst>
+                </a:gridCol>
+                <a:gridCol w="3166110">
+                  <a:extLst>
+                    <a:ext uri="{9D8B030D-6E8A-4147-A177-3AD203B41FA5}">
+                      <a16:colId xmlns:a16="http://schemas.microsoft.com/office/drawing/2014/main" val="20001"/>
+                    </a:ext>
+                  </a:extLst>
+                </a:gridCol>
+                <a:gridCol w="3166110">
+                  <a:extLst>
+                    <a:ext uri="{9D8B030D-6E8A-4147-A177-3AD203B41FA5}">
+                      <a16:colId xmlns:a16="http://schemas.microsoft.com/office/drawing/2014/main" val="20002"/>
+                    </a:ext>
+                  </a:extLst>
+                </a:gridCol>
               </a:tblGrid>
               <a:tr h="386011">
                 <a:tc>
@@ -8214,7 +8232,7 @@
                     <a:bodyPr/>
                     <a:lstStyle/>
                     <a:p>
-                      <a:pPr indent="0" marL="0">
+                      <a:pPr marL="0" indent="0">
                         <a:lnSpc>
                           <a:spcPts val="1960"/>
                         </a:lnSpc>
@@ -8238,7 +8256,7 @@
                       </a:endParaRPr>
                     </a:p>
                   </a:txBody>
-                  <a:tcPr marL="62230" marR="62230" marT="62230" marB="62230" anchor="t">
+                  <a:tcPr marL="62230" marR="62230" marT="62230" marB="62230">
                     <a:lnL w="12700" cap="flat" cmpd="sng" algn="ctr">
                       <a:solidFill>
                         <a:srgbClr val="C7C1BB"/>
@@ -8285,7 +8303,7 @@
                     <a:bodyPr/>
                     <a:lstStyle/>
                     <a:p>
-                      <a:pPr indent="0" marL="0">
+                      <a:pPr marL="0" indent="0">
                         <a:lnSpc>
                           <a:spcPts val="1960"/>
                         </a:lnSpc>
@@ -8309,7 +8327,7 @@
                       </a:endParaRPr>
                     </a:p>
                   </a:txBody>
-                  <a:tcPr marL="62230" marR="62230" marT="62230" marB="62230" anchor="t">
+                  <a:tcPr marL="62230" marR="62230" marT="62230" marB="62230">
                     <a:lnL w="12700" cap="flat" cmpd="sng" algn="ctr">
                       <a:solidFill>
                         <a:srgbClr val="B9B3AD"/>
@@ -8356,7 +8374,7 @@
                     <a:bodyPr/>
                     <a:lstStyle/>
                     <a:p>
-                      <a:pPr indent="0" marL="0">
+                      <a:pPr marL="0" indent="0">
                         <a:lnSpc>
                           <a:spcPts val="1960"/>
                         </a:lnSpc>
@@ -8380,7 +8398,7 @@
                       </a:endParaRPr>
                     </a:p>
                   </a:txBody>
-                  <a:tcPr marL="62230" marR="62230" marT="62230" marB="62230" anchor="t">
+                  <a:tcPr marL="62230" marR="62230" marT="62230" marB="62230">
                     <a:lnL w="12700" cap="flat" cmpd="sng" algn="ctr">
                       <a:solidFill>
                         <a:srgbClr val="B9B3AD"/>
@@ -8422,6 +8440,11 @@
                     </a:solidFill>
                   </a:tcPr>
                 </a:tc>
+                <a:extLst>
+                  <a:ext uri="{0D108BD9-81ED-4DB2-BD59-A6C34878D82A}">
+                    <a16:rowId xmlns:a16="http://schemas.microsoft.com/office/drawing/2014/main" val="10000"/>
+                  </a:ext>
+                </a:extLst>
               </a:tr>
               <a:tr h="634901">
                 <a:tc>
@@ -8429,7 +8452,7 @@
                     <a:bodyPr/>
                     <a:lstStyle/>
                     <a:p>
-                      <a:pPr indent="0" marL="0">
+                      <a:pPr marL="0" indent="0">
                         <a:lnSpc>
                           <a:spcPts val="1960"/>
                         </a:lnSpc>
@@ -8453,7 +8476,7 @@
                       </a:endParaRPr>
                     </a:p>
                   </a:txBody>
-                  <a:tcPr marL="62230" marR="62230" marT="62230" marB="62230" anchor="t">
+                  <a:tcPr marL="62230" marR="62230" marT="62230" marB="62230">
                     <a:lnL w="12700" cap="flat" cmpd="sng" algn="ctr">
                       <a:solidFill>
                         <a:srgbClr val="C7C1BB"/>
@@ -8497,7 +8520,7 @@
                     <a:bodyPr/>
                     <a:lstStyle/>
                     <a:p>
-                      <a:pPr indent="0" marL="0">
+                      <a:pPr marL="0" indent="0">
                         <a:lnSpc>
                           <a:spcPts val="1960"/>
                         </a:lnSpc>
@@ -8521,7 +8544,7 @@
                       </a:endParaRPr>
                     </a:p>
                     <a:p>
-                      <a:pPr indent="0" marL="0">
+                      <a:pPr marL="0" indent="0">
                         <a:lnSpc>
                           <a:spcPts val="1960"/>
                         </a:lnSpc>
@@ -8545,7 +8568,7 @@
                       </a:endParaRPr>
                     </a:p>
                   </a:txBody>
-                  <a:tcPr marL="62230" marR="62230" marT="62230" marB="62230" anchor="t">
+                  <a:tcPr marL="62230" marR="62230" marT="62230" marB="62230">
                     <a:lnL w="12700" cap="flat" cmpd="sng" algn="ctr">
                       <a:solidFill>
                         <a:srgbClr val="C7C1BB"/>
@@ -8589,7 +8612,7 @@
                     <a:bodyPr/>
                     <a:lstStyle/>
                     <a:p>
-                      <a:pPr indent="0" marL="0">
+                      <a:pPr marL="0" indent="0">
                         <a:lnSpc>
                           <a:spcPts val="1960"/>
                         </a:lnSpc>
@@ -8613,7 +8636,7 @@
                       </a:endParaRPr>
                     </a:p>
                   </a:txBody>
-                  <a:tcPr marL="62230" marR="62230" marT="62230" marB="62230" anchor="t">
+                  <a:tcPr marL="62230" marR="62230" marT="62230" marB="62230">
                     <a:lnL w="12700" cap="flat" cmpd="sng" algn="ctr">
                       <a:solidFill>
                         <a:srgbClr val="C7C1BB"/>
@@ -8652,6 +8675,11 @@
                     </a:lnB>
                   </a:tcPr>
                 </a:tc>
+                <a:extLst>
+                  <a:ext uri="{0D108BD9-81ED-4DB2-BD59-A6C34878D82A}">
+                    <a16:rowId xmlns:a16="http://schemas.microsoft.com/office/drawing/2014/main" val="10001"/>
+                  </a:ext>
+                </a:extLst>
               </a:tr>
               <a:tr h="386011">
                 <a:tc>
@@ -8659,7 +8687,7 @@
                     <a:bodyPr/>
                     <a:lstStyle/>
                     <a:p>
-                      <a:pPr indent="0" marL="0">
+                      <a:pPr marL="0" indent="0">
                         <a:lnSpc>
                           <a:spcPts val="1960"/>
                         </a:lnSpc>
@@ -8683,7 +8711,7 @@
                       </a:endParaRPr>
                     </a:p>
                   </a:txBody>
-                  <a:tcPr marL="62230" marR="62230" marT="62230" marB="62230" anchor="t">
+                  <a:tcPr marL="62230" marR="62230" marT="62230" marB="62230">
                     <a:lnL w="12700" cap="flat" cmpd="sng" algn="ctr">
                       <a:solidFill>
                         <a:srgbClr val="C7C1BB"/>
@@ -8730,7 +8758,7 @@
                     <a:bodyPr/>
                     <a:lstStyle/>
                     <a:p>
-                      <a:pPr indent="0" marL="0">
+                      <a:pPr marL="0" indent="0">
                         <a:lnSpc>
                           <a:spcPts val="1960"/>
                         </a:lnSpc>
@@ -8754,7 +8782,7 @@
                       </a:endParaRPr>
                     </a:p>
                   </a:txBody>
-                  <a:tcPr marL="62230" marR="62230" marT="62230" marB="62230" anchor="t">
+                  <a:tcPr marL="62230" marR="62230" marT="62230" marB="62230">
                     <a:lnL w="12700" cap="flat" cmpd="sng" algn="ctr">
                       <a:solidFill>
                         <a:srgbClr val="C0B8AE"/>
@@ -8801,7 +8829,7 @@
                     <a:bodyPr/>
                     <a:lstStyle/>
                     <a:p>
-                      <a:pPr indent="0" marL="0">
+                      <a:pPr marL="0" indent="0">
                         <a:lnSpc>
                           <a:spcPts val="1960"/>
                         </a:lnSpc>
@@ -8825,7 +8853,7 @@
                       </a:endParaRPr>
                     </a:p>
                   </a:txBody>
-                  <a:tcPr marL="62230" marR="62230" marT="62230" marB="62230" anchor="t">
+                  <a:tcPr marL="62230" marR="62230" marT="62230" marB="62230">
                     <a:lnL w="12700" cap="flat" cmpd="sng" algn="ctr">
                       <a:solidFill>
                         <a:srgbClr val="C0B8AE"/>
@@ -8867,6 +8895,11 @@
                     </a:solidFill>
                   </a:tcPr>
                 </a:tc>
+                <a:extLst>
+                  <a:ext uri="{0D108BD9-81ED-4DB2-BD59-A6C34878D82A}">
+                    <a16:rowId xmlns:a16="http://schemas.microsoft.com/office/drawing/2014/main" val="10002"/>
+                  </a:ext>
+                </a:extLst>
               </a:tr>
               <a:tr h="386011">
                 <a:tc>
@@ -8874,7 +8907,7 @@
                     <a:bodyPr/>
                     <a:lstStyle/>
                     <a:p>
-                      <a:pPr indent="0" marL="0">
+                      <a:pPr marL="0" indent="0">
                         <a:lnSpc>
                           <a:spcPts val="1960"/>
                         </a:lnSpc>
@@ -8898,7 +8931,7 @@
                       </a:endParaRPr>
                     </a:p>
                   </a:txBody>
-                  <a:tcPr marL="62230" marR="62230" marT="62230" marB="62230" anchor="t">
+                  <a:tcPr marL="62230" marR="62230" marT="62230" marB="62230">
                     <a:lnL w="12700" cap="flat" cmpd="sng" algn="ctr">
                       <a:solidFill>
                         <a:srgbClr val="C7C1BB"/>
@@ -8942,7 +8975,7 @@
                     <a:bodyPr/>
                     <a:lstStyle/>
                     <a:p>
-                      <a:pPr indent="0" marL="0">
+                      <a:pPr marL="0" indent="0">
                         <a:lnSpc>
                           <a:spcPts val="1960"/>
                         </a:lnSpc>
@@ -8966,7 +8999,7 @@
                       </a:endParaRPr>
                     </a:p>
                   </a:txBody>
-                  <a:tcPr marL="62230" marR="62230" marT="62230" marB="62230" anchor="t">
+                  <a:tcPr marL="62230" marR="62230" marT="62230" marB="62230">
                     <a:lnL w="12700" cap="flat" cmpd="sng" algn="ctr">
                       <a:solidFill>
                         <a:srgbClr val="C7C1BB"/>
@@ -9010,7 +9043,7 @@
                     <a:bodyPr/>
                     <a:lstStyle/>
                     <a:p>
-                      <a:pPr indent="0" marL="0">
+                      <a:pPr marL="0" indent="0">
                         <a:lnSpc>
                           <a:spcPts val="1960"/>
                         </a:lnSpc>
@@ -9034,7 +9067,7 @@
                       </a:endParaRPr>
                     </a:p>
                   </a:txBody>
-                  <a:tcPr marL="62230" marR="62230" marT="62230" marB="62230" anchor="t">
+                  <a:tcPr marL="62230" marR="62230" marT="62230" marB="62230">
                     <a:lnL w="12700" cap="flat" cmpd="sng" algn="ctr">
                       <a:solidFill>
                         <a:srgbClr val="C7C1BB"/>
@@ -9073,6 +9106,11 @@
                     </a:lnB>
                   </a:tcPr>
                 </a:tc>
+                <a:extLst>
+                  <a:ext uri="{0D108BD9-81ED-4DB2-BD59-A6C34878D82A}">
+                    <a16:rowId xmlns:a16="http://schemas.microsoft.com/office/drawing/2014/main" val="10003"/>
+                  </a:ext>
+                </a:extLst>
               </a:tr>
               <a:tr h="386011">
                 <a:tc>
@@ -9080,7 +9118,7 @@
                     <a:bodyPr/>
                     <a:lstStyle/>
                     <a:p>
-                      <a:pPr indent="0" marL="0">
+                      <a:pPr marL="0" indent="0">
                         <a:lnSpc>
                           <a:spcPts val="1960"/>
                         </a:lnSpc>
@@ -9104,7 +9142,7 @@
                       </a:endParaRPr>
                     </a:p>
                   </a:txBody>
-                  <a:tcPr marL="62230" marR="62230" marT="62230" marB="62230" anchor="t">
+                  <a:tcPr marL="62230" marR="62230" marT="62230" marB="62230">
                     <a:lnL w="12700" cap="flat" cmpd="sng" algn="ctr">
                       <a:solidFill>
                         <a:srgbClr val="C7C1BB"/>
@@ -9151,7 +9189,7 @@
                     <a:bodyPr/>
                     <a:lstStyle/>
                     <a:p>
-                      <a:pPr indent="0" marL="0">
+                      <a:pPr marL="0" indent="0">
                         <a:lnSpc>
                           <a:spcPts val="1960"/>
                         </a:lnSpc>
@@ -9175,7 +9213,7 @@
                       </a:endParaRPr>
                     </a:p>
                   </a:txBody>
-                  <a:tcPr marL="62230" marR="62230" marT="62230" marB="62230" anchor="t">
+                  <a:tcPr marL="62230" marR="62230" marT="62230" marB="62230">
                     <a:lnL w="12700" cap="flat" cmpd="sng" algn="ctr">
                       <a:solidFill>
                         <a:srgbClr val="C0B8AE"/>
@@ -9222,7 +9260,7 @@
                     <a:bodyPr/>
                     <a:lstStyle/>
                     <a:p>
-                      <a:pPr indent="0" marL="0">
+                      <a:pPr marL="0" indent="0">
                         <a:lnSpc>
                           <a:spcPts val="1960"/>
                         </a:lnSpc>
@@ -9246,7 +9284,7 @@
                       </a:endParaRPr>
                     </a:p>
                   </a:txBody>
-                  <a:tcPr marL="62230" marR="62230" marT="62230" marB="62230" anchor="t">
+                  <a:tcPr marL="62230" marR="62230" marT="62230" marB="62230">
                     <a:lnL w="12700" cap="flat" cmpd="sng" algn="ctr">
                       <a:solidFill>
                         <a:srgbClr val="C0B8AE"/>
@@ -9288,6 +9326,11 @@
                     </a:solidFill>
                   </a:tcPr>
                 </a:tc>
+                <a:extLst>
+                  <a:ext uri="{0D108BD9-81ED-4DB2-BD59-A6C34878D82A}">
+                    <a16:rowId xmlns:a16="http://schemas.microsoft.com/office/drawing/2014/main" val="10004"/>
+                  </a:ext>
+                </a:extLst>
               </a:tr>
               <a:tr h="386011">
                 <a:tc>
@@ -9295,7 +9338,7 @@
                     <a:bodyPr/>
                     <a:lstStyle/>
                     <a:p>
-                      <a:pPr indent="0" marL="0">
+                      <a:pPr marL="0" indent="0">
                         <a:lnSpc>
                           <a:spcPts val="1960"/>
                         </a:lnSpc>
@@ -9319,7 +9362,7 @@
                       </a:endParaRPr>
                     </a:p>
                   </a:txBody>
-                  <a:tcPr marL="62230" marR="62230" marT="62230" marB="62230" anchor="t">
+                  <a:tcPr marL="62230" marR="62230" marT="62230" marB="62230">
                     <a:lnL w="12700" cap="flat" cmpd="sng" algn="ctr">
                       <a:solidFill>
                         <a:srgbClr val="C7C1BB"/>
@@ -9363,7 +9406,7 @@
                     <a:bodyPr/>
                     <a:lstStyle/>
                     <a:p>
-                      <a:pPr indent="0" marL="0">
+                      <a:pPr marL="0" indent="0">
                         <a:lnSpc>
                           <a:spcPts val="1960"/>
                         </a:lnSpc>
@@ -9387,7 +9430,7 @@
                       </a:endParaRPr>
                     </a:p>
                   </a:txBody>
-                  <a:tcPr marL="62230" marR="62230" marT="62230" marB="62230" anchor="t">
+                  <a:tcPr marL="62230" marR="62230" marT="62230" marB="62230">
                     <a:lnL w="12700" cap="flat" cmpd="sng" algn="ctr">
                       <a:solidFill>
                         <a:srgbClr val="C7C1BB"/>
@@ -9431,7 +9474,7 @@
                     <a:bodyPr/>
                     <a:lstStyle/>
                     <a:p>
-                      <a:pPr indent="0" marL="0">
+                      <a:pPr marL="0" indent="0">
                         <a:lnSpc>
                           <a:spcPts val="1960"/>
                         </a:lnSpc>
@@ -9455,7 +9498,7 @@
                       </a:endParaRPr>
                     </a:p>
                   </a:txBody>
-                  <a:tcPr marL="62230" marR="62230" marT="62230" marB="62230" anchor="t">
+                  <a:tcPr marL="62230" marR="62230" marT="62230" marB="62230">
                     <a:lnL w="12700" cap="flat" cmpd="sng" algn="ctr">
                       <a:solidFill>
                         <a:srgbClr val="C7C1BB"/>
@@ -9494,6 +9537,11 @@
                     </a:lnB>
                   </a:tcPr>
                 </a:tc>
+                <a:extLst>
+                  <a:ext uri="{0D108BD9-81ED-4DB2-BD59-A6C34878D82A}">
+                    <a16:rowId xmlns:a16="http://schemas.microsoft.com/office/drawing/2014/main" val="10005"/>
+                  </a:ext>
+                </a:extLst>
               </a:tr>
             </a:tbl>
           </a:graphicData>
@@ -9520,18 +9568,25 @@
           </a:solidFill>
           <a:ln/>
         </p:spPr>
+        <p:txBody>
+          <a:bodyPr/>
+          <a:lstStyle/>
+          <a:p>
+            <a:endParaRPr lang="en-KE"/>
+          </a:p>
+        </p:txBody>
       </p:sp>
       <p:pic>
         <p:nvPicPr>
-          <p:cNvPr id="6" name="Image 0" descr="Lightbulb">    </p:cNvPr>
+          <p:cNvPr id="6" name="Image 0" descr="Lightbulb"/>
           <p:cNvPicPr>
             <a:picLocks noChangeAspect="1"/>
           </p:cNvPicPr>
           <p:nvPr/>
         </p:nvPicPr>
         <p:blipFill>
-          <a:blip r:embed="rId1"/>
-          <a:srcRect l="0" r="0" t="0" b="0"/>
+          <a:blip r:embed="rId3"/>
+          <a:srcRect/>
           <a:stretch/>
         </p:blipFill>
         <p:spPr>
@@ -9567,7 +9622,7 @@
           </a:bodyPr>
           <a:lstStyle/>
           <a:p>
-            <a:pPr algn="l" indent="0" marL="0">
+            <a:pPr marL="0" indent="0" algn="l">
               <a:lnSpc>
                 <a:spcPts val="1890"/>
               </a:lnSpc>
@@ -9634,15 +9689,15 @@
       </p:sp>
       <p:pic>
         <p:nvPicPr>
-          <p:cNvPr id="8" name="Image 1" descr="ILRI and CGIAR logos">    </p:cNvPr>
+          <p:cNvPr id="8" name="Image 1" descr="ILRI and CGIAR logos"/>
           <p:cNvPicPr>
             <a:picLocks noChangeAspect="1"/>
           </p:cNvPicPr>
           <p:nvPr/>
         </p:nvPicPr>
         <p:blipFill>
-          <a:blip r:embed="rId2"/>
-          <a:srcRect l="-56" r="-56" t="0" b="0"/>
+          <a:blip r:embed="rId4"/>
+          <a:srcRect l="-56" r="-56"/>
           <a:stretch/>
         </p:blipFill>
         <p:spPr>
@@ -9678,7 +9733,7 @@
           </a:bodyPr>
           <a:lstStyle/>
           <a:p>
-            <a:pPr algn="l" indent="0" marL="0">
+            <a:pPr marL="0" indent="0" algn="l">
               <a:lnSpc>
                 <a:spcPts val="1680"/>
               </a:lnSpc>
@@ -9722,7 +9777,7 @@
           </a:bodyPr>
           <a:lstStyle/>
           <a:p>
-            <a:pPr algn="r" indent="0" marL="0">
+            <a:pPr marL="0" indent="0" algn="r">
               <a:lnSpc>
                 <a:spcPts val="1680"/>
               </a:lnSpc>
@@ -9759,6 +9814,7 @@
         <a:solidFill>
           <a:srgbClr val="F9F2EA"/>
         </a:solidFill>
+        <a:effectLst/>
       </p:bgPr>
     </p:bg>
     <p:spTree>
@@ -9778,7 +9834,9 @@
       <p:sp>
         <p:nvSpPr>
           <p:cNvPr id="2" name="Text 0"/>
-          <p:cNvSpPr/>
+          <p:cNvSpPr>
+            <a:spLocks noGrp="1"/>
+          </p:cNvSpPr>
           <p:nvPr>
             <p:ph type="title"/>
           </p:nvPr>
@@ -9800,7 +9858,7 @@
           </a:bodyPr>
           <a:lstStyle/>
           <a:p>
-            <a:pPr algn="l" indent="0" marL="0">
+            <a:pPr marL="0" indent="0" algn="l">
               <a:lnSpc>
                 <a:spcPts val="3960"/>
               </a:lnSpc>
@@ -9842,6 +9900,13 @@
           </a:solidFill>
           <a:ln/>
         </p:spPr>
+        <p:txBody>
+          <a:bodyPr/>
+          <a:lstStyle/>
+          <a:p>
+            <a:endParaRPr lang="en-KE"/>
+          </a:p>
+        </p:txBody>
       </p:sp>
       <p:sp>
         <p:nvSpPr>
@@ -9866,7 +9931,7 @@
           </a:bodyPr>
           <a:lstStyle/>
           <a:p>
-            <a:pPr algn="l" indent="0" marL="0">
+            <a:pPr marL="0" indent="0" algn="l">
               <a:lnSpc>
                 <a:spcPts val="1690"/>
               </a:lnSpc>
@@ -9903,19 +9968,55 @@
         </p:nvGraphicFramePr>
         <p:xfrm>
           <a:off x="825500" y="2089100"/>
-          <a:ext cx="10553700" cy="1437283"/>
+          <a:ext cx="10553700" cy="1437284"/>
         </p:xfrm>
         <a:graphic>
           <a:graphicData uri="http://schemas.openxmlformats.org/drawingml/2006/table">
             <a:tbl>
               <a:tblPr/>
               <a:tblGrid>
-                <a:gridCol w="2321814"/>
-                <a:gridCol w="2955036"/>
-                <a:gridCol w="1055370"/>
-                <a:gridCol w="1055370"/>
-                <a:gridCol w="1055370"/>
-                <a:gridCol w="2110740"/>
+                <a:gridCol w="2321814">
+                  <a:extLst>
+                    <a:ext uri="{9D8B030D-6E8A-4147-A177-3AD203B41FA5}">
+                      <a16:colId xmlns:a16="http://schemas.microsoft.com/office/drawing/2014/main" val="20000"/>
+                    </a:ext>
+                  </a:extLst>
+                </a:gridCol>
+                <a:gridCol w="2955036">
+                  <a:extLst>
+                    <a:ext uri="{9D8B030D-6E8A-4147-A177-3AD203B41FA5}">
+                      <a16:colId xmlns:a16="http://schemas.microsoft.com/office/drawing/2014/main" val="20001"/>
+                    </a:ext>
+                  </a:extLst>
+                </a:gridCol>
+                <a:gridCol w="1055370">
+                  <a:extLst>
+                    <a:ext uri="{9D8B030D-6E8A-4147-A177-3AD203B41FA5}">
+                      <a16:colId xmlns:a16="http://schemas.microsoft.com/office/drawing/2014/main" val="20002"/>
+                    </a:ext>
+                  </a:extLst>
+                </a:gridCol>
+                <a:gridCol w="1055370">
+                  <a:extLst>
+                    <a:ext uri="{9D8B030D-6E8A-4147-A177-3AD203B41FA5}">
+                      <a16:colId xmlns:a16="http://schemas.microsoft.com/office/drawing/2014/main" val="20003"/>
+                    </a:ext>
+                  </a:extLst>
+                </a:gridCol>
+                <a:gridCol w="1055370">
+                  <a:extLst>
+                    <a:ext uri="{9D8B030D-6E8A-4147-A177-3AD203B41FA5}">
+                      <a16:colId xmlns:a16="http://schemas.microsoft.com/office/drawing/2014/main" val="20004"/>
+                    </a:ext>
+                  </a:extLst>
+                </a:gridCol>
+                <a:gridCol w="2110740">
+                  <a:extLst>
+                    <a:ext uri="{9D8B030D-6E8A-4147-A177-3AD203B41FA5}">
+                      <a16:colId xmlns:a16="http://schemas.microsoft.com/office/drawing/2014/main" val="20005"/>
+                    </a:ext>
+                  </a:extLst>
+                </a:gridCol>
               </a:tblGrid>
               <a:tr h="359321">
                 <a:tc>
@@ -9923,7 +10024,7 @@
                     <a:bodyPr/>
                     <a:lstStyle/>
                     <a:p>
-                      <a:pPr indent="0" marL="0">
+                      <a:pPr marL="0" indent="0">
                         <a:lnSpc>
                           <a:spcPts val="1820"/>
                         </a:lnSpc>
@@ -9947,7 +10048,7 @@
                       </a:endParaRPr>
                     </a:p>
                   </a:txBody>
-                  <a:tcPr marL="57785" marR="57785" marT="57785" marB="57785" anchor="t">
+                  <a:tcPr marL="57785" marR="57785" marT="57785" marB="57785">
                     <a:lnL w="12700" cap="flat" cmpd="sng" algn="ctr">
                       <a:solidFill>
                         <a:srgbClr val="C7C1BB"/>
@@ -9994,7 +10095,7 @@
                     <a:bodyPr/>
                     <a:lstStyle/>
                     <a:p>
-                      <a:pPr indent="0" marL="0">
+                      <a:pPr marL="0" indent="0">
                         <a:lnSpc>
                           <a:spcPts val="1820"/>
                         </a:lnSpc>
@@ -10018,7 +10119,7 @@
                       </a:endParaRPr>
                     </a:p>
                   </a:txBody>
-                  <a:tcPr marL="57785" marR="57785" marT="57785" marB="57785" anchor="t">
+                  <a:tcPr marL="57785" marR="57785" marT="57785" marB="57785">
                     <a:lnL w="12700" cap="flat" cmpd="sng" algn="ctr">
                       <a:solidFill>
                         <a:srgbClr val="B9B3AD"/>
@@ -10065,7 +10166,7 @@
                     <a:bodyPr/>
                     <a:lstStyle/>
                     <a:p>
-                      <a:pPr indent="0" marL="0">
+                      <a:pPr marL="0" indent="0">
                         <a:lnSpc>
                           <a:spcPts val="1820"/>
                         </a:lnSpc>
@@ -10089,7 +10190,7 @@
                       </a:endParaRPr>
                     </a:p>
                   </a:txBody>
-                  <a:tcPr marL="57785" marR="57785" marT="57785" marB="57785" anchor="t">
+                  <a:tcPr marL="57785" marR="57785" marT="57785" marB="57785">
                     <a:lnL w="12700" cap="flat" cmpd="sng" algn="ctr">
                       <a:solidFill>
                         <a:srgbClr val="B9B3AD"/>
@@ -10136,7 +10237,7 @@
                     <a:bodyPr/>
                     <a:lstStyle/>
                     <a:p>
-                      <a:pPr indent="0" marL="0">
+                      <a:pPr marL="0" indent="0">
                         <a:lnSpc>
                           <a:spcPts val="1820"/>
                         </a:lnSpc>
@@ -10160,7 +10261,7 @@
                       </a:endParaRPr>
                     </a:p>
                   </a:txBody>
-                  <a:tcPr marL="57785" marR="57785" marT="57785" marB="57785" anchor="t">
+                  <a:tcPr marL="57785" marR="57785" marT="57785" marB="57785">
                     <a:lnL w="12700" cap="flat" cmpd="sng" algn="ctr">
                       <a:solidFill>
                         <a:srgbClr val="B9B3AD"/>
@@ -10207,7 +10308,7 @@
                     <a:bodyPr/>
                     <a:lstStyle/>
                     <a:p>
-                      <a:pPr indent="0" marL="0">
+                      <a:pPr marL="0" indent="0">
                         <a:lnSpc>
                           <a:spcPts val="1820"/>
                         </a:lnSpc>
@@ -10231,7 +10332,7 @@
                       </a:endParaRPr>
                     </a:p>
                   </a:txBody>
-                  <a:tcPr marL="57785" marR="57785" marT="57785" marB="57785" anchor="t">
+                  <a:tcPr marL="57785" marR="57785" marT="57785" marB="57785">
                     <a:lnL w="12700" cap="flat" cmpd="sng" algn="ctr">
                       <a:solidFill>
                         <a:srgbClr val="B9B3AD"/>
@@ -10278,7 +10379,7 @@
                     <a:bodyPr/>
                     <a:lstStyle/>
                     <a:p>
-                      <a:pPr indent="0" marL="0">
+                      <a:pPr marL="0" indent="0">
                         <a:lnSpc>
                           <a:spcPts val="1820"/>
                         </a:lnSpc>
@@ -10302,7 +10403,7 @@
                       </a:endParaRPr>
                     </a:p>
                   </a:txBody>
-                  <a:tcPr marL="57785" marR="57785" marT="57785" marB="57785" anchor="t">
+                  <a:tcPr marL="57785" marR="57785" marT="57785" marB="57785">
                     <a:lnL w="12700" cap="flat" cmpd="sng" algn="ctr">
                       <a:solidFill>
                         <a:srgbClr val="B9B3AD"/>
@@ -10344,6 +10445,11 @@
                     </a:solidFill>
                   </a:tcPr>
                 </a:tc>
+                <a:extLst>
+                  <a:ext uri="{0D108BD9-81ED-4DB2-BD59-A6C34878D82A}">
+                    <a16:rowId xmlns:a16="http://schemas.microsoft.com/office/drawing/2014/main" val="10000"/>
+                  </a:ext>
+                </a:extLst>
               </a:tr>
               <a:tr h="359321">
                 <a:tc>
@@ -10351,7 +10457,7 @@
                     <a:bodyPr/>
                     <a:lstStyle/>
                     <a:p>
-                      <a:pPr indent="0" marL="0">
+                      <a:pPr marL="0" indent="0">
                         <a:lnSpc>
                           <a:spcPts val="1820"/>
                         </a:lnSpc>
@@ -10375,7 +10481,7 @@
                       </a:endParaRPr>
                     </a:p>
                   </a:txBody>
-                  <a:tcPr marL="57785" marR="57785" marT="57785" marB="57785" anchor="t">
+                  <a:tcPr marL="57785" marR="57785" marT="57785" marB="57785">
                     <a:lnL w="12700" cap="flat" cmpd="sng" algn="ctr">
                       <a:solidFill>
                         <a:srgbClr val="C7C1BB"/>
@@ -10419,7 +10525,7 @@
                     <a:bodyPr/>
                     <a:lstStyle/>
                     <a:p>
-                      <a:pPr indent="0" marL="0">
+                      <a:pPr marL="0" indent="0">
                         <a:lnSpc>
                           <a:spcPts val="1820"/>
                         </a:lnSpc>
@@ -10443,7 +10549,7 @@
                       </a:endParaRPr>
                     </a:p>
                   </a:txBody>
-                  <a:tcPr marL="57785" marR="57785" marT="57785" marB="57785" anchor="t">
+                  <a:tcPr marL="57785" marR="57785" marT="57785" marB="57785">
                     <a:lnL w="12700" cap="flat" cmpd="sng" algn="ctr">
                       <a:solidFill>
                         <a:srgbClr val="C7C1BB"/>
@@ -10487,7 +10593,7 @@
                     <a:bodyPr/>
                     <a:lstStyle/>
                     <a:p>
-                      <a:pPr indent="0" marL="0">
+                      <a:pPr marL="0" indent="0">
                         <a:lnSpc>
                           <a:spcPts val="1820"/>
                         </a:lnSpc>
@@ -10511,7 +10617,7 @@
                       </a:endParaRPr>
                     </a:p>
                   </a:txBody>
-                  <a:tcPr marL="57785" marR="57785" marT="57785" marB="57785" anchor="t">
+                  <a:tcPr marL="57785" marR="57785" marT="57785" marB="57785">
                     <a:lnL w="12700" cap="flat" cmpd="sng" algn="ctr">
                       <a:solidFill>
                         <a:srgbClr val="C7C1BB"/>
@@ -10555,7 +10661,7 @@
                     <a:bodyPr/>
                     <a:lstStyle/>
                     <a:p>
-                      <a:pPr indent="0" marL="0">
+                      <a:pPr marL="0" indent="0">
                         <a:lnSpc>
                           <a:spcPts val="1820"/>
                         </a:lnSpc>
@@ -10579,7 +10685,7 @@
                       </a:endParaRPr>
                     </a:p>
                   </a:txBody>
-                  <a:tcPr marL="57785" marR="57785" marT="57785" marB="57785" anchor="t">
+                  <a:tcPr marL="57785" marR="57785" marT="57785" marB="57785">
                     <a:lnL w="12700" cap="flat" cmpd="sng" algn="ctr">
                       <a:solidFill>
                         <a:srgbClr val="C7C1BB"/>
@@ -10623,7 +10729,7 @@
                     <a:bodyPr/>
                     <a:lstStyle/>
                     <a:p>
-                      <a:pPr indent="0" marL="0">
+                      <a:pPr marL="0" indent="0">
                         <a:lnSpc>
                           <a:spcPts val="1820"/>
                         </a:lnSpc>
@@ -10647,7 +10753,7 @@
                       </a:endParaRPr>
                     </a:p>
                   </a:txBody>
-                  <a:tcPr marL="57785" marR="57785" marT="57785" marB="57785" anchor="t">
+                  <a:tcPr marL="57785" marR="57785" marT="57785" marB="57785">
                     <a:lnL w="12700" cap="flat" cmpd="sng" algn="ctr">
                       <a:solidFill>
                         <a:srgbClr val="C7C1BB"/>
@@ -10691,7 +10797,7 @@
                     <a:bodyPr/>
                     <a:lstStyle/>
                     <a:p>
-                      <a:pPr indent="0" marL="0">
+                      <a:pPr marL="0" indent="0">
                         <a:lnSpc>
                           <a:spcPts val="1820"/>
                         </a:lnSpc>
@@ -10715,7 +10821,7 @@
                       </a:endParaRPr>
                     </a:p>
                   </a:txBody>
-                  <a:tcPr marL="57785" marR="57785" marT="57785" marB="57785" anchor="t">
+                  <a:tcPr marL="57785" marR="57785" marT="57785" marB="57785">
                     <a:lnL w="12700" cap="flat" cmpd="sng" algn="ctr">
                       <a:solidFill>
                         <a:srgbClr val="C7C1BB"/>
@@ -10754,6 +10860,11 @@
                     </a:lnB>
                   </a:tcPr>
                 </a:tc>
+                <a:extLst>
+                  <a:ext uri="{0D108BD9-81ED-4DB2-BD59-A6C34878D82A}">
+                    <a16:rowId xmlns:a16="http://schemas.microsoft.com/office/drawing/2014/main" val="10001"/>
+                  </a:ext>
+                </a:extLst>
               </a:tr>
               <a:tr h="359321">
                 <a:tc>
@@ -10761,7 +10872,7 @@
                     <a:bodyPr/>
                     <a:lstStyle/>
                     <a:p>
-                      <a:pPr indent="0" marL="0">
+                      <a:pPr marL="0" indent="0">
                         <a:lnSpc>
                           <a:spcPts val="1820"/>
                         </a:lnSpc>
@@ -10785,7 +10896,7 @@
                       </a:endParaRPr>
                     </a:p>
                   </a:txBody>
-                  <a:tcPr marL="57785" marR="57785" marT="57785" marB="57785" anchor="t">
+                  <a:tcPr marL="57785" marR="57785" marT="57785" marB="57785">
                     <a:lnL w="12700" cap="flat" cmpd="sng" algn="ctr">
                       <a:solidFill>
                         <a:srgbClr val="C7C1BB"/>
@@ -10832,7 +10943,7 @@
                     <a:bodyPr/>
                     <a:lstStyle/>
                     <a:p>
-                      <a:pPr indent="0" marL="0">
+                      <a:pPr marL="0" indent="0">
                         <a:lnSpc>
                           <a:spcPts val="1820"/>
                         </a:lnSpc>
@@ -10856,7 +10967,7 @@
                       </a:endParaRPr>
                     </a:p>
                   </a:txBody>
-                  <a:tcPr marL="57785" marR="57785" marT="57785" marB="57785" anchor="t">
+                  <a:tcPr marL="57785" marR="57785" marT="57785" marB="57785">
                     <a:lnL w="12700" cap="flat" cmpd="sng" algn="ctr">
                       <a:solidFill>
                         <a:srgbClr val="C0B8AE"/>
@@ -10903,7 +11014,7 @@
                     <a:bodyPr/>
                     <a:lstStyle/>
                     <a:p>
-                      <a:pPr indent="0" marL="0">
+                      <a:pPr marL="0" indent="0">
                         <a:lnSpc>
                           <a:spcPts val="1820"/>
                         </a:lnSpc>
@@ -10927,7 +11038,7 @@
                       </a:endParaRPr>
                     </a:p>
                   </a:txBody>
-                  <a:tcPr marL="57785" marR="57785" marT="57785" marB="57785" anchor="t">
+                  <a:tcPr marL="57785" marR="57785" marT="57785" marB="57785">
                     <a:lnL w="12700" cap="flat" cmpd="sng" algn="ctr">
                       <a:solidFill>
                         <a:srgbClr val="C0B8AE"/>
@@ -10974,7 +11085,7 @@
                     <a:bodyPr/>
                     <a:lstStyle/>
                     <a:p>
-                      <a:pPr indent="0" marL="0">
+                      <a:pPr marL="0" indent="0">
                         <a:lnSpc>
                           <a:spcPts val="1820"/>
                         </a:lnSpc>
@@ -10998,7 +11109,7 @@
                       </a:endParaRPr>
                     </a:p>
                   </a:txBody>
-                  <a:tcPr marL="57785" marR="57785" marT="57785" marB="57785" anchor="t">
+                  <a:tcPr marL="57785" marR="57785" marT="57785" marB="57785">
                     <a:lnL w="12700" cap="flat" cmpd="sng" algn="ctr">
                       <a:solidFill>
                         <a:srgbClr val="C0B8AE"/>
@@ -11045,7 +11156,7 @@
                     <a:bodyPr/>
                     <a:lstStyle/>
                     <a:p>
-                      <a:pPr indent="0" marL="0">
+                      <a:pPr marL="0" indent="0">
                         <a:lnSpc>
                           <a:spcPts val="1820"/>
                         </a:lnSpc>
@@ -11069,7 +11180,7 @@
                       </a:endParaRPr>
                     </a:p>
                   </a:txBody>
-                  <a:tcPr marL="57785" marR="57785" marT="57785" marB="57785" anchor="t">
+                  <a:tcPr marL="57785" marR="57785" marT="57785" marB="57785">
                     <a:lnL w="12700" cap="flat" cmpd="sng" algn="ctr">
                       <a:solidFill>
                         <a:srgbClr val="C0B8AE"/>
@@ -11116,7 +11227,7 @@
                     <a:bodyPr/>
                     <a:lstStyle/>
                     <a:p>
-                      <a:pPr indent="0" marL="0">
+                      <a:pPr marL="0" indent="0">
                         <a:lnSpc>
                           <a:spcPts val="1820"/>
                         </a:lnSpc>
@@ -11140,7 +11251,7 @@
                       </a:endParaRPr>
                     </a:p>
                   </a:txBody>
-                  <a:tcPr marL="57785" marR="57785" marT="57785" marB="57785" anchor="t">
+                  <a:tcPr marL="57785" marR="57785" marT="57785" marB="57785">
                     <a:lnL w="12700" cap="flat" cmpd="sng" algn="ctr">
                       <a:solidFill>
                         <a:srgbClr val="C0B8AE"/>
@@ -11182,6 +11293,11 @@
                     </a:solidFill>
                   </a:tcPr>
                 </a:tc>
+                <a:extLst>
+                  <a:ext uri="{0D108BD9-81ED-4DB2-BD59-A6C34878D82A}">
+                    <a16:rowId xmlns:a16="http://schemas.microsoft.com/office/drawing/2014/main" val="10002"/>
+                  </a:ext>
+                </a:extLst>
               </a:tr>
               <a:tr h="359321">
                 <a:tc>
@@ -11189,7 +11305,7 @@
                     <a:bodyPr/>
                     <a:lstStyle/>
                     <a:p>
-                      <a:pPr indent="0" marL="0">
+                      <a:pPr marL="0" indent="0">
                         <a:lnSpc>
                           <a:spcPts val="1820"/>
                         </a:lnSpc>
@@ -11213,7 +11329,7 @@
                       </a:endParaRPr>
                     </a:p>
                   </a:txBody>
-                  <a:tcPr marL="57785" marR="57785" marT="57785" marB="57785" anchor="t">
+                  <a:tcPr marL="57785" marR="57785" marT="57785" marB="57785">
                     <a:lnL w="12700" cap="flat" cmpd="sng" algn="ctr">
                       <a:solidFill>
                         <a:srgbClr val="C7C1BB"/>
@@ -11257,7 +11373,7 @@
                     <a:bodyPr/>
                     <a:lstStyle/>
                     <a:p>
-                      <a:pPr indent="0" marL="0">
+                      <a:pPr marL="0" indent="0">
                         <a:lnSpc>
                           <a:spcPts val="1820"/>
                         </a:lnSpc>
@@ -11281,7 +11397,7 @@
                       </a:endParaRPr>
                     </a:p>
                   </a:txBody>
-                  <a:tcPr marL="57785" marR="57785" marT="57785" marB="57785" anchor="t">
+                  <a:tcPr marL="57785" marR="57785" marT="57785" marB="57785">
                     <a:lnL w="12700" cap="flat" cmpd="sng" algn="ctr">
                       <a:solidFill>
                         <a:srgbClr val="C7C1BB"/>
@@ -11325,7 +11441,7 @@
                     <a:bodyPr/>
                     <a:lstStyle/>
                     <a:p>
-                      <a:pPr indent="0" marL="0">
+                      <a:pPr marL="0" indent="0">
                         <a:lnSpc>
                           <a:spcPts val="1820"/>
                         </a:lnSpc>
@@ -11349,7 +11465,7 @@
                       </a:endParaRPr>
                     </a:p>
                   </a:txBody>
-                  <a:tcPr marL="57785" marR="57785" marT="57785" marB="57785" anchor="t">
+                  <a:tcPr marL="57785" marR="57785" marT="57785" marB="57785">
                     <a:lnL w="12700" cap="flat" cmpd="sng" algn="ctr">
                       <a:solidFill>
                         <a:srgbClr val="C7C1BB"/>
@@ -11393,7 +11509,7 @@
                     <a:bodyPr/>
                     <a:lstStyle/>
                     <a:p>
-                      <a:pPr indent="0" marL="0">
+                      <a:pPr marL="0" indent="0">
                         <a:lnSpc>
                           <a:spcPts val="1820"/>
                         </a:lnSpc>
@@ -11417,7 +11533,7 @@
                       </a:endParaRPr>
                     </a:p>
                   </a:txBody>
-                  <a:tcPr marL="57785" marR="57785" marT="57785" marB="57785" anchor="t">
+                  <a:tcPr marL="57785" marR="57785" marT="57785" marB="57785">
                     <a:lnL w="12700" cap="flat" cmpd="sng" algn="ctr">
                       <a:solidFill>
                         <a:srgbClr val="C7C1BB"/>
@@ -11461,7 +11577,7 @@
                     <a:bodyPr/>
                     <a:lstStyle/>
                     <a:p>
-                      <a:pPr indent="0" marL="0">
+                      <a:pPr marL="0" indent="0">
                         <a:lnSpc>
                           <a:spcPts val="1820"/>
                         </a:lnSpc>
@@ -11474,7 +11590,7 @@
                       </a:endParaRPr>
                     </a:p>
                   </a:txBody>
-                  <a:tcPr marL="57785" marR="57785" marT="57785" marB="57785" anchor="t">
+                  <a:tcPr marL="57785" marR="57785" marT="57785" marB="57785">
                     <a:lnL w="12700" cap="flat" cmpd="sng" algn="ctr">
                       <a:solidFill>
                         <a:srgbClr val="C7C1BB"/>
@@ -11518,7 +11634,7 @@
                     <a:bodyPr/>
                     <a:lstStyle/>
                     <a:p>
-                      <a:pPr indent="0" marL="0">
+                      <a:pPr marL="0" indent="0">
                         <a:lnSpc>
                           <a:spcPts val="1820"/>
                         </a:lnSpc>
@@ -11542,7 +11658,7 @@
                       </a:endParaRPr>
                     </a:p>
                   </a:txBody>
-                  <a:tcPr marL="57785" marR="57785" marT="57785" marB="57785" anchor="t">
+                  <a:tcPr marL="57785" marR="57785" marT="57785" marB="57785">
                     <a:lnL w="12700" cap="flat" cmpd="sng" algn="ctr">
                       <a:solidFill>
                         <a:srgbClr val="C7C1BB"/>
@@ -11581,6 +11697,11 @@
                     </a:lnB>
                   </a:tcPr>
                 </a:tc>
+                <a:extLst>
+                  <a:ext uri="{0D108BD9-81ED-4DB2-BD59-A6C34878D82A}">
+                    <a16:rowId xmlns:a16="http://schemas.microsoft.com/office/drawing/2014/main" val="10003"/>
+                  </a:ext>
+                </a:extLst>
               </a:tr>
             </a:tbl>
           </a:graphicData>
@@ -11607,6 +11728,13 @@
           </a:solidFill>
           <a:ln/>
         </p:spPr>
+        <p:txBody>
+          <a:bodyPr/>
+          <a:lstStyle/>
+          <a:p>
+            <a:endParaRPr lang="en-KE"/>
+          </a:p>
+        </p:txBody>
       </p:sp>
       <p:sp>
         <p:nvSpPr>
@@ -11631,7 +11759,7 @@
           </a:bodyPr>
           <a:lstStyle/>
           <a:p>
-            <a:pPr algn="l" indent="0" marL="0">
+            <a:pPr marL="0" indent="0" algn="l">
               <a:lnSpc>
                 <a:spcPts val="1680"/>
               </a:lnSpc>
@@ -11675,7 +11803,7 @@
           </a:bodyPr>
           <a:lstStyle/>
           <a:p>
-            <a:pPr algn="l" indent="0" marL="0">
+            <a:pPr marL="0" indent="0" algn="l">
               <a:lnSpc>
                 <a:spcPts val="1560"/>
               </a:lnSpc>
@@ -11728,6 +11856,13 @@
           </a:solidFill>
           <a:ln/>
         </p:spPr>
+        <p:txBody>
+          <a:bodyPr/>
+          <a:lstStyle/>
+          <a:p>
+            <a:endParaRPr lang="en-KE"/>
+          </a:p>
+        </p:txBody>
       </p:sp>
       <p:sp>
         <p:nvSpPr>
@@ -11752,7 +11887,7 @@
           </a:bodyPr>
           <a:lstStyle/>
           <a:p>
-            <a:pPr algn="l" indent="0" marL="0">
+            <a:pPr marL="0" indent="0" algn="l">
               <a:lnSpc>
                 <a:spcPts val="1680"/>
               </a:lnSpc>
@@ -11796,7 +11931,7 @@
           </a:bodyPr>
           <a:lstStyle/>
           <a:p>
-            <a:pPr algn="l" indent="0" marL="0">
+            <a:pPr marL="0" indent="0" algn="l">
               <a:lnSpc>
                 <a:spcPts val="1560"/>
               </a:lnSpc>
@@ -11849,6 +11984,13 @@
           </a:solidFill>
           <a:ln/>
         </p:spPr>
+        <p:txBody>
+          <a:bodyPr/>
+          <a:lstStyle/>
+          <a:p>
+            <a:endParaRPr lang="en-KE"/>
+          </a:p>
+        </p:txBody>
       </p:sp>
       <p:sp>
         <p:nvSpPr>
@@ -11873,7 +12015,7 @@
           </a:bodyPr>
           <a:lstStyle/>
           <a:p>
-            <a:pPr algn="l" indent="0" marL="0">
+            <a:pPr marL="0" indent="0" algn="l">
               <a:lnSpc>
                 <a:spcPts val="1680"/>
               </a:lnSpc>
@@ -11917,7 +12059,7 @@
           </a:bodyPr>
           <a:lstStyle/>
           <a:p>
-            <a:pPr algn="l" indent="0" marL="0">
+            <a:pPr marL="0" indent="0" algn="l">
               <a:lnSpc>
                 <a:spcPts val="1560"/>
               </a:lnSpc>
@@ -11959,6 +12101,13 @@
           </a:solidFill>
           <a:ln/>
         </p:spPr>
+        <p:txBody>
+          <a:bodyPr/>
+          <a:lstStyle/>
+          <a:p>
+            <a:endParaRPr lang="en-KE"/>
+          </a:p>
+        </p:txBody>
       </p:sp>
       <p:sp>
         <p:nvSpPr>
@@ -11983,7 +12132,7 @@
           </a:bodyPr>
           <a:lstStyle/>
           <a:p>
-            <a:pPr algn="l" indent="0" marL="0">
+            <a:pPr marL="0" indent="0" algn="l">
               <a:lnSpc>
                 <a:spcPts val="1680"/>
               </a:lnSpc>
@@ -12027,7 +12176,7 @@
           </a:bodyPr>
           <a:lstStyle/>
           <a:p>
-            <a:pPr algn="l" indent="0" marL="0">
+            <a:pPr marL="0" indent="0" algn="l">
               <a:lnSpc>
                 <a:spcPts val="1560"/>
               </a:lnSpc>
@@ -12071,7 +12220,7 @@
           </a:bodyPr>
           <a:lstStyle/>
           <a:p>
-            <a:pPr algn="l" indent="0" marL="0">
+            <a:pPr marL="0" indent="0" algn="l">
               <a:lnSpc>
                 <a:spcPts val="1690"/>
               </a:lnSpc>
@@ -12105,15 +12254,15 @@
       </p:sp>
       <p:pic>
         <p:nvPicPr>
-          <p:cNvPr id="19" name="Image 0" descr="ILRI and CGIAR logos">    </p:cNvPr>
+          <p:cNvPr id="19" name="Image 0" descr="ILRI and CGIAR logos"/>
           <p:cNvPicPr>
             <a:picLocks noChangeAspect="1"/>
           </p:cNvPicPr>
           <p:nvPr/>
         </p:nvPicPr>
         <p:blipFill>
-          <a:blip r:embed="rId1"/>
-          <a:srcRect l="-56" r="-56" t="0" b="0"/>
+          <a:blip r:embed="rId3"/>
+          <a:srcRect l="-56" r="-56"/>
           <a:stretch/>
         </p:blipFill>
         <p:spPr>
@@ -12149,7 +12298,7 @@
           </a:bodyPr>
           <a:lstStyle/>
           <a:p>
-            <a:pPr algn="l" indent="0" marL="0">
+            <a:pPr marL="0" indent="0" algn="l">
               <a:lnSpc>
                 <a:spcPts val="1680"/>
               </a:lnSpc>
@@ -12193,7 +12342,7 @@
           </a:bodyPr>
           <a:lstStyle/>
           <a:p>
-            <a:pPr algn="r" indent="0" marL="0">
+            <a:pPr marL="0" indent="0" algn="r">
               <a:lnSpc>
                 <a:spcPts val="1680"/>
               </a:lnSpc>
@@ -12230,6 +12379,7 @@
         <a:solidFill>
           <a:srgbClr val="F9F2EA"/>
         </a:solidFill>
+        <a:effectLst/>
       </p:bgPr>
     </p:bg>
     <p:spTree>
@@ -12249,7 +12399,9 @@
       <p:sp>
         <p:nvSpPr>
           <p:cNvPr id="2" name="Text 0"/>
-          <p:cNvSpPr/>
+          <p:cNvSpPr>
+            <a:spLocks noGrp="1"/>
+          </p:cNvSpPr>
           <p:nvPr>
             <p:ph type="title"/>
           </p:nvPr>
@@ -12271,7 +12423,7 @@
           </a:bodyPr>
           <a:lstStyle/>
           <a:p>
-            <a:pPr algn="l" indent="0" marL="0">
+            <a:pPr marL="0" indent="0" algn="l">
               <a:lnSpc>
                 <a:spcPts val="3960"/>
               </a:lnSpc>
@@ -12313,6 +12465,13 @@
           </a:solidFill>
           <a:ln/>
         </p:spPr>
+        <p:txBody>
+          <a:bodyPr/>
+          <a:lstStyle/>
+          <a:p>
+            <a:endParaRPr lang="en-KE"/>
+          </a:p>
+        </p:txBody>
       </p:sp>
       <p:sp>
         <p:nvSpPr>
@@ -12341,7 +12500,7 @@
           </a:bodyPr>
           <a:lstStyle/>
           <a:p>
-            <a:pPr algn="l" indent="0" marL="0">
+            <a:pPr marL="0" indent="0" algn="l">
               <a:lnSpc>
                 <a:spcPts val="1680"/>
               </a:lnSpc>
@@ -12372,7 +12531,7 @@
             <a:endParaRPr lang="en-US" sz="1200" dirty="0"/>
           </a:p>
           <a:p>
-            <a:pPr algn="l" indent="0" marL="0">
+            <a:pPr marL="0" indent="0" algn="l">
               <a:lnSpc>
                 <a:spcPts val="1680"/>
               </a:lnSpc>
@@ -12392,7 +12551,7 @@
             <a:endParaRPr lang="en-US" sz="1200" dirty="0"/>
           </a:p>
           <a:p>
-            <a:pPr algn="l" indent="0" marL="0">
+            <a:pPr marL="0" indent="0" algn="l">
               <a:lnSpc>
                 <a:spcPts val="1680"/>
               </a:lnSpc>
@@ -12412,7 +12571,7 @@
             <a:endParaRPr lang="en-US" sz="1200" dirty="0"/>
           </a:p>
           <a:p>
-            <a:pPr algn="l" indent="0" marL="0">
+            <a:pPr marL="0" indent="0" algn="l">
               <a:lnSpc>
                 <a:spcPts val="1680"/>
               </a:lnSpc>
@@ -12432,7 +12591,7 @@
             <a:endParaRPr lang="en-US" sz="1200" dirty="0"/>
           </a:p>
           <a:p>
-            <a:pPr algn="l" indent="0" marL="0">
+            <a:pPr marL="0" indent="0" algn="l">
               <a:lnSpc>
                 <a:spcPts val="1680"/>
               </a:lnSpc>
@@ -12452,7 +12611,7 @@
             <a:endParaRPr lang="en-US" sz="1200" dirty="0"/>
           </a:p>
           <a:p>
-            <a:pPr algn="l" indent="0" marL="0">
+            <a:pPr marL="0" indent="0" algn="l">
               <a:lnSpc>
                 <a:spcPts val="1680"/>
               </a:lnSpc>
@@ -12472,7 +12631,7 @@
             <a:endParaRPr lang="en-US" sz="1200" dirty="0"/>
           </a:p>
           <a:p>
-            <a:pPr algn="l" indent="0" marL="0">
+            <a:pPr marL="0" indent="0" algn="l">
               <a:lnSpc>
                 <a:spcPts val="1680"/>
               </a:lnSpc>
@@ -12492,7 +12651,7 @@
             <a:endParaRPr lang="en-US" sz="1200" dirty="0"/>
           </a:p>
           <a:p>
-            <a:pPr algn="l" indent="0" marL="0">
+            <a:pPr marL="0" indent="0" algn="l">
               <a:lnSpc>
                 <a:spcPts val="1680"/>
               </a:lnSpc>
@@ -12512,7 +12671,7 @@
             <a:endParaRPr lang="en-US" sz="1200" dirty="0"/>
           </a:p>
           <a:p>
-            <a:pPr algn="l" indent="0" marL="0">
+            <a:pPr marL="0" indent="0" algn="l">
               <a:lnSpc>
                 <a:spcPts val="1680"/>
               </a:lnSpc>
@@ -12521,7 +12680,7 @@
             <a:endParaRPr lang="en-US" sz="1200" dirty="0"/>
           </a:p>
           <a:p>
-            <a:pPr algn="l" indent="0" marL="0">
+            <a:pPr marL="0" indent="0" algn="l">
               <a:lnSpc>
                 <a:spcPts val="1680"/>
               </a:lnSpc>
@@ -12569,7 +12728,7 @@
           </a:bodyPr>
           <a:lstStyle/>
           <a:p>
-            <a:pPr algn="l" indent="0" marL="0">
+            <a:pPr marL="0" indent="0" algn="l">
               <a:lnSpc>
                 <a:spcPts val="1690"/>
               </a:lnSpc>
@@ -12659,11 +12818,11 @@
                 <a:lnTo>
                   <a:pt x="50800" y="683220"/>
                 </a:lnTo>
-                <a:arcTo hR="50800" wR="50800" stAng="5400000" swAng="5400000"/>
+                <a:arcTo wR="50800" hR="50800" stAng="5400000" swAng="5400000"/>
                 <a:lnTo>
                   <a:pt x="0" y="50800"/>
                 </a:lnTo>
-                <a:arcTo hR="50800" wR="50800" stAng="10800000" swAng="5400000"/>
+                <a:arcTo wR="50800" hR="50800" stAng="10800000" swAng="5400000"/>
                 <a:lnTo>
                   <a:pt x="50800" y="0"/>
                 </a:lnTo>
@@ -12679,6 +12838,13 @@
           </a:solidFill>
           <a:ln/>
         </p:spPr>
+        <p:txBody>
+          <a:bodyPr/>
+          <a:lstStyle/>
+          <a:p>
+            <a:endParaRPr lang="en-KE"/>
+          </a:p>
+        </p:txBody>
       </p:sp>
       <p:sp>
         <p:nvSpPr>
@@ -12707,7 +12873,7 @@
           </a:bodyPr>
           <a:lstStyle/>
           <a:p>
-            <a:pPr algn="l" indent="0" marL="0">
+            <a:pPr marL="0" indent="0" algn="l">
               <a:lnSpc>
                 <a:spcPts val="1690"/>
               </a:lnSpc>
@@ -12764,11 +12930,11 @@
                 <a:lnTo>
                   <a:pt x="50800" y="683220"/>
                 </a:lnTo>
-                <a:arcTo hR="50800" wR="50800" stAng="5400000" swAng="5400000"/>
+                <a:arcTo wR="50800" hR="50800" stAng="5400000" swAng="5400000"/>
                 <a:lnTo>
                   <a:pt x="0" y="50800"/>
                 </a:lnTo>
-                <a:arcTo hR="50800" wR="50800" stAng="10800000" swAng="5400000"/>
+                <a:arcTo wR="50800" hR="50800" stAng="10800000" swAng="5400000"/>
                 <a:lnTo>
                   <a:pt x="50800" y="0"/>
                 </a:lnTo>
@@ -12784,6 +12950,13 @@
           </a:solidFill>
           <a:ln/>
         </p:spPr>
+        <p:txBody>
+          <a:bodyPr/>
+          <a:lstStyle/>
+          <a:p>
+            <a:endParaRPr lang="en-KE"/>
+          </a:p>
+        </p:txBody>
       </p:sp>
       <p:sp>
         <p:nvSpPr>
@@ -12812,7 +12985,7 @@
           </a:bodyPr>
           <a:lstStyle/>
           <a:p>
-            <a:pPr algn="l" indent="0" marL="0">
+            <a:pPr marL="0" indent="0" algn="l">
               <a:lnSpc>
                 <a:spcPts val="1690"/>
               </a:lnSpc>
@@ -12869,11 +13042,11 @@
                 <a:lnTo>
                   <a:pt x="50800" y="683220"/>
                 </a:lnTo>
-                <a:arcTo hR="50800" wR="50800" stAng="5400000" swAng="5400000"/>
+                <a:arcTo wR="50800" hR="50800" stAng="5400000" swAng="5400000"/>
                 <a:lnTo>
                   <a:pt x="0" y="50800"/>
                 </a:lnTo>
-                <a:arcTo hR="50800" wR="50800" stAng="10800000" swAng="5400000"/>
+                <a:arcTo wR="50800" hR="50800" stAng="10800000" swAng="5400000"/>
                 <a:lnTo>
                   <a:pt x="50800" y="0"/>
                 </a:lnTo>
@@ -12889,18 +13062,25 @@
           </a:solidFill>
           <a:ln/>
         </p:spPr>
+        <p:txBody>
+          <a:bodyPr/>
+          <a:lstStyle/>
+          <a:p>
+            <a:endParaRPr lang="en-KE"/>
+          </a:p>
+        </p:txBody>
       </p:sp>
       <p:pic>
         <p:nvPicPr>
-          <p:cNvPr id="11" name="Image 0" descr="ILRI and CGIAR logos">    </p:cNvPr>
+          <p:cNvPr id="11" name="Image 0" descr="ILRI and CGIAR logos"/>
           <p:cNvPicPr>
             <a:picLocks noChangeAspect="1"/>
           </p:cNvPicPr>
           <p:nvPr/>
         </p:nvPicPr>
         <p:blipFill>
-          <a:blip r:embed="rId1"/>
-          <a:srcRect l="-56" r="-56" t="0" b="0"/>
+          <a:blip r:embed="rId3"/>
+          <a:srcRect l="-56" r="-56"/>
           <a:stretch/>
         </p:blipFill>
         <p:spPr>
@@ -12936,7 +13116,7 @@
           </a:bodyPr>
           <a:lstStyle/>
           <a:p>
-            <a:pPr algn="l" indent="0" marL="0">
+            <a:pPr marL="0" indent="0" algn="l">
               <a:lnSpc>
                 <a:spcPts val="1680"/>
               </a:lnSpc>
@@ -12980,7 +13160,7 @@
           </a:bodyPr>
           <a:lstStyle/>
           <a:p>
-            <a:pPr algn="r" indent="0" marL="0">
+            <a:pPr marL="0" indent="0" algn="r">
               <a:lnSpc>
                 <a:spcPts val="1680"/>
               </a:lnSpc>
@@ -13017,6 +13197,7 @@
         <a:solidFill>
           <a:srgbClr val="F9F2EA"/>
         </a:solidFill>
+        <a:effectLst/>
       </p:bgPr>
     </p:bg>
     <p:spTree>
@@ -13036,7 +13217,9 @@
       <p:sp>
         <p:nvSpPr>
           <p:cNvPr id="2" name="Text 0"/>
-          <p:cNvSpPr/>
+          <p:cNvSpPr>
+            <a:spLocks noGrp="1"/>
+          </p:cNvSpPr>
           <p:nvPr>
             <p:ph type="title"/>
           </p:nvPr>
@@ -13058,7 +13241,7 @@
           </a:bodyPr>
           <a:lstStyle/>
           <a:p>
-            <a:pPr algn="l" indent="0" marL="0">
+            <a:pPr marL="0" indent="0" algn="l">
               <a:lnSpc>
                 <a:spcPts val="3960"/>
               </a:lnSpc>
@@ -13100,6 +13283,13 @@
           </a:solidFill>
           <a:ln/>
         </p:spPr>
+        <p:txBody>
+          <a:bodyPr/>
+          <a:lstStyle/>
+          <a:p>
+            <a:endParaRPr lang="en-KE"/>
+          </a:p>
+        </p:txBody>
       </p:sp>
       <p:sp>
         <p:nvSpPr>
@@ -13124,7 +13314,7 @@
           </a:bodyPr>
           <a:lstStyle/>
           <a:p>
-            <a:pPr algn="l" indent="0" marL="0">
+            <a:pPr marL="0" indent="0" algn="l">
               <a:lnSpc>
                 <a:spcPts val="1960"/>
               </a:lnSpc>
@@ -13183,7 +13373,7 @@
           </a:bodyPr>
           <a:lstStyle/>
           <a:p>
-            <a:pPr algn="l" indent="0" marL="0">
+            <a:pPr marL="0" indent="0" algn="l">
               <a:lnSpc>
                 <a:spcPts val="1680"/>
               </a:lnSpc>
@@ -13203,7 +13393,7 @@
             <a:endParaRPr lang="en-US" sz="1200" dirty="0"/>
           </a:p>
           <a:p>
-            <a:pPr algn="l" indent="0" marL="0">
+            <a:pPr marL="0" indent="0" algn="l">
               <a:lnSpc>
                 <a:spcPts val="1680"/>
               </a:lnSpc>
@@ -13223,7 +13413,7 @@
             <a:endParaRPr lang="en-US" sz="1200" dirty="0"/>
           </a:p>
           <a:p>
-            <a:pPr algn="l" indent="0" marL="0">
+            <a:pPr marL="0" indent="0" algn="l">
               <a:lnSpc>
                 <a:spcPts val="1680"/>
               </a:lnSpc>
@@ -13267,7 +13457,7 @@
           </a:bodyPr>
           <a:lstStyle/>
           <a:p>
-            <a:pPr algn="l" indent="0" marL="0">
+            <a:pPr marL="0" indent="0" algn="l">
               <a:lnSpc>
                 <a:spcPts val="1960"/>
               </a:lnSpc>
@@ -13326,7 +13516,7 @@
           </a:bodyPr>
           <a:lstStyle/>
           <a:p>
-            <a:pPr algn="l" indent="0" marL="0">
+            <a:pPr marL="0" indent="0" algn="l">
               <a:lnSpc>
                 <a:spcPts val="1680"/>
               </a:lnSpc>
@@ -13357,7 +13547,7 @@
             <a:endParaRPr lang="en-US" sz="1200" dirty="0"/>
           </a:p>
           <a:p>
-            <a:pPr algn="l" indent="0" marL="0">
+            <a:pPr marL="0" indent="0" algn="l">
               <a:lnSpc>
                 <a:spcPts val="1680"/>
               </a:lnSpc>
@@ -13401,7 +13591,7 @@
           </a:bodyPr>
           <a:lstStyle/>
           <a:p>
-            <a:pPr algn="l" indent="0" marL="0">
+            <a:pPr marL="0" indent="0" algn="l">
               <a:lnSpc>
                 <a:spcPts val="1890"/>
               </a:lnSpc>
@@ -13435,15 +13625,15 @@
       </p:sp>
       <p:pic>
         <p:nvPicPr>
-          <p:cNvPr id="9" name="Image 0" descr="ILRI and CGIAR logos">    </p:cNvPr>
+          <p:cNvPr id="9" name="Image 0" descr="ILRI and CGIAR logos"/>
           <p:cNvPicPr>
             <a:picLocks noChangeAspect="1"/>
           </p:cNvPicPr>
           <p:nvPr/>
         </p:nvPicPr>
         <p:blipFill>
-          <a:blip r:embed="rId1"/>
-          <a:srcRect l="-56" r="-56" t="0" b="0"/>
+          <a:blip r:embed="rId3"/>
+          <a:srcRect l="-56" r="-56"/>
           <a:stretch/>
         </p:blipFill>
         <p:spPr>
@@ -13479,7 +13669,7 @@
           </a:bodyPr>
           <a:lstStyle/>
           <a:p>
-            <a:pPr algn="l" indent="0" marL="0">
+            <a:pPr marL="0" indent="0" algn="l">
               <a:lnSpc>
                 <a:spcPts val="1680"/>
               </a:lnSpc>
@@ -13523,7 +13713,7 @@
           </a:bodyPr>
           <a:lstStyle/>
           <a:p>
-            <a:pPr algn="r" indent="0" marL="0">
+            <a:pPr marL="0" indent="0" algn="r">
               <a:lnSpc>
                 <a:spcPts val="1680"/>
               </a:lnSpc>
@@ -13560,6 +13750,7 @@
         <a:solidFill>
           <a:srgbClr val="F9F2EA"/>
         </a:solidFill>
+        <a:effectLst/>
       </p:bgPr>
     </p:bg>
     <p:spTree>
@@ -13579,7 +13770,9 @@
       <p:sp>
         <p:nvSpPr>
           <p:cNvPr id="2" name="Text 0"/>
-          <p:cNvSpPr/>
+          <p:cNvSpPr>
+            <a:spLocks noGrp="1"/>
+          </p:cNvSpPr>
           <p:nvPr>
             <p:ph type="title"/>
           </p:nvPr>
@@ -13601,7 +13794,7 @@
           </a:bodyPr>
           <a:lstStyle/>
           <a:p>
-            <a:pPr algn="l" indent="0" marL="0">
+            <a:pPr marL="0" indent="0" algn="l">
               <a:lnSpc>
                 <a:spcPts val="3960"/>
               </a:lnSpc>
@@ -13643,6 +13836,13 @@
           </a:solidFill>
           <a:ln/>
         </p:spPr>
+        <p:txBody>
+          <a:bodyPr/>
+          <a:lstStyle/>
+          <a:p>
+            <a:endParaRPr lang="en-KE"/>
+          </a:p>
+        </p:txBody>
       </p:sp>
       <p:sp>
         <p:nvSpPr>
@@ -13671,7 +13871,7 @@
           </a:bodyPr>
           <a:lstStyle/>
           <a:p>
-            <a:pPr algn="l" indent="0" marL="0">
+            <a:pPr marL="0" indent="0" algn="l">
               <a:lnSpc>
                 <a:spcPts val="1680"/>
               </a:lnSpc>
@@ -13691,7 +13891,7 @@
             <a:endParaRPr lang="en-US" sz="1200" dirty="0"/>
           </a:p>
           <a:p>
-            <a:pPr algn="l" indent="0" marL="0">
+            <a:pPr marL="0" indent="0" algn="l">
               <a:lnSpc>
                 <a:spcPts val="1680"/>
               </a:lnSpc>
@@ -13711,7 +13911,7 @@
             <a:endParaRPr lang="en-US" sz="1200" dirty="0"/>
           </a:p>
           <a:p>
-            <a:pPr algn="l" indent="0" marL="0">
+            <a:pPr marL="0" indent="0" algn="l">
               <a:lnSpc>
                 <a:spcPts val="1680"/>
               </a:lnSpc>
@@ -13720,7 +13920,7 @@
             <a:endParaRPr lang="en-US" sz="1200" dirty="0"/>
           </a:p>
           <a:p>
-            <a:pPr algn="l" indent="0" marL="0">
+            <a:pPr marL="0" indent="0" algn="l">
               <a:lnSpc>
                 <a:spcPts val="1680"/>
               </a:lnSpc>
@@ -13740,7 +13940,7 @@
             <a:endParaRPr lang="en-US" sz="1200" dirty="0"/>
           </a:p>
           <a:p>
-            <a:pPr algn="l" indent="0" marL="0">
+            <a:pPr marL="0" indent="0" algn="l">
               <a:lnSpc>
                 <a:spcPts val="1680"/>
               </a:lnSpc>
@@ -13771,7 +13971,7 @@
             <a:endParaRPr lang="en-US" sz="1200" dirty="0"/>
           </a:p>
           <a:p>
-            <a:pPr algn="l" indent="0" marL="0">
+            <a:pPr marL="0" indent="0" algn="l">
               <a:lnSpc>
                 <a:spcPts val="1680"/>
               </a:lnSpc>
@@ -13791,7 +13991,7 @@
             <a:endParaRPr lang="en-US" sz="1200" dirty="0"/>
           </a:p>
           <a:p>
-            <a:pPr algn="l" indent="0" marL="0">
+            <a:pPr marL="0" indent="0" algn="l">
               <a:lnSpc>
                 <a:spcPts val="1680"/>
               </a:lnSpc>
@@ -13811,7 +14011,7 @@
             <a:endParaRPr lang="en-US" sz="1200" dirty="0"/>
           </a:p>
           <a:p>
-            <a:pPr algn="l" indent="0" marL="0">
+            <a:pPr marL="0" indent="0" algn="l">
               <a:lnSpc>
                 <a:spcPts val="1680"/>
               </a:lnSpc>
@@ -13859,7 +14059,7 @@
           </a:bodyPr>
           <a:lstStyle/>
           <a:p>
-            <a:pPr algn="l" indent="0" marL="0">
+            <a:pPr marL="0" indent="0" algn="l">
               <a:lnSpc>
                 <a:spcPts val="1690"/>
               </a:lnSpc>
@@ -13916,11 +14116,11 @@
                 <a:lnTo>
                   <a:pt x="50800" y="683220"/>
                 </a:lnTo>
-                <a:arcTo hR="50800" wR="50800" stAng="5400000" swAng="5400000"/>
+                <a:arcTo wR="50800" hR="50800" stAng="5400000" swAng="5400000"/>
                 <a:lnTo>
                   <a:pt x="0" y="50800"/>
                 </a:lnTo>
-                <a:arcTo hR="50800" wR="50800" stAng="10800000" swAng="5400000"/>
+                <a:arcTo wR="50800" hR="50800" stAng="10800000" swAng="5400000"/>
                 <a:lnTo>
                   <a:pt x="50800" y="0"/>
                 </a:lnTo>
@@ -13936,6 +14136,13 @@
           </a:solidFill>
           <a:ln/>
         </p:spPr>
+        <p:txBody>
+          <a:bodyPr/>
+          <a:lstStyle/>
+          <a:p>
+            <a:endParaRPr lang="en-KE"/>
+          </a:p>
+        </p:txBody>
       </p:sp>
       <p:sp>
         <p:nvSpPr>
@@ -13964,7 +14171,7 @@
           </a:bodyPr>
           <a:lstStyle/>
           <a:p>
-            <a:pPr algn="l" indent="0" marL="0">
+            <a:pPr marL="0" indent="0" algn="l">
               <a:lnSpc>
                 <a:spcPts val="1690"/>
               </a:lnSpc>
@@ -14032,11 +14239,11 @@
                 <a:lnTo>
                   <a:pt x="50800" y="683220"/>
                 </a:lnTo>
-                <a:arcTo hR="50800" wR="50800" stAng="5400000" swAng="5400000"/>
+                <a:arcTo wR="50800" hR="50800" stAng="5400000" swAng="5400000"/>
                 <a:lnTo>
                   <a:pt x="0" y="50800"/>
                 </a:lnTo>
-                <a:arcTo hR="50800" wR="50800" stAng="10800000" swAng="5400000"/>
+                <a:arcTo wR="50800" hR="50800" stAng="10800000" swAng="5400000"/>
                 <a:lnTo>
                   <a:pt x="50800" y="0"/>
                 </a:lnTo>
@@ -14052,6 +14259,13 @@
           </a:solidFill>
           <a:ln/>
         </p:spPr>
+        <p:txBody>
+          <a:bodyPr/>
+          <a:lstStyle/>
+          <a:p>
+            <a:endParaRPr lang="en-KE"/>
+          </a:p>
+        </p:txBody>
       </p:sp>
       <p:sp>
         <p:nvSpPr>
@@ -14080,7 +14294,7 @@
           </a:bodyPr>
           <a:lstStyle/>
           <a:p>
-            <a:pPr algn="l" indent="0" marL="0">
+            <a:pPr marL="0" indent="0" algn="l">
               <a:lnSpc>
                 <a:spcPts val="1690"/>
               </a:lnSpc>
@@ -14148,11 +14362,11 @@
                 <a:lnTo>
                   <a:pt x="50800" y="683220"/>
                 </a:lnTo>
-                <a:arcTo hR="50800" wR="50800" stAng="5400000" swAng="5400000"/>
+                <a:arcTo wR="50800" hR="50800" stAng="5400000" swAng="5400000"/>
                 <a:lnTo>
                   <a:pt x="0" y="50800"/>
                 </a:lnTo>
-                <a:arcTo hR="50800" wR="50800" stAng="10800000" swAng="5400000"/>
+                <a:arcTo wR="50800" hR="50800" stAng="10800000" swAng="5400000"/>
                 <a:lnTo>
                   <a:pt x="50800" y="0"/>
                 </a:lnTo>
@@ -14168,18 +14382,25 @@
           </a:solidFill>
           <a:ln/>
         </p:spPr>
+        <p:txBody>
+          <a:bodyPr/>
+          <a:lstStyle/>
+          <a:p>
+            <a:endParaRPr lang="en-KE"/>
+          </a:p>
+        </p:txBody>
       </p:sp>
       <p:pic>
         <p:nvPicPr>
-          <p:cNvPr id="11" name="Image 0" descr="ILRI and CGIAR logos">    </p:cNvPr>
+          <p:cNvPr id="11" name="Image 0" descr="ILRI and CGIAR logos"/>
           <p:cNvPicPr>
             <a:picLocks noChangeAspect="1"/>
           </p:cNvPicPr>
           <p:nvPr/>
         </p:nvPicPr>
         <p:blipFill>
-          <a:blip r:embed="rId1"/>
-          <a:srcRect l="-56" r="-56" t="0" b="0"/>
+          <a:blip r:embed="rId3"/>
+          <a:srcRect l="-56" r="-56"/>
           <a:stretch/>
         </p:blipFill>
         <p:spPr>
@@ -14215,7 +14436,7 @@
           </a:bodyPr>
           <a:lstStyle/>
           <a:p>
-            <a:pPr algn="l" indent="0" marL="0">
+            <a:pPr marL="0" indent="0" algn="l">
               <a:lnSpc>
                 <a:spcPts val="1680"/>
               </a:lnSpc>
@@ -14259,7 +14480,7 @@
           </a:bodyPr>
           <a:lstStyle/>
           <a:p>
-            <a:pPr algn="r" indent="0" marL="0">
+            <a:pPr marL="0" indent="0" algn="r">
               <a:lnSpc>
                 <a:spcPts val="1680"/>
               </a:lnSpc>
@@ -14296,6 +14517,7 @@
         <a:solidFill>
           <a:srgbClr val="F9F2EA"/>
         </a:solidFill>
+        <a:effectLst/>
       </p:bgPr>
     </p:bg>
     <p:spTree>
@@ -14315,7 +14537,9 @@
       <p:sp>
         <p:nvSpPr>
           <p:cNvPr id="2" name="Text 0"/>
-          <p:cNvSpPr/>
+          <p:cNvSpPr>
+            <a:spLocks noGrp="1"/>
+          </p:cNvSpPr>
           <p:nvPr>
             <p:ph type="title"/>
           </p:nvPr>
@@ -14337,7 +14561,7 @@
           </a:bodyPr>
           <a:lstStyle/>
           <a:p>
-            <a:pPr algn="l" indent="0" marL="0">
+            <a:pPr marL="0" indent="0" algn="l">
               <a:lnSpc>
                 <a:spcPts val="3960"/>
               </a:lnSpc>
@@ -14379,6 +14603,13 @@
           </a:solidFill>
           <a:ln/>
         </p:spPr>
+        <p:txBody>
+          <a:bodyPr/>
+          <a:lstStyle/>
+          <a:p>
+            <a:endParaRPr lang="en-KE"/>
+          </a:p>
+        </p:txBody>
       </p:sp>
       <p:graphicFrame>
         <p:nvGraphicFramePr>
@@ -14396,15 +14627,27 @@
         </p:nvGraphicFramePr>
         <p:xfrm>
           <a:off x="825500" y="1696690"/>
-          <a:ext cx="10553700" cy="1930053"/>
+          <a:ext cx="10553700" cy="1930055"/>
         </p:xfrm>
         <a:graphic>
           <a:graphicData uri="http://schemas.openxmlformats.org/drawingml/2006/table">
             <a:tbl>
               <a:tblPr/>
               <a:tblGrid>
-                <a:gridCol w="2532888"/>
-                <a:gridCol w="8020812"/>
+                <a:gridCol w="2532888">
+                  <a:extLst>
+                    <a:ext uri="{9D8B030D-6E8A-4147-A177-3AD203B41FA5}">
+                      <a16:colId xmlns:a16="http://schemas.microsoft.com/office/drawing/2014/main" val="20000"/>
+                    </a:ext>
+                  </a:extLst>
+                </a:gridCol>
+                <a:gridCol w="8020812">
+                  <a:extLst>
+                    <a:ext uri="{9D8B030D-6E8A-4147-A177-3AD203B41FA5}">
+                      <a16:colId xmlns:a16="http://schemas.microsoft.com/office/drawing/2014/main" val="20001"/>
+                    </a:ext>
+                  </a:extLst>
+                </a:gridCol>
               </a:tblGrid>
               <a:tr h="386011">
                 <a:tc>
@@ -14412,7 +14655,7 @@
                     <a:bodyPr/>
                     <a:lstStyle/>
                     <a:p>
-                      <a:pPr indent="0" marL="0">
+                      <a:pPr marL="0" indent="0">
                         <a:lnSpc>
                           <a:spcPts val="1960"/>
                         </a:lnSpc>
@@ -14436,7 +14679,7 @@
                       </a:endParaRPr>
                     </a:p>
                   </a:txBody>
-                  <a:tcPr marL="62230" marR="62230" marT="62230" marB="62230" anchor="t">
+                  <a:tcPr marL="62230" marR="62230" marT="62230" marB="62230">
                     <a:lnL w="12700" cap="flat" cmpd="sng" algn="ctr">
                       <a:solidFill>
                         <a:srgbClr val="C7C1BB"/>
@@ -14483,7 +14726,7 @@
                     <a:bodyPr/>
                     <a:lstStyle/>
                     <a:p>
-                      <a:pPr indent="0" marL="0">
+                      <a:pPr marL="0" indent="0">
                         <a:lnSpc>
                           <a:spcPts val="1960"/>
                         </a:lnSpc>
@@ -14507,7 +14750,7 @@
                       </a:endParaRPr>
                     </a:p>
                   </a:txBody>
-                  <a:tcPr marL="62230" marR="62230" marT="62230" marB="62230" anchor="t">
+                  <a:tcPr marL="62230" marR="62230" marT="62230" marB="62230">
                     <a:lnL w="12700" cap="flat" cmpd="sng" algn="ctr">
                       <a:solidFill>
                         <a:srgbClr val="B9B3AD"/>
@@ -14549,6 +14792,11 @@
                     </a:solidFill>
                   </a:tcPr>
                 </a:tc>
+                <a:extLst>
+                  <a:ext uri="{0D108BD9-81ED-4DB2-BD59-A6C34878D82A}">
+                    <a16:rowId xmlns:a16="http://schemas.microsoft.com/office/drawing/2014/main" val="10000"/>
+                  </a:ext>
+                </a:extLst>
               </a:tr>
               <a:tr h="386011">
                 <a:tc>
@@ -14556,7 +14804,7 @@
                     <a:bodyPr/>
                     <a:lstStyle/>
                     <a:p>
-                      <a:pPr indent="0" marL="0">
+                      <a:pPr marL="0" indent="0">
                         <a:lnSpc>
                           <a:spcPts val="1960"/>
                         </a:lnSpc>
@@ -14580,7 +14828,7 @@
                       </a:endParaRPr>
                     </a:p>
                   </a:txBody>
-                  <a:tcPr marL="62230" marR="62230" marT="62230" marB="62230" anchor="t">
+                  <a:tcPr marL="62230" marR="62230" marT="62230" marB="62230">
                     <a:lnL w="12700" cap="flat" cmpd="sng" algn="ctr">
                       <a:solidFill>
                         <a:srgbClr val="C7C1BB"/>
@@ -14624,7 +14872,7 @@
                     <a:bodyPr/>
                     <a:lstStyle/>
                     <a:p>
-                      <a:pPr indent="0" marL="0">
+                      <a:pPr marL="0" indent="0">
                         <a:lnSpc>
                           <a:spcPts val="1960"/>
                         </a:lnSpc>
@@ -14648,7 +14896,7 @@
                       </a:endParaRPr>
                     </a:p>
                   </a:txBody>
-                  <a:tcPr marL="62230" marR="62230" marT="62230" marB="62230" anchor="t">
+                  <a:tcPr marL="62230" marR="62230" marT="62230" marB="62230">
                     <a:lnL w="12700" cap="flat" cmpd="sng" algn="ctr">
                       <a:solidFill>
                         <a:srgbClr val="C7C1BB"/>
@@ -14687,6 +14935,11 @@
                     </a:lnB>
                   </a:tcPr>
                 </a:tc>
+                <a:extLst>
+                  <a:ext uri="{0D108BD9-81ED-4DB2-BD59-A6C34878D82A}">
+                    <a16:rowId xmlns:a16="http://schemas.microsoft.com/office/drawing/2014/main" val="10001"/>
+                  </a:ext>
+                </a:extLst>
               </a:tr>
               <a:tr h="386011">
                 <a:tc>
@@ -14694,7 +14947,7 @@
                     <a:bodyPr/>
                     <a:lstStyle/>
                     <a:p>
-                      <a:pPr indent="0" marL="0">
+                      <a:pPr marL="0" indent="0">
                         <a:lnSpc>
                           <a:spcPts val="1960"/>
                         </a:lnSpc>
@@ -14718,7 +14971,7 @@
                       </a:endParaRPr>
                     </a:p>
                   </a:txBody>
-                  <a:tcPr marL="62230" marR="62230" marT="62230" marB="62230" anchor="t">
+                  <a:tcPr marL="62230" marR="62230" marT="62230" marB="62230">
                     <a:lnL w="12700" cap="flat" cmpd="sng" algn="ctr">
                       <a:solidFill>
                         <a:srgbClr val="C7C1BB"/>
@@ -14765,7 +15018,7 @@
                     <a:bodyPr/>
                     <a:lstStyle/>
                     <a:p>
-                      <a:pPr indent="0" marL="0">
+                      <a:pPr marL="0" indent="0">
                         <a:lnSpc>
                           <a:spcPts val="1960"/>
                         </a:lnSpc>
@@ -14789,7 +15042,7 @@
                       </a:endParaRPr>
                     </a:p>
                   </a:txBody>
-                  <a:tcPr marL="62230" marR="62230" marT="62230" marB="62230" anchor="t">
+                  <a:tcPr marL="62230" marR="62230" marT="62230" marB="62230">
                     <a:lnL w="12700" cap="flat" cmpd="sng" algn="ctr">
                       <a:solidFill>
                         <a:srgbClr val="C0B8AE"/>
@@ -14831,6 +15084,11 @@
                     </a:solidFill>
                   </a:tcPr>
                 </a:tc>
+                <a:extLst>
+                  <a:ext uri="{0D108BD9-81ED-4DB2-BD59-A6C34878D82A}">
+                    <a16:rowId xmlns:a16="http://schemas.microsoft.com/office/drawing/2014/main" val="10002"/>
+                  </a:ext>
+                </a:extLst>
               </a:tr>
               <a:tr h="386011">
                 <a:tc>
@@ -14838,7 +15096,7 @@
                     <a:bodyPr/>
                     <a:lstStyle/>
                     <a:p>
-                      <a:pPr indent="0" marL="0">
+                      <a:pPr marL="0" indent="0">
                         <a:lnSpc>
                           <a:spcPts val="1960"/>
                         </a:lnSpc>
@@ -14862,7 +15120,7 @@
                       </a:endParaRPr>
                     </a:p>
                   </a:txBody>
-                  <a:tcPr marL="62230" marR="62230" marT="62230" marB="62230" anchor="t">
+                  <a:tcPr marL="62230" marR="62230" marT="62230" marB="62230">
                     <a:lnL w="12700" cap="flat" cmpd="sng" algn="ctr">
                       <a:solidFill>
                         <a:srgbClr val="C7C1BB"/>
@@ -14906,7 +15164,7 @@
                     <a:bodyPr/>
                     <a:lstStyle/>
                     <a:p>
-                      <a:pPr indent="0" marL="0">
+                      <a:pPr marL="0" indent="0">
                         <a:lnSpc>
                           <a:spcPts val="1960"/>
                         </a:lnSpc>
@@ -14930,7 +15188,7 @@
                       </a:endParaRPr>
                     </a:p>
                   </a:txBody>
-                  <a:tcPr marL="62230" marR="62230" marT="62230" marB="62230" anchor="t">
+                  <a:tcPr marL="62230" marR="62230" marT="62230" marB="62230">
                     <a:lnL w="12700" cap="flat" cmpd="sng" algn="ctr">
                       <a:solidFill>
                         <a:srgbClr val="C7C1BB"/>
@@ -14969,6 +15227,11 @@
                     </a:lnB>
                   </a:tcPr>
                 </a:tc>
+                <a:extLst>
+                  <a:ext uri="{0D108BD9-81ED-4DB2-BD59-A6C34878D82A}">
+                    <a16:rowId xmlns:a16="http://schemas.microsoft.com/office/drawing/2014/main" val="10003"/>
+                  </a:ext>
+                </a:extLst>
               </a:tr>
               <a:tr h="386011">
                 <a:tc>
@@ -14976,7 +15239,7 @@
                     <a:bodyPr/>
                     <a:lstStyle/>
                     <a:p>
-                      <a:pPr indent="0" marL="0">
+                      <a:pPr marL="0" indent="0">
                         <a:lnSpc>
                           <a:spcPts val="1960"/>
                         </a:lnSpc>
@@ -15000,7 +15263,7 @@
                       </a:endParaRPr>
                     </a:p>
                   </a:txBody>
-                  <a:tcPr marL="62230" marR="62230" marT="62230" marB="62230" anchor="t">
+                  <a:tcPr marL="62230" marR="62230" marT="62230" marB="62230">
                     <a:lnL w="12700" cap="flat" cmpd="sng" algn="ctr">
                       <a:solidFill>
                         <a:srgbClr val="C7C1BB"/>
@@ -15047,7 +15310,7 @@
                     <a:bodyPr/>
                     <a:lstStyle/>
                     <a:p>
-                      <a:pPr indent="0" marL="0">
+                      <a:pPr marL="0" indent="0">
                         <a:lnSpc>
                           <a:spcPts val="1960"/>
                         </a:lnSpc>
@@ -15071,7 +15334,7 @@
                       </a:endParaRPr>
                     </a:p>
                   </a:txBody>
-                  <a:tcPr marL="62230" marR="62230" marT="62230" marB="62230" anchor="t">
+                  <a:tcPr marL="62230" marR="62230" marT="62230" marB="62230">
                     <a:lnL w="12700" cap="flat" cmpd="sng" algn="ctr">
                       <a:solidFill>
                         <a:srgbClr val="C0B8AE"/>
@@ -15113,6 +15376,11 @@
                     </a:solidFill>
                   </a:tcPr>
                 </a:tc>
+                <a:extLst>
+                  <a:ext uri="{0D108BD9-81ED-4DB2-BD59-A6C34878D82A}">
+                    <a16:rowId xmlns:a16="http://schemas.microsoft.com/office/drawing/2014/main" val="10004"/>
+                  </a:ext>
+                </a:extLst>
               </a:tr>
             </a:tbl>
           </a:graphicData>
@@ -15139,18 +15407,25 @@
           </a:solidFill>
           <a:ln/>
         </p:spPr>
+        <p:txBody>
+          <a:bodyPr/>
+          <a:lstStyle/>
+          <a:p>
+            <a:endParaRPr lang="en-KE"/>
+          </a:p>
+        </p:txBody>
       </p:sp>
       <p:pic>
         <p:nvPicPr>
-          <p:cNvPr id="6" name="Image 0" descr="Search">    </p:cNvPr>
+          <p:cNvPr id="6" name="Image 0" descr="Search"/>
           <p:cNvPicPr>
             <a:picLocks noChangeAspect="1"/>
           </p:cNvPicPr>
           <p:nvPr/>
         </p:nvPicPr>
         <p:blipFill>
-          <a:blip r:embed="rId1"/>
-          <a:srcRect l="0" r="0" t="0" b="0"/>
+          <a:blip r:embed="rId3"/>
+          <a:srcRect/>
           <a:stretch/>
         </p:blipFill>
         <p:spPr>
@@ -15186,7 +15461,7 @@
           </a:bodyPr>
           <a:lstStyle/>
           <a:p>
-            <a:pPr algn="l" indent="0" marL="0">
+            <a:pPr marL="0" indent="0" algn="l">
               <a:lnSpc>
                 <a:spcPts val="1890"/>
               </a:lnSpc>
@@ -15275,15 +15550,15 @@
       </p:sp>
       <p:pic>
         <p:nvPicPr>
-          <p:cNvPr id="8" name="Image 1" descr="ILRI and CGIAR logos">    </p:cNvPr>
+          <p:cNvPr id="8" name="Image 1" descr="ILRI and CGIAR logos"/>
           <p:cNvPicPr>
             <a:picLocks noChangeAspect="1"/>
           </p:cNvPicPr>
           <p:nvPr/>
         </p:nvPicPr>
         <p:blipFill>
-          <a:blip r:embed="rId2"/>
-          <a:srcRect l="-56" r="-56" t="0" b="0"/>
+          <a:blip r:embed="rId4"/>
+          <a:srcRect l="-56" r="-56"/>
           <a:stretch/>
         </p:blipFill>
         <p:spPr>
@@ -15319,7 +15594,7 @@
           </a:bodyPr>
           <a:lstStyle/>
           <a:p>
-            <a:pPr algn="l" indent="0" marL="0">
+            <a:pPr marL="0" indent="0" algn="l">
               <a:lnSpc>
                 <a:spcPts val="1680"/>
               </a:lnSpc>
@@ -15363,7 +15638,7 @@
           </a:bodyPr>
           <a:lstStyle/>
           <a:p>
-            <a:pPr algn="r" indent="0" marL="0">
+            <a:pPr marL="0" indent="0" algn="r">
               <a:lnSpc>
                 <a:spcPts val="1680"/>
               </a:lnSpc>
@@ -15400,6 +15675,7 @@
         <a:solidFill>
           <a:srgbClr val="F9F2EA"/>
         </a:solidFill>
+        <a:effectLst/>
       </p:bgPr>
     </p:bg>
     <p:spTree>
@@ -15419,7 +15695,9 @@
       <p:sp>
         <p:nvSpPr>
           <p:cNvPr id="2" name="Text 0"/>
-          <p:cNvSpPr/>
+          <p:cNvSpPr>
+            <a:spLocks noGrp="1"/>
+          </p:cNvSpPr>
           <p:nvPr>
             <p:ph type="title"/>
           </p:nvPr>
@@ -15441,7 +15719,7 @@
           </a:bodyPr>
           <a:lstStyle/>
           <a:p>
-            <a:pPr algn="l" indent="0" marL="0">
+            <a:pPr marL="0" indent="0" algn="l">
               <a:lnSpc>
                 <a:spcPts val="3960"/>
               </a:lnSpc>
@@ -15483,6 +15761,13 @@
           </a:solidFill>
           <a:ln/>
         </p:spPr>
+        <p:txBody>
+          <a:bodyPr/>
+          <a:lstStyle/>
+          <a:p>
+            <a:endParaRPr lang="en-KE"/>
+          </a:p>
+        </p:txBody>
       </p:sp>
       <p:graphicFrame>
         <p:nvGraphicFramePr>
@@ -15500,16 +15785,34 @@
         </p:nvGraphicFramePr>
         <p:xfrm>
           <a:off x="825500" y="1722090"/>
-          <a:ext cx="10553700" cy="1318022"/>
+          <a:ext cx="10553700" cy="1318023"/>
         </p:xfrm>
         <a:graphic>
           <a:graphicData uri="http://schemas.openxmlformats.org/drawingml/2006/table">
             <a:tbl>
               <a:tblPr/>
               <a:tblGrid>
-                <a:gridCol w="1477518"/>
-                <a:gridCol w="2110740"/>
-                <a:gridCol w="6965442"/>
+                <a:gridCol w="1477518">
+                  <a:extLst>
+                    <a:ext uri="{9D8B030D-6E8A-4147-A177-3AD203B41FA5}">
+                      <a16:colId xmlns:a16="http://schemas.microsoft.com/office/drawing/2014/main" val="20000"/>
+                    </a:ext>
+                  </a:extLst>
+                </a:gridCol>
+                <a:gridCol w="2110740">
+                  <a:extLst>
+                    <a:ext uri="{9D8B030D-6E8A-4147-A177-3AD203B41FA5}">
+                      <a16:colId xmlns:a16="http://schemas.microsoft.com/office/drawing/2014/main" val="20001"/>
+                    </a:ext>
+                  </a:extLst>
+                </a:gridCol>
+                <a:gridCol w="6965442">
+                  <a:extLst>
+                    <a:ext uri="{9D8B030D-6E8A-4147-A177-3AD203B41FA5}">
+                      <a16:colId xmlns:a16="http://schemas.microsoft.com/office/drawing/2014/main" val="20002"/>
+                    </a:ext>
+                  </a:extLst>
+                </a:gridCol>
               </a:tblGrid>
               <a:tr h="439341">
                 <a:tc>
@@ -15517,7 +15820,7 @@
                     <a:bodyPr/>
                     <a:lstStyle/>
                     <a:p>
-                      <a:pPr indent="0" marL="0">
+                      <a:pPr marL="0" indent="0">
                         <a:lnSpc>
                           <a:spcPts val="2240"/>
                         </a:lnSpc>
@@ -15541,7 +15844,7 @@
                       </a:endParaRPr>
                     </a:p>
                   </a:txBody>
-                  <a:tcPr marL="71120" marR="71120" marT="71120" marB="71120" anchor="t">
+                  <a:tcPr marL="71120" marR="71120" marT="71120" marB="71120">
                     <a:lnL w="12700" cap="flat" cmpd="sng" algn="ctr">
                       <a:solidFill>
                         <a:srgbClr val="C7C1BB"/>
@@ -15588,7 +15891,7 @@
                     <a:bodyPr/>
                     <a:lstStyle/>
                     <a:p>
-                      <a:pPr indent="0" marL="0">
+                      <a:pPr marL="0" indent="0">
                         <a:lnSpc>
                           <a:spcPts val="2240"/>
                         </a:lnSpc>
@@ -15612,7 +15915,7 @@
                       </a:endParaRPr>
                     </a:p>
                   </a:txBody>
-                  <a:tcPr marL="71120" marR="71120" marT="71120" marB="71120" anchor="t">
+                  <a:tcPr marL="71120" marR="71120" marT="71120" marB="71120">
                     <a:lnL w="12700" cap="flat" cmpd="sng" algn="ctr">
                       <a:solidFill>
                         <a:srgbClr val="B9B3AD"/>
@@ -15659,7 +15962,7 @@
                     <a:bodyPr/>
                     <a:lstStyle/>
                     <a:p>
-                      <a:pPr indent="0" marL="0">
+                      <a:pPr marL="0" indent="0">
                         <a:lnSpc>
                           <a:spcPts val="2240"/>
                         </a:lnSpc>
@@ -15683,7 +15986,7 @@
                       </a:endParaRPr>
                     </a:p>
                   </a:txBody>
-                  <a:tcPr marL="71120" marR="71120" marT="71120" marB="71120" anchor="t">
+                  <a:tcPr marL="71120" marR="71120" marT="71120" marB="71120">
                     <a:lnL w="12700" cap="flat" cmpd="sng" algn="ctr">
                       <a:solidFill>
                         <a:srgbClr val="B9B3AD"/>
@@ -15725,6 +16028,11 @@
                     </a:solidFill>
                   </a:tcPr>
                 </a:tc>
+                <a:extLst>
+                  <a:ext uri="{0D108BD9-81ED-4DB2-BD59-A6C34878D82A}">
+                    <a16:rowId xmlns:a16="http://schemas.microsoft.com/office/drawing/2014/main" val="10000"/>
+                  </a:ext>
+                </a:extLst>
               </a:tr>
               <a:tr h="439341">
                 <a:tc>
@@ -15732,7 +16040,7 @@
                     <a:bodyPr/>
                     <a:lstStyle/>
                     <a:p>
-                      <a:pPr indent="0" marL="0">
+                      <a:pPr marL="0" indent="0">
                         <a:lnSpc>
                           <a:spcPts val="2240"/>
                         </a:lnSpc>
@@ -15756,7 +16064,7 @@
                       </a:endParaRPr>
                     </a:p>
                   </a:txBody>
-                  <a:tcPr marL="71120" marR="71120" marT="71120" marB="71120" anchor="t">
+                  <a:tcPr marL="71120" marR="71120" marT="71120" marB="71120">
                     <a:lnL w="12700" cap="flat" cmpd="sng" algn="ctr">
                       <a:solidFill>
                         <a:srgbClr val="C7C1BB"/>
@@ -15800,7 +16108,7 @@
                     <a:bodyPr/>
                     <a:lstStyle/>
                     <a:p>
-                      <a:pPr indent="0" marL="0">
+                      <a:pPr marL="0" indent="0">
                         <a:lnSpc>
                           <a:spcPts val="2240"/>
                         </a:lnSpc>
@@ -15824,7 +16132,7 @@
                       </a:endParaRPr>
                     </a:p>
                   </a:txBody>
-                  <a:tcPr marL="71120" marR="71120" marT="71120" marB="71120" anchor="t">
+                  <a:tcPr marL="71120" marR="71120" marT="71120" marB="71120">
                     <a:lnL w="12700" cap="flat" cmpd="sng" algn="ctr">
                       <a:solidFill>
                         <a:srgbClr val="C7C1BB"/>
@@ -15868,7 +16176,7 @@
                     <a:bodyPr/>
                     <a:lstStyle/>
                     <a:p>
-                      <a:pPr indent="0" marL="0">
+                      <a:pPr marL="0" indent="0">
                         <a:lnSpc>
                           <a:spcPts val="2240"/>
                         </a:lnSpc>
@@ -15892,7 +16200,7 @@
                       </a:endParaRPr>
                     </a:p>
                   </a:txBody>
-                  <a:tcPr marL="71120" marR="71120" marT="71120" marB="71120" anchor="t">
+                  <a:tcPr marL="71120" marR="71120" marT="71120" marB="71120">
                     <a:lnL w="12700" cap="flat" cmpd="sng" algn="ctr">
                       <a:solidFill>
                         <a:srgbClr val="C7C1BB"/>
@@ -15931,6 +16239,11 @@
                     </a:lnB>
                   </a:tcPr>
                 </a:tc>
+                <a:extLst>
+                  <a:ext uri="{0D108BD9-81ED-4DB2-BD59-A6C34878D82A}">
+                    <a16:rowId xmlns:a16="http://schemas.microsoft.com/office/drawing/2014/main" val="10001"/>
+                  </a:ext>
+                </a:extLst>
               </a:tr>
               <a:tr h="439341">
                 <a:tc>
@@ -15938,7 +16251,7 @@
                     <a:bodyPr/>
                     <a:lstStyle/>
                     <a:p>
-                      <a:pPr indent="0" marL="0">
+                      <a:pPr marL="0" indent="0">
                         <a:lnSpc>
                           <a:spcPts val="2240"/>
                         </a:lnSpc>
@@ -15962,7 +16275,7 @@
                       </a:endParaRPr>
                     </a:p>
                   </a:txBody>
-                  <a:tcPr marL="71120" marR="71120" marT="71120" marB="71120" anchor="t">
+                  <a:tcPr marL="71120" marR="71120" marT="71120" marB="71120">
                     <a:lnL w="12700" cap="flat" cmpd="sng" algn="ctr">
                       <a:solidFill>
                         <a:srgbClr val="C7C1BB"/>
@@ -16006,7 +16319,7 @@
                     <a:bodyPr/>
                     <a:lstStyle/>
                     <a:p>
-                      <a:pPr indent="0" marL="0">
+                      <a:pPr marL="0" indent="0">
                         <a:lnSpc>
                           <a:spcPts val="2240"/>
                         </a:lnSpc>
@@ -16030,7 +16343,7 @@
                       </a:endParaRPr>
                     </a:p>
                   </a:txBody>
-                  <a:tcPr marL="71120" marR="71120" marT="71120" marB="71120" anchor="t">
+                  <a:tcPr marL="71120" marR="71120" marT="71120" marB="71120">
                     <a:lnL w="12700" cap="flat" cmpd="sng" algn="ctr">
                       <a:solidFill>
                         <a:srgbClr val="C7C1BB"/>
@@ -16074,7 +16387,7 @@
                     <a:bodyPr/>
                     <a:lstStyle/>
                     <a:p>
-                      <a:pPr indent="0" marL="0">
+                      <a:pPr marL="0" indent="0">
                         <a:lnSpc>
                           <a:spcPts val="2240"/>
                         </a:lnSpc>
@@ -16098,7 +16411,7 @@
                       </a:endParaRPr>
                     </a:p>
                   </a:txBody>
-                  <a:tcPr marL="71120" marR="71120" marT="71120" marB="71120" anchor="t">
+                  <a:tcPr marL="71120" marR="71120" marT="71120" marB="71120">
                     <a:lnL w="12700" cap="flat" cmpd="sng" algn="ctr">
                       <a:solidFill>
                         <a:srgbClr val="C7C1BB"/>
@@ -16137,6 +16450,11 @@
                     </a:lnB>
                   </a:tcPr>
                 </a:tc>
+                <a:extLst>
+                  <a:ext uri="{0D108BD9-81ED-4DB2-BD59-A6C34878D82A}">
+                    <a16:rowId xmlns:a16="http://schemas.microsoft.com/office/drawing/2014/main" val="10002"/>
+                  </a:ext>
+                </a:extLst>
               </a:tr>
             </a:tbl>
           </a:graphicData>
@@ -16163,6 +16481,13 @@
           </a:solidFill>
           <a:ln/>
         </p:spPr>
+        <p:txBody>
+          <a:bodyPr/>
+          <a:lstStyle/>
+          <a:p>
+            <a:endParaRPr lang="en-KE"/>
+          </a:p>
+        </p:txBody>
       </p:sp>
       <p:sp>
         <p:nvSpPr>
@@ -16187,7 +16512,7 @@
           </a:bodyPr>
           <a:lstStyle/>
           <a:p>
-            <a:pPr algn="l" indent="0" marL="0">
+            <a:pPr marL="0" indent="0" algn="l">
               <a:lnSpc>
                 <a:spcPts val="2240"/>
               </a:lnSpc>
@@ -16231,7 +16556,7 @@
           </a:bodyPr>
           <a:lstStyle/>
           <a:p>
-            <a:pPr algn="l" indent="0" marL="0">
+            <a:pPr marL="0" indent="0" algn="l">
               <a:lnSpc>
                 <a:spcPts val="2240"/>
               </a:lnSpc>
@@ -16274,6 +16599,13 @@
             <a:prstDash val="solid"/>
           </a:ln>
         </p:spPr>
+        <p:txBody>
+          <a:bodyPr/>
+          <a:lstStyle/>
+          <a:p>
+            <a:endParaRPr lang="en-KE"/>
+          </a:p>
+        </p:txBody>
       </p:sp>
       <p:sp>
         <p:nvSpPr>
@@ -16298,7 +16630,7 @@
           </a:bodyPr>
           <a:lstStyle/>
           <a:p>
-            <a:pPr algn="l" indent="0" marL="0">
+            <a:pPr marL="0" indent="0" algn="l">
               <a:lnSpc>
                 <a:spcPts val="2025"/>
               </a:lnSpc>
@@ -16365,15 +16697,15 @@
       </p:sp>
       <p:pic>
         <p:nvPicPr>
-          <p:cNvPr id="10" name="Image 0" descr="ILRI and CGIAR logos">    </p:cNvPr>
+          <p:cNvPr id="10" name="Image 0" descr="ILRI and CGIAR logos"/>
           <p:cNvPicPr>
             <a:picLocks noChangeAspect="1"/>
           </p:cNvPicPr>
           <p:nvPr/>
         </p:nvPicPr>
         <p:blipFill>
-          <a:blip r:embed="rId1"/>
-          <a:srcRect l="-56" r="-56" t="0" b="0"/>
+          <a:blip r:embed="rId3"/>
+          <a:srcRect l="-56" r="-56"/>
           <a:stretch/>
         </p:blipFill>
         <p:spPr>
@@ -16409,7 +16741,7 @@
           </a:bodyPr>
           <a:lstStyle/>
           <a:p>
-            <a:pPr algn="l" indent="0" marL="0">
+            <a:pPr marL="0" indent="0" algn="l">
               <a:lnSpc>
                 <a:spcPts val="1680"/>
               </a:lnSpc>
@@ -16453,7 +16785,7 @@
           </a:bodyPr>
           <a:lstStyle/>
           <a:p>
-            <a:pPr algn="r" indent="0" marL="0">
+            <a:pPr marL="0" indent="0" algn="r">
               <a:lnSpc>
                 <a:spcPts val="1680"/>
               </a:lnSpc>
@@ -16490,6 +16822,7 @@
         <a:solidFill>
           <a:srgbClr val="273003"/>
         </a:solidFill>
+        <a:effectLst/>
       </p:bgPr>
     </p:bg>
     <p:spTree>
@@ -16509,7 +16842,9 @@
       <p:sp>
         <p:nvSpPr>
           <p:cNvPr id="2" name="Text 0"/>
-          <p:cNvSpPr/>
+          <p:cNvSpPr>
+            <a:spLocks noGrp="1"/>
+          </p:cNvSpPr>
           <p:nvPr>
             <p:ph type="title"/>
           </p:nvPr>
@@ -16531,7 +16866,7 @@
           </a:bodyPr>
           <a:lstStyle/>
           <a:p>
-            <a:pPr algn="l" indent="0" marL="0">
+            <a:pPr marL="0" indent="0" algn="l">
               <a:lnSpc>
                 <a:spcPts val="3960"/>
               </a:lnSpc>
@@ -16573,6 +16908,13 @@
           </a:solidFill>
           <a:ln/>
         </p:spPr>
+        <p:txBody>
+          <a:bodyPr/>
+          <a:lstStyle/>
+          <a:p>
+            <a:endParaRPr lang="en-KE"/>
+          </a:p>
+        </p:txBody>
       </p:sp>
       <p:sp>
         <p:nvSpPr>
@@ -16597,7 +16939,7 @@
           </a:bodyPr>
           <a:lstStyle/>
           <a:p>
-            <a:pPr algn="l" indent="0" marL="0">
+            <a:pPr marL="0" indent="0" algn="l">
               <a:lnSpc>
                 <a:spcPts val="2160"/>
               </a:lnSpc>
@@ -16641,7 +16983,7 @@
           </a:bodyPr>
           <a:lstStyle/>
           <a:p>
-            <a:pPr algn="l" indent="0" marL="0">
+            <a:pPr marL="0" indent="0" algn="l">
               <a:lnSpc>
                 <a:spcPts val="3360"/>
               </a:lnSpc>
@@ -16685,7 +17027,7 @@
           </a:bodyPr>
           <a:lstStyle/>
           <a:p>
-            <a:pPr algn="l" indent="0" marL="0">
+            <a:pPr marL="0" indent="0" algn="l">
               <a:lnSpc>
                 <a:spcPts val="1890"/>
               </a:lnSpc>
@@ -16773,7 +17115,7 @@
           </a:bodyPr>
           <a:lstStyle/>
           <a:p>
-            <a:pPr algn="l" indent="0" marL="0">
+            <a:pPr marL="0" indent="0" algn="l">
               <a:lnSpc>
                 <a:spcPts val="3360"/>
               </a:lnSpc>
@@ -16817,7 +17159,7 @@
           </a:bodyPr>
           <a:lstStyle/>
           <a:p>
-            <a:pPr algn="l" indent="0" marL="0">
+            <a:pPr marL="0" indent="0" algn="l">
               <a:lnSpc>
                 <a:spcPts val="1890"/>
               </a:lnSpc>
@@ -16883,7 +17225,7 @@
           </a:bodyPr>
           <a:lstStyle/>
           <a:p>
-            <a:pPr algn="l" indent="0" marL="0">
+            <a:pPr marL="0" indent="0" algn="l">
               <a:lnSpc>
                 <a:spcPts val="3360"/>
               </a:lnSpc>
@@ -16927,7 +17269,7 @@
           </a:bodyPr>
           <a:lstStyle/>
           <a:p>
-            <a:pPr algn="l" indent="0" marL="0">
+            <a:pPr marL="0" indent="0" algn="l">
               <a:lnSpc>
                 <a:spcPts val="1890"/>
               </a:lnSpc>
@@ -16975,7 +17317,7 @@
           </a:bodyPr>
           <a:lstStyle/>
           <a:p>
-            <a:pPr algn="l" indent="0" marL="0">
+            <a:pPr marL="0" indent="0" algn="l">
               <a:lnSpc>
                 <a:spcPts val="1890"/>
               </a:lnSpc>
@@ -17019,7 +17361,7 @@
           </a:bodyPr>
           <a:lstStyle/>
           <a:p>
-            <a:pPr algn="l" indent="0" marL="0">
+            <a:pPr marL="0" indent="0" algn="l">
               <a:lnSpc>
                 <a:spcPts val="1680"/>
               </a:lnSpc>
@@ -17063,7 +17405,7 @@
           </a:bodyPr>
           <a:lstStyle/>
           <a:p>
-            <a:pPr algn="r" indent="0" marL="0">
+            <a:pPr marL="0" indent="0" algn="r">
               <a:lnSpc>
                 <a:spcPts val="1680"/>
               </a:lnSpc>
@@ -17100,6 +17442,7 @@
         <a:solidFill>
           <a:srgbClr val="F9F2EA"/>
         </a:solidFill>
+        <a:effectLst/>
       </p:bgPr>
     </p:bg>
     <p:spTree>
@@ -17119,7 +17462,9 @@
       <p:sp>
         <p:nvSpPr>
           <p:cNvPr id="2" name="Text 0"/>
-          <p:cNvSpPr/>
+          <p:cNvSpPr>
+            <a:spLocks noGrp="1"/>
+          </p:cNvSpPr>
           <p:nvPr>
             <p:ph type="title"/>
           </p:nvPr>
@@ -17141,7 +17486,7 @@
           </a:bodyPr>
           <a:lstStyle/>
           <a:p>
-            <a:pPr algn="l" indent="0" marL="0">
+            <a:pPr marL="0" indent="0" algn="l">
               <a:lnSpc>
                 <a:spcPts val="3960"/>
               </a:lnSpc>
@@ -17183,6 +17528,13 @@
           </a:solidFill>
           <a:ln/>
         </p:spPr>
+        <p:txBody>
+          <a:bodyPr/>
+          <a:lstStyle/>
+          <a:p>
+            <a:endParaRPr lang="en-KE"/>
+          </a:p>
+        </p:txBody>
       </p:sp>
       <p:graphicFrame>
         <p:nvGraphicFramePr>
@@ -17200,16 +17552,34 @@
         </p:nvGraphicFramePr>
         <p:xfrm>
           <a:off x="825500" y="1696690"/>
-          <a:ext cx="10553700" cy="3474095"/>
+          <a:ext cx="10553700" cy="3474099"/>
         </p:xfrm>
         <a:graphic>
           <a:graphicData uri="http://schemas.openxmlformats.org/drawingml/2006/table">
             <a:tbl>
               <a:tblPr/>
               <a:tblGrid>
-                <a:gridCol w="2321814"/>
-                <a:gridCol w="5910072"/>
-                <a:gridCol w="2321814"/>
+                <a:gridCol w="2321814">
+                  <a:extLst>
+                    <a:ext uri="{9D8B030D-6E8A-4147-A177-3AD203B41FA5}">
+                      <a16:colId xmlns:a16="http://schemas.microsoft.com/office/drawing/2014/main" val="20000"/>
+                    </a:ext>
+                  </a:extLst>
+                </a:gridCol>
+                <a:gridCol w="5910072">
+                  <a:extLst>
+                    <a:ext uri="{9D8B030D-6E8A-4147-A177-3AD203B41FA5}">
+                      <a16:colId xmlns:a16="http://schemas.microsoft.com/office/drawing/2014/main" val="20001"/>
+                    </a:ext>
+                  </a:extLst>
+                </a:gridCol>
+                <a:gridCol w="2321814">
+                  <a:extLst>
+                    <a:ext uri="{9D8B030D-6E8A-4147-A177-3AD203B41FA5}">
+                      <a16:colId xmlns:a16="http://schemas.microsoft.com/office/drawing/2014/main" val="20002"/>
+                    </a:ext>
+                  </a:extLst>
+                </a:gridCol>
               </a:tblGrid>
               <a:tr h="386011">
                 <a:tc>
@@ -17217,7 +17587,7 @@
                     <a:bodyPr/>
                     <a:lstStyle/>
                     <a:p>
-                      <a:pPr indent="0" marL="0">
+                      <a:pPr marL="0" indent="0">
                         <a:lnSpc>
                           <a:spcPts val="1960"/>
                         </a:lnSpc>
@@ -17241,7 +17611,7 @@
                       </a:endParaRPr>
                     </a:p>
                   </a:txBody>
-                  <a:tcPr marL="62230" marR="62230" marT="62230" marB="62230" anchor="t">
+                  <a:tcPr marL="62230" marR="62230" marT="62230" marB="62230">
                     <a:lnL w="12700" cap="flat" cmpd="sng" algn="ctr">
                       <a:solidFill>
                         <a:srgbClr val="C7C1BB"/>
@@ -17288,7 +17658,7 @@
                     <a:bodyPr/>
                     <a:lstStyle/>
                     <a:p>
-                      <a:pPr indent="0" marL="0">
+                      <a:pPr marL="0" indent="0">
                         <a:lnSpc>
                           <a:spcPts val="1960"/>
                         </a:lnSpc>
@@ -17312,7 +17682,7 @@
                       </a:endParaRPr>
                     </a:p>
                   </a:txBody>
-                  <a:tcPr marL="62230" marR="62230" marT="62230" marB="62230" anchor="t">
+                  <a:tcPr marL="62230" marR="62230" marT="62230" marB="62230">
                     <a:lnL w="12700" cap="flat" cmpd="sng" algn="ctr">
                       <a:solidFill>
                         <a:srgbClr val="B9B3AD"/>
@@ -17359,7 +17729,7 @@
                     <a:bodyPr/>
                     <a:lstStyle/>
                     <a:p>
-                      <a:pPr indent="0" marL="0">
+                      <a:pPr marL="0" indent="0">
                         <a:lnSpc>
                           <a:spcPts val="1960"/>
                         </a:lnSpc>
@@ -17383,7 +17753,7 @@
                       </a:endParaRPr>
                     </a:p>
                   </a:txBody>
-                  <a:tcPr marL="62230" marR="62230" marT="62230" marB="62230" anchor="t">
+                  <a:tcPr marL="62230" marR="62230" marT="62230" marB="62230">
                     <a:lnL w="12700" cap="flat" cmpd="sng" algn="ctr">
                       <a:solidFill>
                         <a:srgbClr val="B9B3AD"/>
@@ -17425,6 +17795,11 @@
                     </a:solidFill>
                   </a:tcPr>
                 </a:tc>
+                <a:extLst>
+                  <a:ext uri="{0D108BD9-81ED-4DB2-BD59-A6C34878D82A}">
+                    <a16:rowId xmlns:a16="http://schemas.microsoft.com/office/drawing/2014/main" val="10000"/>
+                  </a:ext>
+                </a:extLst>
               </a:tr>
               <a:tr h="386011">
                 <a:tc>
@@ -17432,7 +17807,7 @@
                     <a:bodyPr/>
                     <a:lstStyle/>
                     <a:p>
-                      <a:pPr indent="0" marL="0">
+                      <a:pPr marL="0" indent="0">
                         <a:lnSpc>
                           <a:spcPts val="1960"/>
                         </a:lnSpc>
@@ -17456,7 +17831,7 @@
                       </a:endParaRPr>
                     </a:p>
                   </a:txBody>
-                  <a:tcPr marL="62230" marR="62230" marT="62230" marB="62230" anchor="t">
+                  <a:tcPr marL="62230" marR="62230" marT="62230" marB="62230">
                     <a:lnL w="12700" cap="flat" cmpd="sng" algn="ctr">
                       <a:solidFill>
                         <a:srgbClr val="C7C1BB"/>
@@ -17500,7 +17875,7 @@
                     <a:bodyPr/>
                     <a:lstStyle/>
                     <a:p>
-                      <a:pPr indent="0" marL="0">
+                      <a:pPr marL="0" indent="0">
                         <a:lnSpc>
                           <a:spcPts val="1960"/>
                         </a:lnSpc>
@@ -17524,7 +17899,7 @@
                       </a:endParaRPr>
                     </a:p>
                   </a:txBody>
-                  <a:tcPr marL="62230" marR="62230" marT="62230" marB="62230" anchor="t">
+                  <a:tcPr marL="62230" marR="62230" marT="62230" marB="62230">
                     <a:lnL w="12700" cap="flat" cmpd="sng" algn="ctr">
                       <a:solidFill>
                         <a:srgbClr val="C7C1BB"/>
@@ -17568,7 +17943,7 @@
                     <a:bodyPr/>
                     <a:lstStyle/>
                     <a:p>
-                      <a:pPr indent="0" marL="0">
+                      <a:pPr marL="0" indent="0">
                         <a:lnSpc>
                           <a:spcPts val="1960"/>
                         </a:lnSpc>
@@ -17592,7 +17967,7 @@
                       </a:endParaRPr>
                     </a:p>
                   </a:txBody>
-                  <a:tcPr marL="62230" marR="62230" marT="62230" marB="62230" anchor="t">
+                  <a:tcPr marL="62230" marR="62230" marT="62230" marB="62230">
                     <a:lnL w="12700" cap="flat" cmpd="sng" algn="ctr">
                       <a:solidFill>
                         <a:srgbClr val="C7C1BB"/>
@@ -17631,6 +18006,11 @@
                     </a:lnB>
                   </a:tcPr>
                 </a:tc>
+                <a:extLst>
+                  <a:ext uri="{0D108BD9-81ED-4DB2-BD59-A6C34878D82A}">
+                    <a16:rowId xmlns:a16="http://schemas.microsoft.com/office/drawing/2014/main" val="10001"/>
+                  </a:ext>
+                </a:extLst>
               </a:tr>
               <a:tr h="386011">
                 <a:tc>
@@ -17638,7 +18018,7 @@
                     <a:bodyPr/>
                     <a:lstStyle/>
                     <a:p>
-                      <a:pPr indent="0" marL="0">
+                      <a:pPr marL="0" indent="0">
                         <a:lnSpc>
                           <a:spcPts val="1960"/>
                         </a:lnSpc>
@@ -17662,7 +18042,7 @@
                       </a:endParaRPr>
                     </a:p>
                   </a:txBody>
-                  <a:tcPr marL="62230" marR="62230" marT="62230" marB="62230" anchor="t">
+                  <a:tcPr marL="62230" marR="62230" marT="62230" marB="62230">
                     <a:lnL w="12700" cap="flat" cmpd="sng" algn="ctr">
                       <a:solidFill>
                         <a:srgbClr val="C7C1BB"/>
@@ -17709,7 +18089,7 @@
                     <a:bodyPr/>
                     <a:lstStyle/>
                     <a:p>
-                      <a:pPr indent="0" marL="0">
+                      <a:pPr marL="0" indent="0">
                         <a:lnSpc>
                           <a:spcPts val="1960"/>
                         </a:lnSpc>
@@ -17733,7 +18113,7 @@
                       </a:endParaRPr>
                     </a:p>
                   </a:txBody>
-                  <a:tcPr marL="62230" marR="62230" marT="62230" marB="62230" anchor="t">
+                  <a:tcPr marL="62230" marR="62230" marT="62230" marB="62230">
                     <a:lnL w="12700" cap="flat" cmpd="sng" algn="ctr">
                       <a:solidFill>
                         <a:srgbClr val="C0B8AE"/>
@@ -17780,7 +18160,7 @@
                     <a:bodyPr/>
                     <a:lstStyle/>
                     <a:p>
-                      <a:pPr indent="0" marL="0">
+                      <a:pPr marL="0" indent="0">
                         <a:lnSpc>
                           <a:spcPts val="1960"/>
                         </a:lnSpc>
@@ -17804,7 +18184,7 @@
                       </a:endParaRPr>
                     </a:p>
                   </a:txBody>
-                  <a:tcPr marL="62230" marR="62230" marT="62230" marB="62230" anchor="t">
+                  <a:tcPr marL="62230" marR="62230" marT="62230" marB="62230">
                     <a:lnL w="12700" cap="flat" cmpd="sng" algn="ctr">
                       <a:solidFill>
                         <a:srgbClr val="C0B8AE"/>
@@ -17846,6 +18226,11 @@
                     </a:solidFill>
                   </a:tcPr>
                 </a:tc>
+                <a:extLst>
+                  <a:ext uri="{0D108BD9-81ED-4DB2-BD59-A6C34878D82A}">
+                    <a16:rowId xmlns:a16="http://schemas.microsoft.com/office/drawing/2014/main" val="10002"/>
+                  </a:ext>
+                </a:extLst>
               </a:tr>
               <a:tr h="386011">
                 <a:tc>
@@ -17853,7 +18238,7 @@
                     <a:bodyPr/>
                     <a:lstStyle/>
                     <a:p>
-                      <a:pPr indent="0" marL="0">
+                      <a:pPr marL="0" indent="0">
                         <a:lnSpc>
                           <a:spcPts val="1960"/>
                         </a:lnSpc>
@@ -17877,7 +18262,7 @@
                       </a:endParaRPr>
                     </a:p>
                   </a:txBody>
-                  <a:tcPr marL="62230" marR="62230" marT="62230" marB="62230" anchor="t">
+                  <a:tcPr marL="62230" marR="62230" marT="62230" marB="62230">
                     <a:lnL w="12700" cap="flat" cmpd="sng" algn="ctr">
                       <a:solidFill>
                         <a:srgbClr val="C7C1BB"/>
@@ -17921,7 +18306,7 @@
                     <a:bodyPr/>
                     <a:lstStyle/>
                     <a:p>
-                      <a:pPr indent="0" marL="0">
+                      <a:pPr marL="0" indent="0">
                         <a:lnSpc>
                           <a:spcPts val="1960"/>
                         </a:lnSpc>
@@ -17945,7 +18330,7 @@
                       </a:endParaRPr>
                     </a:p>
                   </a:txBody>
-                  <a:tcPr marL="62230" marR="62230" marT="62230" marB="62230" anchor="t">
+                  <a:tcPr marL="62230" marR="62230" marT="62230" marB="62230">
                     <a:lnL w="12700" cap="flat" cmpd="sng" algn="ctr">
                       <a:solidFill>
                         <a:srgbClr val="C7C1BB"/>
@@ -17989,7 +18374,7 @@
                     <a:bodyPr/>
                     <a:lstStyle/>
                     <a:p>
-                      <a:pPr indent="0" marL="0">
+                      <a:pPr marL="0" indent="0">
                         <a:lnSpc>
                           <a:spcPts val="1960"/>
                         </a:lnSpc>
@@ -18013,7 +18398,7 @@
                       </a:endParaRPr>
                     </a:p>
                   </a:txBody>
-                  <a:tcPr marL="62230" marR="62230" marT="62230" marB="62230" anchor="t">
+                  <a:tcPr marL="62230" marR="62230" marT="62230" marB="62230">
                     <a:lnL w="12700" cap="flat" cmpd="sng" algn="ctr">
                       <a:solidFill>
                         <a:srgbClr val="C7C1BB"/>
@@ -18052,6 +18437,11 @@
                     </a:lnB>
                   </a:tcPr>
                 </a:tc>
+                <a:extLst>
+                  <a:ext uri="{0D108BD9-81ED-4DB2-BD59-A6C34878D82A}">
+                    <a16:rowId xmlns:a16="http://schemas.microsoft.com/office/drawing/2014/main" val="10003"/>
+                  </a:ext>
+                </a:extLst>
               </a:tr>
               <a:tr h="386011">
                 <a:tc>
@@ -18059,7 +18449,7 @@
                     <a:bodyPr/>
                     <a:lstStyle/>
                     <a:p>
-                      <a:pPr indent="0" marL="0">
+                      <a:pPr marL="0" indent="0">
                         <a:lnSpc>
                           <a:spcPts val="1960"/>
                         </a:lnSpc>
@@ -18083,7 +18473,7 @@
                       </a:endParaRPr>
                     </a:p>
                   </a:txBody>
-                  <a:tcPr marL="62230" marR="62230" marT="62230" marB="62230" anchor="t">
+                  <a:tcPr marL="62230" marR="62230" marT="62230" marB="62230">
                     <a:lnL w="12700" cap="flat" cmpd="sng" algn="ctr">
                       <a:solidFill>
                         <a:srgbClr val="C7C1BB"/>
@@ -18130,7 +18520,7 @@
                     <a:bodyPr/>
                     <a:lstStyle/>
                     <a:p>
-                      <a:pPr indent="0" marL="0">
+                      <a:pPr marL="0" indent="0">
                         <a:lnSpc>
                           <a:spcPts val="1960"/>
                         </a:lnSpc>
@@ -18154,7 +18544,7 @@
                       </a:endParaRPr>
                     </a:p>
                   </a:txBody>
-                  <a:tcPr marL="62230" marR="62230" marT="62230" marB="62230" anchor="t">
+                  <a:tcPr marL="62230" marR="62230" marT="62230" marB="62230">
                     <a:lnL w="12700" cap="flat" cmpd="sng" algn="ctr">
                       <a:solidFill>
                         <a:srgbClr val="C0B8AE"/>
@@ -18201,7 +18591,7 @@
                     <a:bodyPr/>
                     <a:lstStyle/>
                     <a:p>
-                      <a:pPr indent="0" marL="0">
+                      <a:pPr marL="0" indent="0">
                         <a:lnSpc>
                           <a:spcPts val="1960"/>
                         </a:lnSpc>
@@ -18225,7 +18615,7 @@
                       </a:endParaRPr>
                     </a:p>
                   </a:txBody>
-                  <a:tcPr marL="62230" marR="62230" marT="62230" marB="62230" anchor="t">
+                  <a:tcPr marL="62230" marR="62230" marT="62230" marB="62230">
                     <a:lnL w="12700" cap="flat" cmpd="sng" algn="ctr">
                       <a:solidFill>
                         <a:srgbClr val="C0B8AE"/>
@@ -18267,6 +18657,11 @@
                     </a:solidFill>
                   </a:tcPr>
                 </a:tc>
+                <a:extLst>
+                  <a:ext uri="{0D108BD9-81ED-4DB2-BD59-A6C34878D82A}">
+                    <a16:rowId xmlns:a16="http://schemas.microsoft.com/office/drawing/2014/main" val="10004"/>
+                  </a:ext>
+                </a:extLst>
               </a:tr>
               <a:tr h="386011">
                 <a:tc>
@@ -18274,7 +18669,7 @@
                     <a:bodyPr/>
                     <a:lstStyle/>
                     <a:p>
-                      <a:pPr indent="0" marL="0">
+                      <a:pPr marL="0" indent="0">
                         <a:lnSpc>
                           <a:spcPts val="1960"/>
                         </a:lnSpc>
@@ -18298,7 +18693,7 @@
                       </a:endParaRPr>
                     </a:p>
                   </a:txBody>
-                  <a:tcPr marL="62230" marR="62230" marT="62230" marB="62230" anchor="t">
+                  <a:tcPr marL="62230" marR="62230" marT="62230" marB="62230">
                     <a:lnL w="12700" cap="flat" cmpd="sng" algn="ctr">
                       <a:solidFill>
                         <a:srgbClr val="C7C1BB"/>
@@ -18342,7 +18737,7 @@
                     <a:bodyPr/>
                     <a:lstStyle/>
                     <a:p>
-                      <a:pPr indent="0" marL="0">
+                      <a:pPr marL="0" indent="0">
                         <a:lnSpc>
                           <a:spcPts val="1960"/>
                         </a:lnSpc>
@@ -18366,7 +18761,7 @@
                       </a:endParaRPr>
                     </a:p>
                   </a:txBody>
-                  <a:tcPr marL="62230" marR="62230" marT="62230" marB="62230" anchor="t">
+                  <a:tcPr marL="62230" marR="62230" marT="62230" marB="62230">
                     <a:lnL w="12700" cap="flat" cmpd="sng" algn="ctr">
                       <a:solidFill>
                         <a:srgbClr val="C7C1BB"/>
@@ -18410,7 +18805,7 @@
                     <a:bodyPr/>
                     <a:lstStyle/>
                     <a:p>
-                      <a:pPr indent="0" marL="0">
+                      <a:pPr marL="0" indent="0">
                         <a:lnSpc>
                           <a:spcPts val="1960"/>
                         </a:lnSpc>
@@ -18434,7 +18829,7 @@
                       </a:endParaRPr>
                     </a:p>
                   </a:txBody>
-                  <a:tcPr marL="62230" marR="62230" marT="62230" marB="62230" anchor="t">
+                  <a:tcPr marL="62230" marR="62230" marT="62230" marB="62230">
                     <a:lnL w="12700" cap="flat" cmpd="sng" algn="ctr">
                       <a:solidFill>
                         <a:srgbClr val="C7C1BB"/>
@@ -18473,6 +18868,11 @@
                     </a:lnB>
                   </a:tcPr>
                 </a:tc>
+                <a:extLst>
+                  <a:ext uri="{0D108BD9-81ED-4DB2-BD59-A6C34878D82A}">
+                    <a16:rowId xmlns:a16="http://schemas.microsoft.com/office/drawing/2014/main" val="10005"/>
+                  </a:ext>
+                </a:extLst>
               </a:tr>
               <a:tr h="386011">
                 <a:tc>
@@ -18480,7 +18880,7 @@
                     <a:bodyPr/>
                     <a:lstStyle/>
                     <a:p>
-                      <a:pPr indent="0" marL="0">
+                      <a:pPr marL="0" indent="0">
                         <a:lnSpc>
                           <a:spcPts val="1960"/>
                         </a:lnSpc>
@@ -18504,7 +18904,7 @@
                       </a:endParaRPr>
                     </a:p>
                   </a:txBody>
-                  <a:tcPr marL="62230" marR="62230" marT="62230" marB="62230" anchor="t">
+                  <a:tcPr marL="62230" marR="62230" marT="62230" marB="62230">
                     <a:lnL w="12700" cap="flat" cmpd="sng" algn="ctr">
                       <a:solidFill>
                         <a:srgbClr val="C7C1BB"/>
@@ -18551,7 +18951,7 @@
                     <a:bodyPr/>
                     <a:lstStyle/>
                     <a:p>
-                      <a:pPr indent="0" marL="0">
+                      <a:pPr marL="0" indent="0">
                         <a:lnSpc>
                           <a:spcPts val="1960"/>
                         </a:lnSpc>
@@ -18575,7 +18975,7 @@
                       </a:endParaRPr>
                     </a:p>
                   </a:txBody>
-                  <a:tcPr marL="62230" marR="62230" marT="62230" marB="62230" anchor="t">
+                  <a:tcPr marL="62230" marR="62230" marT="62230" marB="62230">
                     <a:lnL w="12700" cap="flat" cmpd="sng" algn="ctr">
                       <a:solidFill>
                         <a:srgbClr val="C0B8AE"/>
@@ -18622,7 +19022,7 @@
                     <a:bodyPr/>
                     <a:lstStyle/>
                     <a:p>
-                      <a:pPr indent="0" marL="0">
+                      <a:pPr marL="0" indent="0">
                         <a:lnSpc>
                           <a:spcPts val="1960"/>
                         </a:lnSpc>
@@ -18646,7 +19046,7 @@
                       </a:endParaRPr>
                     </a:p>
                   </a:txBody>
-                  <a:tcPr marL="62230" marR="62230" marT="62230" marB="62230" anchor="t">
+                  <a:tcPr marL="62230" marR="62230" marT="62230" marB="62230">
                     <a:lnL w="12700" cap="flat" cmpd="sng" algn="ctr">
                       <a:solidFill>
                         <a:srgbClr val="C0B8AE"/>
@@ -18688,6 +19088,11 @@
                     </a:solidFill>
                   </a:tcPr>
                 </a:tc>
+                <a:extLst>
+                  <a:ext uri="{0D108BD9-81ED-4DB2-BD59-A6C34878D82A}">
+                    <a16:rowId xmlns:a16="http://schemas.microsoft.com/office/drawing/2014/main" val="10006"/>
+                  </a:ext>
+                </a:extLst>
               </a:tr>
               <a:tr h="386011">
                 <a:tc>
@@ -18695,7 +19100,7 @@
                     <a:bodyPr/>
                     <a:lstStyle/>
                     <a:p>
-                      <a:pPr indent="0" marL="0">
+                      <a:pPr marL="0" indent="0">
                         <a:lnSpc>
                           <a:spcPts val="1960"/>
                         </a:lnSpc>
@@ -18719,7 +19124,7 @@
                       </a:endParaRPr>
                     </a:p>
                   </a:txBody>
-                  <a:tcPr marL="62230" marR="62230" marT="62230" marB="62230" anchor="t">
+                  <a:tcPr marL="62230" marR="62230" marT="62230" marB="62230">
                     <a:lnL w="12700" cap="flat" cmpd="sng" algn="ctr">
                       <a:solidFill>
                         <a:srgbClr val="C7C1BB"/>
@@ -18763,7 +19168,7 @@
                     <a:bodyPr/>
                     <a:lstStyle/>
                     <a:p>
-                      <a:pPr indent="0" marL="0">
+                      <a:pPr marL="0" indent="0">
                         <a:lnSpc>
                           <a:spcPts val="1960"/>
                         </a:lnSpc>
@@ -18787,7 +19192,7 @@
                       </a:endParaRPr>
                     </a:p>
                   </a:txBody>
-                  <a:tcPr marL="62230" marR="62230" marT="62230" marB="62230" anchor="t">
+                  <a:tcPr marL="62230" marR="62230" marT="62230" marB="62230">
                     <a:lnL w="12700" cap="flat" cmpd="sng" algn="ctr">
                       <a:solidFill>
                         <a:srgbClr val="C7C1BB"/>
@@ -18831,7 +19236,7 @@
                     <a:bodyPr/>
                     <a:lstStyle/>
                     <a:p>
-                      <a:pPr indent="0" marL="0">
+                      <a:pPr marL="0" indent="0">
                         <a:lnSpc>
                           <a:spcPts val="1960"/>
                         </a:lnSpc>
@@ -18844,7 +19249,7 @@
                       </a:endParaRPr>
                     </a:p>
                   </a:txBody>
-                  <a:tcPr marL="62230" marR="62230" marT="62230" marB="62230" anchor="t">
+                  <a:tcPr marL="62230" marR="62230" marT="62230" marB="62230">
                     <a:lnL w="12700" cap="flat" cmpd="sng" algn="ctr">
                       <a:solidFill>
                         <a:srgbClr val="C7C1BB"/>
@@ -18883,6 +19288,11 @@
                     </a:lnB>
                   </a:tcPr>
                 </a:tc>
+                <a:extLst>
+                  <a:ext uri="{0D108BD9-81ED-4DB2-BD59-A6C34878D82A}">
+                    <a16:rowId xmlns:a16="http://schemas.microsoft.com/office/drawing/2014/main" val="10007"/>
+                  </a:ext>
+                </a:extLst>
               </a:tr>
               <a:tr h="386011">
                 <a:tc>
@@ -18890,7 +19300,7 @@
                     <a:bodyPr/>
                     <a:lstStyle/>
                     <a:p>
-                      <a:pPr indent="0" marL="0">
+                      <a:pPr marL="0" indent="0">
                         <a:lnSpc>
                           <a:spcPts val="1960"/>
                         </a:lnSpc>
@@ -18914,7 +19324,7 @@
                       </a:endParaRPr>
                     </a:p>
                   </a:txBody>
-                  <a:tcPr marL="62230" marR="62230" marT="62230" marB="62230" anchor="t">
+                  <a:tcPr marL="62230" marR="62230" marT="62230" marB="62230">
                     <a:lnL w="12700" cap="flat" cmpd="sng" algn="ctr">
                       <a:solidFill>
                         <a:srgbClr val="C7C1BB"/>
@@ -18961,7 +19371,7 @@
                     <a:bodyPr/>
                     <a:lstStyle/>
                     <a:p>
-                      <a:pPr indent="0" marL="0">
+                      <a:pPr marL="0" indent="0">
                         <a:lnSpc>
                           <a:spcPts val="1960"/>
                         </a:lnSpc>
@@ -18985,7 +19395,7 @@
                       </a:endParaRPr>
                     </a:p>
                   </a:txBody>
-                  <a:tcPr marL="62230" marR="62230" marT="62230" marB="62230" anchor="t">
+                  <a:tcPr marL="62230" marR="62230" marT="62230" marB="62230">
                     <a:lnL w="12700" cap="flat" cmpd="sng" algn="ctr">
                       <a:solidFill>
                         <a:srgbClr val="C0B8AE"/>
@@ -19032,7 +19442,7 @@
                     <a:bodyPr/>
                     <a:lstStyle/>
                     <a:p>
-                      <a:pPr indent="0" marL="0">
+                      <a:pPr marL="0" indent="0">
                         <a:lnSpc>
                           <a:spcPts val="1960"/>
                         </a:lnSpc>
@@ -19045,7 +19455,7 @@
                       </a:endParaRPr>
                     </a:p>
                   </a:txBody>
-                  <a:tcPr marL="62230" marR="62230" marT="62230" marB="62230" anchor="t">
+                  <a:tcPr marL="62230" marR="62230" marT="62230" marB="62230">
                     <a:lnL w="12700" cap="flat" cmpd="sng" algn="ctr">
                       <a:solidFill>
                         <a:srgbClr val="C0B8AE"/>
@@ -19087,6 +19497,11 @@
                     </a:solidFill>
                   </a:tcPr>
                 </a:tc>
+                <a:extLst>
+                  <a:ext uri="{0D108BD9-81ED-4DB2-BD59-A6C34878D82A}">
+                    <a16:rowId xmlns:a16="http://schemas.microsoft.com/office/drawing/2014/main" val="10008"/>
+                  </a:ext>
+                </a:extLst>
               </a:tr>
             </a:tbl>
           </a:graphicData>
@@ -19094,15 +19509,15 @@
       </p:graphicFrame>
       <p:pic>
         <p:nvPicPr>
-          <p:cNvPr id="5" name="Image 0" descr="ILRI and CGIAR logos">    </p:cNvPr>
+          <p:cNvPr id="5" name="Image 0" descr="ILRI and CGIAR logos"/>
           <p:cNvPicPr>
             <a:picLocks noChangeAspect="1"/>
           </p:cNvPicPr>
           <p:nvPr/>
         </p:nvPicPr>
         <p:blipFill>
-          <a:blip r:embed="rId1"/>
-          <a:srcRect l="-56" r="-56" t="0" b="0"/>
+          <a:blip r:embed="rId3"/>
+          <a:srcRect l="-56" r="-56"/>
           <a:stretch/>
         </p:blipFill>
         <p:spPr>
@@ -19138,7 +19553,7 @@
           </a:bodyPr>
           <a:lstStyle/>
           <a:p>
-            <a:pPr algn="l" indent="0" marL="0">
+            <a:pPr marL="0" indent="0" algn="l">
               <a:lnSpc>
                 <a:spcPts val="1680"/>
               </a:lnSpc>
@@ -19182,7 +19597,7 @@
           </a:bodyPr>
           <a:lstStyle/>
           <a:p>
-            <a:pPr algn="r" indent="0" marL="0">
+            <a:pPr marL="0" indent="0" algn="r">
               <a:lnSpc>
                 <a:spcPts val="1680"/>
               </a:lnSpc>
@@ -19219,6 +19634,7 @@
         <a:solidFill>
           <a:srgbClr val="F9F2EA"/>
         </a:solidFill>
+        <a:effectLst/>
       </p:bgPr>
     </p:bg>
     <p:spTree>
@@ -19238,7 +19654,9 @@
       <p:sp>
         <p:nvSpPr>
           <p:cNvPr id="2" name="Text 0"/>
-          <p:cNvSpPr/>
+          <p:cNvSpPr>
+            <a:spLocks noGrp="1"/>
+          </p:cNvSpPr>
           <p:nvPr>
             <p:ph type="title"/>
           </p:nvPr>
@@ -19260,7 +19678,7 @@
           </a:bodyPr>
           <a:lstStyle/>
           <a:p>
-            <a:pPr algn="l" indent="0" marL="0">
+            <a:pPr marL="0" indent="0" algn="l">
               <a:lnSpc>
                 <a:spcPts val="3960"/>
               </a:lnSpc>
@@ -19302,6 +19720,13 @@
           </a:solidFill>
           <a:ln/>
         </p:spPr>
+        <p:txBody>
+          <a:bodyPr/>
+          <a:lstStyle/>
+          <a:p>
+            <a:endParaRPr lang="en-KE"/>
+          </a:p>
+        </p:txBody>
       </p:sp>
       <p:sp>
         <p:nvSpPr>
@@ -19324,6 +19749,13 @@
           </a:solidFill>
           <a:ln/>
         </p:spPr>
+        <p:txBody>
+          <a:bodyPr/>
+          <a:lstStyle/>
+          <a:p>
+            <a:endParaRPr lang="en-KE"/>
+          </a:p>
+        </p:txBody>
       </p:sp>
       <p:sp>
         <p:nvSpPr>
@@ -19350,11 +19782,11 @@
                 <a:lnTo>
                   <a:pt x="0" y="50800"/>
                 </a:lnTo>
-                <a:arcTo hR="50800" wR="50800" stAng="10800000" swAng="5400000"/>
+                <a:arcTo wR="50800" hR="50800" stAng="10800000" swAng="5400000"/>
                 <a:lnTo>
                   <a:pt x="3335834" y="0"/>
                 </a:lnTo>
-                <a:arcTo hR="50800" wR="50800" stAng="16200000" swAng="5400000"/>
+                <a:arcTo wR="50800" hR="50800" stAng="16200000" swAng="5400000"/>
                 <a:lnTo>
                   <a:pt x="3386634" y="50800"/>
                 </a:lnTo>
@@ -19370,6 +19802,13 @@
           </a:solidFill>
           <a:ln/>
         </p:spPr>
+        <p:txBody>
+          <a:bodyPr/>
+          <a:lstStyle/>
+          <a:p>
+            <a:endParaRPr lang="en-KE"/>
+          </a:p>
+        </p:txBody>
       </p:sp>
       <p:sp>
         <p:nvSpPr>
@@ -19394,14 +19833,14 @@
           </a:bodyPr>
           <a:lstStyle/>
           <a:p>
-            <a:pPr algn="l" indent="0" marL="0">
+            <a:pPr marL="0" indent="0" algn="l">
               <a:lnSpc>
                 <a:spcPts val="1680"/>
               </a:lnSpc>
               <a:buNone/>
             </a:pPr>
             <a:r>
-              <a:rPr lang="en-US" sz="1200" b="1" spc="100" kern="0" dirty="0">
+              <a:rPr lang="en-US" sz="1200" b="1" kern="0" spc="100" dirty="0">
                 <a:solidFill>
                   <a:srgbClr val="273003"/>
                 </a:solidFill>
@@ -19438,7 +19877,7 @@
           </a:bodyPr>
           <a:lstStyle/>
           <a:p>
-            <a:pPr algn="l" indent="0" marL="0">
+            <a:pPr marL="0" indent="0" algn="l">
               <a:lnSpc>
                 <a:spcPts val="1890"/>
               </a:lnSpc>
@@ -19502,6 +19941,13 @@
           </a:solidFill>
           <a:ln/>
         </p:spPr>
+        <p:txBody>
+          <a:bodyPr/>
+          <a:lstStyle/>
+          <a:p>
+            <a:endParaRPr lang="en-KE"/>
+          </a:p>
+        </p:txBody>
       </p:sp>
       <p:sp>
         <p:nvSpPr>
@@ -19528,11 +19974,11 @@
                 <a:lnTo>
                   <a:pt x="0" y="50800"/>
                 </a:lnTo>
-                <a:arcTo hR="50800" wR="50800" stAng="10800000" swAng="5400000"/>
+                <a:arcTo wR="50800" hR="50800" stAng="10800000" swAng="5400000"/>
                 <a:lnTo>
                   <a:pt x="3335883" y="0"/>
                 </a:lnTo>
-                <a:arcTo hR="50800" wR="50800" stAng="16200000" swAng="5400000"/>
+                <a:arcTo wR="50800" hR="50800" stAng="16200000" swAng="5400000"/>
                 <a:lnTo>
                   <a:pt x="3386683" y="50800"/>
                 </a:lnTo>
@@ -19548,6 +19994,13 @@
           </a:solidFill>
           <a:ln/>
         </p:spPr>
+        <p:txBody>
+          <a:bodyPr/>
+          <a:lstStyle/>
+          <a:p>
+            <a:endParaRPr lang="en-KE"/>
+          </a:p>
+        </p:txBody>
       </p:sp>
       <p:sp>
         <p:nvSpPr>
@@ -19572,14 +20025,14 @@
           </a:bodyPr>
           <a:lstStyle/>
           <a:p>
-            <a:pPr algn="l" indent="0" marL="0">
+            <a:pPr marL="0" indent="0" algn="l">
               <a:lnSpc>
                 <a:spcPts val="1680"/>
               </a:lnSpc>
               <a:buNone/>
             </a:pPr>
             <a:r>
-              <a:rPr lang="en-US" sz="1200" b="1" spc="100" kern="0" dirty="0">
+              <a:rPr lang="en-US" sz="1200" b="1" kern="0" spc="100" dirty="0">
                 <a:solidFill>
                   <a:srgbClr val="891F15"/>
                 </a:solidFill>
@@ -19616,7 +20069,7 @@
           </a:bodyPr>
           <a:lstStyle/>
           <a:p>
-            <a:pPr algn="l" indent="0" marL="0">
+            <a:pPr marL="0" indent="0" algn="l">
               <a:lnSpc>
                 <a:spcPts val="1890"/>
               </a:lnSpc>
@@ -19680,6 +20133,13 @@
           </a:solidFill>
           <a:ln/>
         </p:spPr>
+        <p:txBody>
+          <a:bodyPr/>
+          <a:lstStyle/>
+          <a:p>
+            <a:endParaRPr lang="en-KE"/>
+          </a:p>
+        </p:txBody>
       </p:sp>
       <p:sp>
         <p:nvSpPr>
@@ -19706,11 +20166,11 @@
                 <a:lnTo>
                   <a:pt x="0" y="50800"/>
                 </a:lnTo>
-                <a:arcTo hR="50800" wR="50800" stAng="10800000" swAng="5400000"/>
+                <a:arcTo wR="50800" hR="50800" stAng="10800000" swAng="5400000"/>
                 <a:lnTo>
                   <a:pt x="3335883" y="0"/>
                 </a:lnTo>
-                <a:arcTo hR="50800" wR="50800" stAng="16200000" swAng="5400000"/>
+                <a:arcTo wR="50800" hR="50800" stAng="16200000" swAng="5400000"/>
                 <a:lnTo>
                   <a:pt x="3386683" y="50800"/>
                 </a:lnTo>
@@ -19726,6 +20186,13 @@
           </a:solidFill>
           <a:ln/>
         </p:spPr>
+        <p:txBody>
+          <a:bodyPr/>
+          <a:lstStyle/>
+          <a:p>
+            <a:endParaRPr lang="en-KE"/>
+          </a:p>
+        </p:txBody>
       </p:sp>
       <p:sp>
         <p:nvSpPr>
@@ -19750,14 +20217,14 @@
           </a:bodyPr>
           <a:lstStyle/>
           <a:p>
-            <a:pPr algn="l" indent="0" marL="0">
+            <a:pPr marL="0" indent="0" algn="l">
               <a:lnSpc>
                 <a:spcPts val="1680"/>
               </a:lnSpc>
               <a:buNone/>
             </a:pPr>
             <a:r>
-              <a:rPr lang="en-US" sz="1200" b="1" spc="100" kern="0" dirty="0">
+              <a:rPr lang="en-US" sz="1200" b="1" kern="0" spc="100" dirty="0">
                 <a:solidFill>
                   <a:srgbClr val="6D2637"/>
                 </a:solidFill>
@@ -19794,7 +20261,7 @@
           </a:bodyPr>
           <a:lstStyle/>
           <a:p>
-            <a:pPr algn="l" indent="0" marL="0">
+            <a:pPr marL="0" indent="0" algn="l">
               <a:lnSpc>
                 <a:spcPts val="1890"/>
               </a:lnSpc>
@@ -19858,18 +20325,25 @@
           </a:solidFill>
           <a:ln/>
         </p:spPr>
+        <p:txBody>
+          <a:bodyPr/>
+          <a:lstStyle/>
+          <a:p>
+            <a:endParaRPr lang="en-KE"/>
+          </a:p>
+        </p:txBody>
       </p:sp>
       <p:pic>
         <p:nvPicPr>
-          <p:cNvPr id="17" name="Image 0" descr="Database">    </p:cNvPr>
+          <p:cNvPr id="17" name="Image 0" descr="Database"/>
           <p:cNvPicPr>
             <a:picLocks noChangeAspect="1"/>
           </p:cNvPicPr>
           <p:nvPr/>
         </p:nvPicPr>
         <p:blipFill>
-          <a:blip r:embed="rId1"/>
-          <a:srcRect l="0" r="0" t="0" b="0"/>
+          <a:blip r:embed="rId3"/>
+          <a:srcRect/>
           <a:stretch/>
         </p:blipFill>
         <p:spPr>
@@ -19905,7 +20379,7 @@
           </a:bodyPr>
           <a:lstStyle/>
           <a:p>
-            <a:pPr algn="l" indent="0" marL="0">
+            <a:pPr marL="0" indent="0" algn="l">
               <a:lnSpc>
                 <a:spcPts val="1890"/>
               </a:lnSpc>
@@ -19994,15 +20468,15 @@
       </p:sp>
       <p:pic>
         <p:nvPicPr>
-          <p:cNvPr id="19" name="Image 1" descr="ILRI and CGIAR logos">    </p:cNvPr>
+          <p:cNvPr id="19" name="Image 1" descr="ILRI and CGIAR logos"/>
           <p:cNvPicPr>
             <a:picLocks noChangeAspect="1"/>
           </p:cNvPicPr>
           <p:nvPr/>
         </p:nvPicPr>
         <p:blipFill>
-          <a:blip r:embed="rId2"/>
-          <a:srcRect l="-56" r="-56" t="0" b="0"/>
+          <a:blip r:embed="rId4"/>
+          <a:srcRect l="-56" r="-56"/>
           <a:stretch/>
         </p:blipFill>
         <p:spPr>
@@ -20038,7 +20512,7 @@
           </a:bodyPr>
           <a:lstStyle/>
           <a:p>
-            <a:pPr algn="l" indent="0" marL="0">
+            <a:pPr marL="0" indent="0" algn="l">
               <a:lnSpc>
                 <a:spcPts val="1680"/>
               </a:lnSpc>
@@ -20082,7 +20556,7 @@
           </a:bodyPr>
           <a:lstStyle/>
           <a:p>
-            <a:pPr algn="r" indent="0" marL="0">
+            <a:pPr marL="0" indent="0" algn="r">
               <a:lnSpc>
                 <a:spcPts val="1680"/>
               </a:lnSpc>
@@ -20119,6 +20593,7 @@
         <a:solidFill>
           <a:srgbClr val="F9F2EA"/>
         </a:solidFill>
+        <a:effectLst/>
       </p:bgPr>
     </p:bg>
     <p:spTree>
@@ -20138,7 +20613,9 @@
       <p:sp>
         <p:nvSpPr>
           <p:cNvPr id="2" name="Text 0"/>
-          <p:cNvSpPr/>
+          <p:cNvSpPr>
+            <a:spLocks noGrp="1"/>
+          </p:cNvSpPr>
           <p:nvPr>
             <p:ph type="title"/>
           </p:nvPr>
@@ -20160,7 +20637,7 @@
           </a:bodyPr>
           <a:lstStyle/>
           <a:p>
-            <a:pPr algn="l" indent="0" marL="0">
+            <a:pPr marL="0" indent="0" algn="l">
               <a:lnSpc>
                 <a:spcPts val="3960"/>
               </a:lnSpc>
@@ -20202,6 +20679,13 @@
           </a:solidFill>
           <a:ln/>
         </p:spPr>
+        <p:txBody>
+          <a:bodyPr/>
+          <a:lstStyle/>
+          <a:p>
+            <a:endParaRPr lang="en-KE"/>
+          </a:p>
+        </p:txBody>
       </p:sp>
       <p:sp>
         <p:nvSpPr>
@@ -20225,18 +20709,25 @@
             <a:prstDash val="solid"/>
           </a:ln>
         </p:spPr>
+        <p:txBody>
+          <a:bodyPr/>
+          <a:lstStyle/>
+          <a:p>
+            <a:endParaRPr lang="en-KE"/>
+          </a:p>
+        </p:txBody>
       </p:sp>
       <p:pic>
         <p:nvPicPr>
-          <p:cNvPr id="5" name="Image 0" descr="Lock">    </p:cNvPr>
+          <p:cNvPr id="5" name="Image 0" descr="Lock"/>
           <p:cNvPicPr>
             <a:picLocks noChangeAspect="1"/>
           </p:cNvPicPr>
           <p:nvPr/>
         </p:nvPicPr>
         <p:blipFill>
-          <a:blip r:embed="rId1"/>
-          <a:srcRect l="0" r="0" t="0" b="0"/>
+          <a:blip r:embed="rId3"/>
+          <a:srcRect/>
           <a:stretch/>
         </p:blipFill>
         <p:spPr>
@@ -20272,7 +20763,7 @@
           </a:bodyPr>
           <a:lstStyle/>
           <a:p>
-            <a:pPr algn="l" indent="0" marL="0">
+            <a:pPr marL="0" indent="0" algn="l">
               <a:lnSpc>
                 <a:spcPts val="2080"/>
               </a:lnSpc>
@@ -20315,18 +20806,25 @@
             <a:prstDash val="solid"/>
           </a:ln>
         </p:spPr>
+        <p:txBody>
+          <a:bodyPr/>
+          <a:lstStyle/>
+          <a:p>
+            <a:endParaRPr lang="en-KE"/>
+          </a:p>
+        </p:txBody>
       </p:sp>
       <p:pic>
         <p:nvPicPr>
-          <p:cNvPr id="8" name="Image 1" descr="Users">    </p:cNvPr>
+          <p:cNvPr id="8" name="Image 1" descr="Users"/>
           <p:cNvPicPr>
             <a:picLocks noChangeAspect="1"/>
           </p:cNvPicPr>
           <p:nvPr/>
         </p:nvPicPr>
         <p:blipFill>
-          <a:blip r:embed="rId2"/>
-          <a:srcRect l="0" r="0" t="0" b="0"/>
+          <a:blip r:embed="rId4"/>
+          <a:srcRect/>
           <a:stretch/>
         </p:blipFill>
         <p:spPr>
@@ -20362,7 +20860,7 @@
           </a:bodyPr>
           <a:lstStyle/>
           <a:p>
-            <a:pPr algn="l" indent="0" marL="0">
+            <a:pPr marL="0" indent="0" algn="l">
               <a:lnSpc>
                 <a:spcPts val="2080"/>
               </a:lnSpc>
@@ -20405,18 +20903,25 @@
             <a:prstDash val="solid"/>
           </a:ln>
         </p:spPr>
+        <p:txBody>
+          <a:bodyPr/>
+          <a:lstStyle/>
+          <a:p>
+            <a:endParaRPr lang="en-KE"/>
+          </a:p>
+        </p:txBody>
       </p:sp>
       <p:pic>
         <p:nvPicPr>
-          <p:cNvPr id="11" name="Image 2" descr="Warning">    </p:cNvPr>
+          <p:cNvPr id="11" name="Image 2" descr="Warning"/>
           <p:cNvPicPr>
             <a:picLocks noChangeAspect="1"/>
           </p:cNvPicPr>
           <p:nvPr/>
         </p:nvPicPr>
         <p:blipFill>
-          <a:blip r:embed="rId3"/>
-          <a:srcRect l="0" r="0" t="0" b="0"/>
+          <a:blip r:embed="rId5"/>
+          <a:srcRect/>
           <a:stretch/>
         </p:blipFill>
         <p:spPr>
@@ -20452,7 +20957,7 @@
           </a:bodyPr>
           <a:lstStyle/>
           <a:p>
-            <a:pPr algn="l" indent="0" marL="0">
+            <a:pPr marL="0" indent="0" algn="l">
               <a:lnSpc>
                 <a:spcPts val="2080"/>
               </a:lnSpc>
@@ -20475,15 +20980,15 @@
       </p:sp>
       <p:pic>
         <p:nvPicPr>
-          <p:cNvPr id="13" name="Image 3" descr="Globe">    </p:cNvPr>
+          <p:cNvPr id="13" name="Image 3" descr="Globe"/>
           <p:cNvPicPr>
             <a:picLocks noChangeAspect="1"/>
           </p:cNvPicPr>
           <p:nvPr/>
         </p:nvPicPr>
         <p:blipFill>
-          <a:blip r:embed="rId4"/>
-          <a:srcRect l="0" r="0" t="0" b="0"/>
+          <a:blip r:embed="rId6"/>
+          <a:srcRect/>
           <a:stretch/>
         </p:blipFill>
         <p:spPr>
@@ -20519,7 +21024,7 @@
           </a:bodyPr>
           <a:lstStyle/>
           <a:p>
-            <a:pPr algn="l" indent="0" marL="0">
+            <a:pPr marL="0" indent="0" algn="l">
               <a:lnSpc>
                 <a:spcPts val="2080"/>
               </a:lnSpc>
@@ -20542,15 +21047,15 @@
       </p:sp>
       <p:pic>
         <p:nvPicPr>
-          <p:cNvPr id="15" name="Image 4" descr="ILRI and CGIAR logos">    </p:cNvPr>
+          <p:cNvPr id="15" name="Image 4" descr="ILRI and CGIAR logos"/>
           <p:cNvPicPr>
             <a:picLocks noChangeAspect="1"/>
           </p:cNvPicPr>
           <p:nvPr/>
         </p:nvPicPr>
         <p:blipFill>
-          <a:blip r:embed="rId5"/>
-          <a:srcRect l="-56" r="-56" t="0" b="0"/>
+          <a:blip r:embed="rId7"/>
+          <a:srcRect l="-56" r="-56"/>
           <a:stretch/>
         </p:blipFill>
         <p:spPr>
@@ -20586,7 +21091,7 @@
           </a:bodyPr>
           <a:lstStyle/>
           <a:p>
-            <a:pPr algn="l" indent="0" marL="0">
+            <a:pPr marL="0" indent="0" algn="l">
               <a:lnSpc>
                 <a:spcPts val="1680"/>
               </a:lnSpc>
@@ -20630,7 +21135,7 @@
           </a:bodyPr>
           <a:lstStyle/>
           <a:p>
-            <a:pPr algn="r" indent="0" marL="0">
+            <a:pPr marL="0" indent="0" algn="r">
               <a:lnSpc>
                 <a:spcPts val="1680"/>
               </a:lnSpc>
@@ -20667,6 +21172,7 @@
         <a:solidFill>
           <a:srgbClr val="273003"/>
         </a:solidFill>
+        <a:effectLst/>
       </p:bgPr>
     </p:bg>
     <p:spTree>
@@ -20686,7 +21192,9 @@
       <p:sp>
         <p:nvSpPr>
           <p:cNvPr id="2" name="Text 0"/>
-          <p:cNvSpPr/>
+          <p:cNvSpPr>
+            <a:spLocks noGrp="1"/>
+          </p:cNvSpPr>
           <p:nvPr>
             <p:ph type="title"/>
           </p:nvPr>
@@ -20708,7 +21216,7 @@
           </a:bodyPr>
           <a:lstStyle/>
           <a:p>
-            <a:pPr algn="l" indent="0" marL="0">
+            <a:pPr marL="0" indent="0" algn="l">
               <a:lnSpc>
                 <a:spcPts val="3960"/>
               </a:lnSpc>
@@ -20750,6 +21258,13 @@
           </a:solidFill>
           <a:ln/>
         </p:spPr>
+        <p:txBody>
+          <a:bodyPr/>
+          <a:lstStyle/>
+          <a:p>
+            <a:endParaRPr lang="en-KE"/>
+          </a:p>
+        </p:txBody>
       </p:sp>
       <p:sp>
         <p:nvSpPr>
@@ -20774,7 +21289,7 @@
           </a:bodyPr>
           <a:lstStyle/>
           <a:p>
-            <a:pPr algn="l" indent="0" marL="0">
+            <a:pPr marL="0" indent="0" algn="l">
               <a:lnSpc>
                 <a:spcPts val="3360"/>
               </a:lnSpc>
@@ -20818,7 +21333,7 @@
           </a:bodyPr>
           <a:lstStyle/>
           <a:p>
-            <a:pPr algn="l" indent="0" marL="0">
+            <a:pPr marL="0" indent="0" algn="l">
               <a:lnSpc>
                 <a:spcPts val="2160"/>
               </a:lnSpc>
@@ -20862,7 +21377,7 @@
           </a:bodyPr>
           <a:lstStyle/>
           <a:p>
-            <a:pPr algn="l" indent="0" marL="0">
+            <a:pPr marL="0" indent="0" algn="l">
               <a:lnSpc>
                 <a:spcPts val="3360"/>
               </a:lnSpc>
@@ -20906,7 +21421,7 @@
           </a:bodyPr>
           <a:lstStyle/>
           <a:p>
-            <a:pPr algn="l" indent="0" marL="0">
+            <a:pPr marL="0" indent="0" algn="l">
               <a:lnSpc>
                 <a:spcPts val="2160"/>
               </a:lnSpc>
@@ -20972,7 +21487,7 @@
           </a:bodyPr>
           <a:lstStyle/>
           <a:p>
-            <a:pPr algn="l" indent="0" marL="0">
+            <a:pPr marL="0" indent="0" algn="l">
               <a:lnSpc>
                 <a:spcPts val="3360"/>
               </a:lnSpc>
@@ -21016,7 +21531,7 @@
           </a:bodyPr>
           <a:lstStyle/>
           <a:p>
-            <a:pPr algn="l" indent="0" marL="0">
+            <a:pPr marL="0" indent="0" algn="l">
               <a:lnSpc>
                 <a:spcPts val="2160"/>
               </a:lnSpc>
@@ -21060,7 +21575,7 @@
           </a:bodyPr>
           <a:lstStyle/>
           <a:p>
-            <a:pPr algn="l" indent="0" marL="0">
+            <a:pPr marL="0" indent="0" algn="l">
               <a:lnSpc>
                 <a:spcPts val="3360"/>
               </a:lnSpc>
@@ -21104,7 +21619,7 @@
           </a:bodyPr>
           <a:lstStyle/>
           <a:p>
-            <a:pPr algn="l" indent="0" marL="0">
+            <a:pPr marL="0" indent="0" algn="l">
               <a:lnSpc>
                 <a:spcPts val="2160"/>
               </a:lnSpc>
@@ -21148,7 +21663,7 @@
           </a:bodyPr>
           <a:lstStyle/>
           <a:p>
-            <a:pPr algn="l" indent="0" marL="0">
+            <a:pPr marL="0" indent="0" algn="l">
               <a:lnSpc>
                 <a:spcPts val="1680"/>
               </a:lnSpc>
@@ -21192,7 +21707,7 @@
           </a:bodyPr>
           <a:lstStyle/>
           <a:p>
-            <a:pPr algn="r" indent="0" marL="0">
+            <a:pPr marL="0" indent="0" algn="r">
               <a:lnSpc>
                 <a:spcPts val="1680"/>
               </a:lnSpc>
@@ -21229,6 +21744,7 @@
         <a:solidFill>
           <a:srgbClr val="F9F2EA"/>
         </a:solidFill>
+        <a:effectLst/>
       </p:bgPr>
     </p:bg>
     <p:spTree>
@@ -21248,7 +21764,9 @@
       <p:sp>
         <p:nvSpPr>
           <p:cNvPr id="2" name="Text 0"/>
-          <p:cNvSpPr/>
+          <p:cNvSpPr>
+            <a:spLocks noGrp="1"/>
+          </p:cNvSpPr>
           <p:nvPr>
             <p:ph type="title"/>
           </p:nvPr>
@@ -21270,7 +21788,7 @@
           </a:bodyPr>
           <a:lstStyle/>
           <a:p>
-            <a:pPr algn="l" indent="0" marL="0">
+            <a:pPr marL="0" indent="0" algn="l">
               <a:lnSpc>
                 <a:spcPts val="3960"/>
               </a:lnSpc>
@@ -21312,6 +21830,13 @@
           </a:solidFill>
           <a:ln/>
         </p:spPr>
+        <p:txBody>
+          <a:bodyPr/>
+          <a:lstStyle/>
+          <a:p>
+            <a:endParaRPr lang="en-KE"/>
+          </a:p>
+        </p:txBody>
       </p:sp>
       <p:sp>
         <p:nvSpPr>
@@ -21335,18 +21860,25 @@
             <a:prstDash val="solid"/>
           </a:ln>
         </p:spPr>
+        <p:txBody>
+          <a:bodyPr/>
+          <a:lstStyle/>
+          <a:p>
+            <a:endParaRPr lang="en-KE"/>
+          </a:p>
+        </p:txBody>
       </p:sp>
       <p:pic>
         <p:nvPicPr>
-          <p:cNvPr id="5" name="Image 0" descr="CheckCircle">    </p:cNvPr>
+          <p:cNvPr id="5" name="Image 0" descr="CheckCircle"/>
           <p:cNvPicPr>
             <a:picLocks noChangeAspect="1"/>
           </p:cNvPicPr>
           <p:nvPr/>
         </p:nvPicPr>
         <p:blipFill>
-          <a:blip r:embed="rId1"/>
-          <a:srcRect l="0" r="0" t="0" b="0"/>
+          <a:blip r:embed="rId3"/>
+          <a:srcRect/>
           <a:stretch/>
         </p:blipFill>
         <p:spPr>
@@ -21382,7 +21914,7 @@
           </a:bodyPr>
           <a:lstStyle/>
           <a:p>
-            <a:pPr algn="l" indent="0" marL="0">
+            <a:pPr marL="0" indent="0" algn="l">
               <a:lnSpc>
                 <a:spcPts val="1950"/>
               </a:lnSpc>
@@ -21425,18 +21957,25 @@
             <a:prstDash val="solid"/>
           </a:ln>
         </p:spPr>
+        <p:txBody>
+          <a:bodyPr/>
+          <a:lstStyle/>
+          <a:p>
+            <a:endParaRPr lang="en-KE"/>
+          </a:p>
+        </p:txBody>
       </p:sp>
       <p:pic>
         <p:nvPicPr>
-          <p:cNvPr id="8" name="Image 1" descr="CheckCircle">    </p:cNvPr>
+          <p:cNvPr id="8" name="Image 1" descr="CheckCircle"/>
           <p:cNvPicPr>
             <a:picLocks noChangeAspect="1"/>
           </p:cNvPicPr>
           <p:nvPr/>
         </p:nvPicPr>
         <p:blipFill>
-          <a:blip r:embed="rId2"/>
-          <a:srcRect l="0" r="0" t="0" b="0"/>
+          <a:blip r:embed="rId3"/>
+          <a:srcRect/>
           <a:stretch/>
         </p:blipFill>
         <p:spPr>
@@ -21472,7 +22011,7 @@
           </a:bodyPr>
           <a:lstStyle/>
           <a:p>
-            <a:pPr algn="l" indent="0" marL="0">
+            <a:pPr marL="0" indent="0" algn="l">
               <a:lnSpc>
                 <a:spcPts val="1950"/>
               </a:lnSpc>
@@ -21537,10 +22076,17 @@
             <a:prstDash val="solid"/>
           </a:ln>
         </p:spPr>
+        <p:txBody>
+          <a:bodyPr/>
+          <a:lstStyle/>
+          <a:p>
+            <a:endParaRPr lang="en-KE"/>
+          </a:p>
+        </p:txBody>
       </p:sp>
       <p:pic>
         <p:nvPicPr>
-          <p:cNvPr id="11" name="Image 2" descr="CheckCircle">    </p:cNvPr>
+          <p:cNvPr id="11" name="Image 2" descr="CheckCircle"/>
           <p:cNvPicPr>
             <a:picLocks noChangeAspect="1"/>
           </p:cNvPicPr>
@@ -21548,7 +22094,7 @@
         </p:nvPicPr>
         <p:blipFill>
           <a:blip r:embed="rId3"/>
-          <a:srcRect l="0" r="0" t="0" b="0"/>
+          <a:srcRect/>
           <a:stretch/>
         </p:blipFill>
         <p:spPr>
@@ -21584,7 +22130,7 @@
           </a:bodyPr>
           <a:lstStyle/>
           <a:p>
-            <a:pPr algn="l" indent="0" marL="0">
+            <a:pPr marL="0" indent="0" algn="l">
               <a:lnSpc>
                 <a:spcPts val="1950"/>
               </a:lnSpc>
@@ -21627,18 +22173,25 @@
             <a:prstDash val="solid"/>
           </a:ln>
         </p:spPr>
+        <p:txBody>
+          <a:bodyPr/>
+          <a:lstStyle/>
+          <a:p>
+            <a:endParaRPr lang="en-KE"/>
+          </a:p>
+        </p:txBody>
       </p:sp>
       <p:pic>
         <p:nvPicPr>
-          <p:cNvPr id="14" name="Image 3" descr="CheckCircle">    </p:cNvPr>
+          <p:cNvPr id="14" name="Image 3" descr="CheckCircle"/>
           <p:cNvPicPr>
             <a:picLocks noChangeAspect="1"/>
           </p:cNvPicPr>
           <p:nvPr/>
         </p:nvPicPr>
         <p:blipFill>
-          <a:blip r:embed="rId4"/>
-          <a:srcRect l="0" r="0" t="0" b="0"/>
+          <a:blip r:embed="rId3"/>
+          <a:srcRect/>
           <a:stretch/>
         </p:blipFill>
         <p:spPr>
@@ -21674,7 +22227,7 @@
           </a:bodyPr>
           <a:lstStyle/>
           <a:p>
-            <a:pPr algn="l" indent="0" marL="0">
+            <a:pPr marL="0" indent="0" algn="l">
               <a:lnSpc>
                 <a:spcPts val="1950"/>
               </a:lnSpc>
@@ -21697,15 +22250,15 @@
       </p:sp>
       <p:pic>
         <p:nvPicPr>
-          <p:cNvPr id="16" name="Image 4" descr="CheckCircle">    </p:cNvPr>
+          <p:cNvPr id="16" name="Image 4" descr="CheckCircle"/>
           <p:cNvPicPr>
             <a:picLocks noChangeAspect="1"/>
           </p:cNvPicPr>
           <p:nvPr/>
         </p:nvPicPr>
         <p:blipFill>
-          <a:blip r:embed="rId5"/>
-          <a:srcRect l="0" r="0" t="0" b="0"/>
+          <a:blip r:embed="rId3"/>
+          <a:srcRect/>
           <a:stretch/>
         </p:blipFill>
         <p:spPr>
@@ -21741,7 +22294,7 @@
           </a:bodyPr>
           <a:lstStyle/>
           <a:p>
-            <a:pPr algn="l" indent="0" marL="0">
+            <a:pPr marL="0" indent="0" algn="l">
               <a:lnSpc>
                 <a:spcPts val="1950"/>
               </a:lnSpc>
@@ -21764,15 +22317,15 @@
       </p:sp>
       <p:pic>
         <p:nvPicPr>
-          <p:cNvPr id="18" name="Image 5" descr="ILRI and CGIAR logos">    </p:cNvPr>
+          <p:cNvPr id="18" name="Image 5" descr="ILRI and CGIAR logos"/>
           <p:cNvPicPr>
             <a:picLocks noChangeAspect="1"/>
           </p:cNvPicPr>
           <p:nvPr/>
         </p:nvPicPr>
         <p:blipFill>
-          <a:blip r:embed="rId6"/>
-          <a:srcRect l="-56" r="-56" t="0" b="0"/>
+          <a:blip r:embed="rId4"/>
+          <a:srcRect l="-56" r="-56"/>
           <a:stretch/>
         </p:blipFill>
         <p:spPr>
@@ -21808,7 +22361,7 @@
           </a:bodyPr>
           <a:lstStyle/>
           <a:p>
-            <a:pPr algn="l" indent="0" marL="0">
+            <a:pPr marL="0" indent="0" algn="l">
               <a:lnSpc>
                 <a:spcPts val="1680"/>
               </a:lnSpc>
@@ -21852,7 +22405,7 @@
           </a:bodyPr>
           <a:lstStyle/>
           <a:p>
-            <a:pPr algn="r" indent="0" marL="0">
+            <a:pPr marL="0" indent="0" algn="r">
               <a:lnSpc>
                 <a:spcPts val="1680"/>
               </a:lnSpc>
@@ -21889,6 +22442,7 @@
         <a:solidFill>
           <a:srgbClr val="F9F2EA"/>
         </a:solidFill>
+        <a:effectLst/>
       </p:bgPr>
     </p:bg>
     <p:spTree>
@@ -21907,15 +22461,15 @@
       </p:grpSpPr>
       <p:pic>
         <p:nvPicPr>
-          <p:cNvPr id="2" name="Image 0" descr="ILRI and CGIAR logos">    </p:cNvPr>
+          <p:cNvPr id="2" name="Image 0" descr="ILRI and CGIAR logos"/>
           <p:cNvPicPr>
             <a:picLocks noChangeAspect="1"/>
           </p:cNvPicPr>
           <p:nvPr/>
         </p:nvPicPr>
         <p:blipFill>
-          <a:blip r:embed="rId1"/>
-          <a:srcRect l="0" r="0" t="-63" b="-63"/>
+          <a:blip r:embed="rId3"/>
+          <a:srcRect t="-63" b="-63"/>
           <a:stretch/>
         </p:blipFill>
         <p:spPr>
@@ -21931,7 +22485,9 @@
       <p:sp>
         <p:nvSpPr>
           <p:cNvPr id="3" name="Text 0"/>
-          <p:cNvSpPr/>
+          <p:cNvSpPr>
+            <a:spLocks noGrp="1"/>
+          </p:cNvSpPr>
           <p:nvPr>
             <p:ph type="title"/>
           </p:nvPr>
@@ -21953,7 +22509,7 @@
           </a:bodyPr>
           <a:lstStyle/>
           <a:p>
-            <a:pPr algn="l" indent="0" marL="0">
+            <a:pPr marL="0" indent="0" algn="l">
               <a:lnSpc>
                 <a:spcPts val="6300"/>
               </a:lnSpc>
@@ -21995,6 +22551,13 @@
           </a:solidFill>
           <a:ln/>
         </p:spPr>
+        <p:txBody>
+          <a:bodyPr/>
+          <a:lstStyle/>
+          <a:p>
+            <a:endParaRPr lang="en-KE"/>
+          </a:p>
+        </p:txBody>
       </p:sp>
       <p:sp>
         <p:nvSpPr>
@@ -22019,7 +22582,7 @@
           </a:bodyPr>
           <a:lstStyle/>
           <a:p>
-            <a:pPr algn="l" indent="0" marL="0">
+            <a:pPr marL="0" indent="0" algn="l">
               <a:lnSpc>
                 <a:spcPts val="2600"/>
               </a:lnSpc>
@@ -22085,7 +22648,7 @@
           </a:bodyPr>
           <a:lstStyle/>
           <a:p>
-            <a:pPr algn="l" indent="0" marL="0">
+            <a:pPr marL="0" indent="0" algn="l">
               <a:lnSpc>
                 <a:spcPts val="1680"/>
               </a:lnSpc>
@@ -22129,7 +22692,7 @@
           </a:bodyPr>
           <a:lstStyle/>
           <a:p>
-            <a:pPr algn="r" indent="0" marL="0">
+            <a:pPr marL="0" indent="0" algn="r">
               <a:lnSpc>
                 <a:spcPts val="1680"/>
               </a:lnSpc>
@@ -22166,6 +22729,7 @@
         <a:solidFill>
           <a:srgbClr val="F9F2EA"/>
         </a:solidFill>
+        <a:effectLst/>
       </p:bgPr>
     </p:bg>
     <p:spTree>
@@ -22191,7 +22755,7 @@
         <p:spPr>
           <a:xfrm>
             <a:off x="336550" y="692150"/>
-            <a:ext cx="4076700" cy="5334000"/>
+            <a:ext cx="10148570" cy="1155005"/>
           </a:xfrm>
           <a:prstGeom prst="rect">
             <a:avLst/>
@@ -22201,11 +22765,20 @@
           </a:solidFill>
           <a:ln/>
         </p:spPr>
+        <p:txBody>
+          <a:bodyPr/>
+          <a:lstStyle/>
+          <a:p>
+            <a:endParaRPr lang="en-KE"/>
+          </a:p>
+        </p:txBody>
       </p:sp>
       <p:sp>
         <p:nvSpPr>
           <p:cNvPr id="3" name="Text 1"/>
-          <p:cNvSpPr/>
+          <p:cNvSpPr>
+            <a:spLocks noGrp="1"/>
+          </p:cNvSpPr>
           <p:nvPr>
             <p:ph type="title"/>
           </p:nvPr>
@@ -22213,7 +22786,7 @@
         <p:spPr>
           <a:xfrm>
             <a:off x="742950" y="1098550"/>
-            <a:ext cx="3361817" cy="1031180"/>
+            <a:ext cx="6805930" cy="518715"/>
           </a:xfrm>
           <a:prstGeom prst="rect">
             <a:avLst/>
@@ -22227,7 +22800,7 @@
           </a:bodyPr>
           <a:lstStyle/>
           <a:p>
-            <a:pPr algn="l" indent="0" marL="0">
+            <a:pPr marL="0" indent="0" algn="l">
               <a:lnSpc>
                 <a:spcPts val="3960"/>
               </a:lnSpc>
@@ -22271,7 +22844,7 @@
           </a:bodyPr>
           <a:lstStyle/>
           <a:p>
-            <a:pPr algn="l" indent="0" marL="0">
+            <a:pPr marL="0" indent="0" algn="l">
               <a:lnSpc>
                 <a:spcPts val="1960"/>
               </a:lnSpc>
@@ -22314,6 +22887,13 @@
             <a:prstDash val="solid"/>
           </a:ln>
         </p:spPr>
+        <p:txBody>
+          <a:bodyPr/>
+          <a:lstStyle/>
+          <a:p>
+            <a:endParaRPr lang="en-KE"/>
+          </a:p>
+        </p:txBody>
       </p:sp>
       <p:sp>
         <p:nvSpPr>
@@ -22338,7 +22918,7 @@
           </a:bodyPr>
           <a:lstStyle/>
           <a:p>
-            <a:pPr algn="l" indent="0" marL="0">
+            <a:pPr marL="0" indent="0" algn="l">
               <a:lnSpc>
                 <a:spcPts val="3080"/>
               </a:lnSpc>
@@ -22382,7 +22962,7 @@
           </a:bodyPr>
           <a:lstStyle/>
           <a:p>
-            <a:pPr algn="l" indent="0" marL="0">
+            <a:pPr marL="0" indent="0" algn="l">
               <a:lnSpc>
                 <a:spcPts val="2025"/>
               </a:lnSpc>
@@ -22425,6 +23005,13 @@
             <a:prstDash val="solid"/>
           </a:ln>
         </p:spPr>
+        <p:txBody>
+          <a:bodyPr/>
+          <a:lstStyle/>
+          <a:p>
+            <a:endParaRPr lang="en-KE"/>
+          </a:p>
+        </p:txBody>
       </p:sp>
       <p:sp>
         <p:nvSpPr>
@@ -22449,7 +23036,7 @@
           </a:bodyPr>
           <a:lstStyle/>
           <a:p>
-            <a:pPr algn="l" indent="0" marL="0">
+            <a:pPr marL="0" indent="0" algn="l">
               <a:lnSpc>
                 <a:spcPts val="3080"/>
               </a:lnSpc>
@@ -22493,7 +23080,7 @@
           </a:bodyPr>
           <a:lstStyle/>
           <a:p>
-            <a:pPr algn="l" indent="0" marL="0">
+            <a:pPr marL="0" indent="0" algn="l">
               <a:lnSpc>
                 <a:spcPts val="2025"/>
               </a:lnSpc>
@@ -22536,6 +23123,13 @@
             <a:prstDash val="solid"/>
           </a:ln>
         </p:spPr>
+        <p:txBody>
+          <a:bodyPr/>
+          <a:lstStyle/>
+          <a:p>
+            <a:endParaRPr lang="en-KE"/>
+          </a:p>
+        </p:txBody>
       </p:sp>
       <p:sp>
         <p:nvSpPr>
@@ -22560,7 +23154,7 @@
           </a:bodyPr>
           <a:lstStyle/>
           <a:p>
-            <a:pPr algn="l" indent="0" marL="0">
+            <a:pPr marL="0" indent="0" algn="l">
               <a:lnSpc>
                 <a:spcPts val="3080"/>
               </a:lnSpc>
@@ -22604,7 +23198,7 @@
           </a:bodyPr>
           <a:lstStyle/>
           <a:p>
-            <a:pPr algn="l" indent="0" marL="0">
+            <a:pPr marL="0" indent="0" algn="l">
               <a:lnSpc>
                 <a:spcPts val="2025"/>
               </a:lnSpc>
@@ -22648,7 +23242,7 @@
           </a:bodyPr>
           <a:lstStyle/>
           <a:p>
-            <a:pPr algn="l" indent="0" marL="0">
+            <a:pPr marL="0" indent="0" algn="l">
               <a:lnSpc>
                 <a:spcPts val="3080"/>
               </a:lnSpc>
@@ -22692,7 +23286,7 @@
           </a:bodyPr>
           <a:lstStyle/>
           <a:p>
-            <a:pPr algn="l" indent="0" marL="0">
+            <a:pPr marL="0" indent="0" algn="l">
               <a:lnSpc>
                 <a:spcPts val="2025"/>
               </a:lnSpc>
@@ -22736,7 +23330,7 @@
           </a:bodyPr>
           <a:lstStyle/>
           <a:p>
-            <a:pPr algn="l" indent="0" marL="0">
+            <a:pPr marL="0" indent="0" algn="l">
               <a:lnSpc>
                 <a:spcPts val="1680"/>
               </a:lnSpc>
@@ -22780,7 +23374,7 @@
           </a:bodyPr>
           <a:lstStyle/>
           <a:p>
-            <a:pPr algn="r" indent="0" marL="0">
+            <a:pPr marL="0" indent="0" algn="r">
               <a:lnSpc>
                 <a:spcPts val="1680"/>
               </a:lnSpc>
@@ -22817,6 +23411,7 @@
         <a:solidFill>
           <a:srgbClr val="891F15"/>
         </a:solidFill>
+        <a:effectLst/>
       </p:bgPr>
     </p:bg>
     <p:spTree>
@@ -22835,15 +23430,15 @@
       </p:grpSpPr>
       <p:pic>
         <p:nvPicPr>
-          <p:cNvPr id="2" name="Image 0" descr="preencoded.png">    </p:cNvPr>
+          <p:cNvPr id="2" name="Image 0" descr="preencoded.png"/>
           <p:cNvPicPr>
             <a:picLocks noChangeAspect="1"/>
           </p:cNvPicPr>
           <p:nvPr/>
         </p:nvPicPr>
         <p:blipFill>
-          <a:blip r:embed="rId1"/>
-          <a:srcRect l="0" r="0" t="0" b="0"/>
+          <a:blip r:embed="rId3"/>
+          <a:srcRect/>
           <a:stretch/>
         </p:blipFill>
         <p:spPr>
@@ -22879,14 +23474,14 @@
           </a:bodyPr>
           <a:lstStyle/>
           <a:p>
-            <a:pPr algn="l" indent="0" marL="0">
+            <a:pPr marL="0" indent="0" algn="l">
               <a:lnSpc>
                 <a:spcPts val="2240"/>
               </a:lnSpc>
               <a:buNone/>
             </a:pPr>
             <a:r>
-              <a:rPr lang="en-US" sz="1600" b="1" spc="150" kern="0" dirty="0">
+              <a:rPr lang="en-US" sz="1600" b="1" kern="0" spc="150" dirty="0">
                 <a:solidFill>
                   <a:srgbClr val="FFCE00"/>
                 </a:solidFill>
@@ -22903,7 +23498,9 @@
       <p:sp>
         <p:nvSpPr>
           <p:cNvPr id="4" name="Text 1"/>
-          <p:cNvSpPr/>
+          <p:cNvSpPr>
+            <a:spLocks noGrp="1"/>
+          </p:cNvSpPr>
           <p:nvPr>
             <p:ph type="title"/>
           </p:nvPr>
@@ -22925,7 +23522,7 @@
           </a:bodyPr>
           <a:lstStyle/>
           <a:p>
-            <a:pPr algn="l" indent="0" marL="0">
+            <a:pPr marL="0" indent="0" algn="l">
               <a:lnSpc>
                 <a:spcPts val="5040"/>
               </a:lnSpc>
@@ -22969,7 +23566,7 @@
           </a:bodyPr>
           <a:lstStyle/>
           <a:p>
-            <a:pPr algn="l" indent="0" marL="0">
+            <a:pPr marL="0" indent="0" algn="l">
               <a:lnSpc>
                 <a:spcPts val="2600"/>
               </a:lnSpc>
@@ -23013,7 +23610,7 @@
           </a:bodyPr>
           <a:lstStyle/>
           <a:p>
-            <a:pPr algn="l" indent="0" marL="0">
+            <a:pPr marL="0" indent="0" algn="l">
               <a:lnSpc>
                 <a:spcPts val="1680"/>
               </a:lnSpc>
@@ -23057,7 +23654,7 @@
           </a:bodyPr>
           <a:lstStyle/>
           <a:p>
-            <a:pPr algn="r" indent="0" marL="0">
+            <a:pPr marL="0" indent="0" algn="r">
               <a:lnSpc>
                 <a:spcPts val="1680"/>
               </a:lnSpc>
@@ -23094,6 +23691,7 @@
         <a:solidFill>
           <a:srgbClr val="F9F2EA"/>
         </a:solidFill>
+        <a:effectLst/>
       </p:bgPr>
     </p:bg>
     <p:spTree>
@@ -23113,7 +23711,9 @@
       <p:sp>
         <p:nvSpPr>
           <p:cNvPr id="2" name="Text 0"/>
-          <p:cNvSpPr/>
+          <p:cNvSpPr>
+            <a:spLocks noGrp="1"/>
+          </p:cNvSpPr>
           <p:nvPr>
             <p:ph type="title"/>
           </p:nvPr>
@@ -23135,7 +23735,7 @@
           </a:bodyPr>
           <a:lstStyle/>
           <a:p>
-            <a:pPr algn="l" indent="0" marL="0">
+            <a:pPr marL="0" indent="0" algn="l">
               <a:lnSpc>
                 <a:spcPts val="3960"/>
               </a:lnSpc>
@@ -23177,6 +23777,13 @@
           </a:solidFill>
           <a:ln/>
         </p:spPr>
+        <p:txBody>
+          <a:bodyPr/>
+          <a:lstStyle/>
+          <a:p>
+            <a:endParaRPr lang="en-KE"/>
+          </a:p>
+        </p:txBody>
       </p:sp>
       <p:sp>
         <p:nvSpPr>
@@ -23199,6 +23806,13 @@
           </a:solidFill>
           <a:ln/>
         </p:spPr>
+        <p:txBody>
+          <a:bodyPr/>
+          <a:lstStyle/>
+          <a:p>
+            <a:endParaRPr lang="en-KE"/>
+          </a:p>
+        </p:txBody>
       </p:sp>
       <p:sp>
         <p:nvSpPr>
@@ -23223,14 +23837,14 @@
           </a:bodyPr>
           <a:lstStyle/>
           <a:p>
-            <a:pPr algn="l" indent="0" marL="0">
+            <a:pPr marL="0" indent="0" algn="l">
               <a:lnSpc>
                 <a:spcPts val="1680"/>
               </a:lnSpc>
               <a:buNone/>
             </a:pPr>
             <a:r>
-              <a:rPr lang="en-US" sz="1200" b="1" spc="100" kern="0" dirty="0">
+              <a:rPr lang="en-US" sz="1200" b="1" kern="0" spc="100" dirty="0">
                 <a:solidFill>
                   <a:srgbClr val="FFCE00"/>
                 </a:solidFill>
@@ -23267,7 +23881,7 @@
           </a:bodyPr>
           <a:lstStyle/>
           <a:p>
-            <a:pPr algn="l" indent="0" marL="0">
+            <a:pPr marL="0" indent="0" algn="l">
               <a:lnSpc>
                 <a:spcPts val="1820"/>
               </a:lnSpc>
@@ -23331,6 +23945,13 @@
           </a:solidFill>
           <a:ln/>
         </p:spPr>
+        <p:txBody>
+          <a:bodyPr/>
+          <a:lstStyle/>
+          <a:p>
+            <a:endParaRPr lang="en-KE"/>
+          </a:p>
+        </p:txBody>
       </p:sp>
       <p:sp>
         <p:nvSpPr>
@@ -23357,11 +23978,11 @@
                 <a:lnTo>
                   <a:pt x="0" y="50800"/>
                 </a:lnTo>
-                <a:arcTo hR="50800" wR="50800" stAng="10800000" swAng="5400000"/>
+                <a:arcTo wR="50800" hR="50800" stAng="10800000" swAng="5400000"/>
                 <a:lnTo>
                   <a:pt x="1818630" y="0"/>
                 </a:lnTo>
-                <a:arcTo hR="50800" wR="50800" stAng="16200000" swAng="5400000"/>
+                <a:arcTo wR="50800" hR="50800" stAng="16200000" swAng="5400000"/>
                 <a:lnTo>
                   <a:pt x="1869430" y="50800"/>
                 </a:lnTo>
@@ -23377,6 +23998,13 @@
           </a:solidFill>
           <a:ln/>
         </p:spPr>
+        <p:txBody>
+          <a:bodyPr/>
+          <a:lstStyle/>
+          <a:p>
+            <a:endParaRPr lang="en-KE"/>
+          </a:p>
+        </p:txBody>
       </p:sp>
       <p:sp>
         <p:nvSpPr>
@@ -23401,7 +24029,7 @@
           </a:bodyPr>
           <a:lstStyle/>
           <a:p>
-            <a:pPr algn="l" indent="0" marL="0">
+            <a:pPr marL="0" indent="0" algn="l">
               <a:lnSpc>
                 <a:spcPts val="1820"/>
               </a:lnSpc>
@@ -23445,7 +24073,7 @@
           </a:bodyPr>
           <a:lstStyle/>
           <a:p>
-            <a:pPr algn="l" indent="0" marL="0">
+            <a:pPr marL="0" indent="0" algn="l">
               <a:lnSpc>
                 <a:spcPts val="1680"/>
               </a:lnSpc>
@@ -23489,7 +24117,7 @@
           </a:bodyPr>
           <a:lstStyle/>
           <a:p>
-            <a:pPr algn="l" indent="0" marL="0">
+            <a:pPr marL="0" indent="0" algn="l">
               <a:lnSpc>
                 <a:spcPts val="1560"/>
               </a:lnSpc>
@@ -23533,7 +24161,7 @@
           </a:bodyPr>
           <a:lstStyle/>
           <a:p>
-            <a:pPr algn="l" indent="0" marL="0">
+            <a:pPr marL="0" indent="0" algn="l">
               <a:lnSpc>
                 <a:spcPts val="1560"/>
               </a:lnSpc>
@@ -23577,7 +24205,7 @@
           </a:bodyPr>
           <a:lstStyle/>
           <a:p>
-            <a:pPr algn="l" indent="0" marL="0">
+            <a:pPr marL="0" indent="0" algn="l">
               <a:lnSpc>
                 <a:spcPts val="1560"/>
               </a:lnSpc>
@@ -23600,15 +24228,15 @@
       </p:sp>
       <p:pic>
         <p:nvPicPr>
-          <p:cNvPr id="14" name="Image 0" descr="arrow-right">    </p:cNvPr>
+          <p:cNvPr id="14" name="Image 0" descr="arrow-right"/>
           <p:cNvPicPr>
             <a:picLocks noChangeAspect="1"/>
           </p:cNvPicPr>
           <p:nvPr/>
         </p:nvPicPr>
         <p:blipFill>
-          <a:blip r:embed="rId1"/>
-          <a:srcRect l="0" r="0" t="0" b="0"/>
+          <a:blip r:embed="rId3"/>
+          <a:srcRect/>
           <a:stretch/>
         </p:blipFill>
         <p:spPr>
@@ -23642,6 +24270,13 @@
           </a:solidFill>
           <a:ln/>
         </p:spPr>
+        <p:txBody>
+          <a:bodyPr/>
+          <a:lstStyle/>
+          <a:p>
+            <a:endParaRPr lang="en-KE"/>
+          </a:p>
+        </p:txBody>
       </p:sp>
       <p:sp>
         <p:nvSpPr>
@@ -23668,11 +24303,11 @@
                 <a:lnTo>
                   <a:pt x="0" y="50800"/>
                 </a:lnTo>
-                <a:arcTo hR="50800" wR="50800" stAng="10800000" swAng="5400000"/>
+                <a:arcTo wR="50800" hR="50800" stAng="10800000" swAng="5400000"/>
                 <a:lnTo>
                   <a:pt x="1818680" y="0"/>
                 </a:lnTo>
-                <a:arcTo hR="50800" wR="50800" stAng="16200000" swAng="5400000"/>
+                <a:arcTo wR="50800" hR="50800" stAng="16200000" swAng="5400000"/>
                 <a:lnTo>
                   <a:pt x="1869480" y="50800"/>
                 </a:lnTo>
@@ -23688,6 +24323,13 @@
           </a:solidFill>
           <a:ln/>
         </p:spPr>
+        <p:txBody>
+          <a:bodyPr/>
+          <a:lstStyle/>
+          <a:p>
+            <a:endParaRPr lang="en-KE"/>
+          </a:p>
+        </p:txBody>
       </p:sp>
       <p:sp>
         <p:nvSpPr>
@@ -23712,7 +24354,7 @@
           </a:bodyPr>
           <a:lstStyle/>
           <a:p>
-            <a:pPr algn="l" indent="0" marL="0">
+            <a:pPr marL="0" indent="0" algn="l">
               <a:lnSpc>
                 <a:spcPts val="1820"/>
               </a:lnSpc>
@@ -23756,7 +24398,7 @@
           </a:bodyPr>
           <a:lstStyle/>
           <a:p>
-            <a:pPr algn="l" indent="0" marL="0">
+            <a:pPr marL="0" indent="0" algn="l">
               <a:lnSpc>
                 <a:spcPts val="1680"/>
               </a:lnSpc>
@@ -23800,7 +24442,7 @@
           </a:bodyPr>
           <a:lstStyle/>
           <a:p>
-            <a:pPr algn="l" indent="0" marL="0">
+            <a:pPr marL="0" indent="0" algn="l">
               <a:lnSpc>
                 <a:spcPts val="1560"/>
               </a:lnSpc>
@@ -23844,7 +24486,7 @@
           </a:bodyPr>
           <a:lstStyle/>
           <a:p>
-            <a:pPr algn="l" indent="0" marL="0">
+            <a:pPr marL="0" indent="0" algn="l">
               <a:lnSpc>
                 <a:spcPts val="1560"/>
               </a:lnSpc>
@@ -23888,7 +24530,7 @@
           </a:bodyPr>
           <a:lstStyle/>
           <a:p>
-            <a:pPr algn="l" indent="0" marL="0">
+            <a:pPr marL="0" indent="0" algn="l">
               <a:lnSpc>
                 <a:spcPts val="1560"/>
               </a:lnSpc>
@@ -23932,7 +24574,7 @@
           </a:bodyPr>
           <a:lstStyle/>
           <a:p>
-            <a:pPr algn="l" indent="0" marL="0">
+            <a:pPr marL="0" indent="0" algn="l">
               <a:lnSpc>
                 <a:spcPts val="1560"/>
               </a:lnSpc>
@@ -23955,15 +24597,15 @@
       </p:sp>
       <p:pic>
         <p:nvPicPr>
-          <p:cNvPr id="23" name="Image 1" descr="arrow-right">    </p:cNvPr>
+          <p:cNvPr id="23" name="Image 1" descr="arrow-right"/>
           <p:cNvPicPr>
             <a:picLocks noChangeAspect="1"/>
           </p:cNvPicPr>
           <p:nvPr/>
         </p:nvPicPr>
         <p:blipFill>
-          <a:blip r:embed="rId2"/>
-          <a:srcRect l="0" r="0" t="0" b="0"/>
+          <a:blip r:embed="rId3"/>
+          <a:srcRect/>
           <a:stretch/>
         </p:blipFill>
         <p:spPr>
@@ -23997,6 +24639,13 @@
           </a:solidFill>
           <a:ln/>
         </p:spPr>
+        <p:txBody>
+          <a:bodyPr/>
+          <a:lstStyle/>
+          <a:p>
+            <a:endParaRPr lang="en-KE"/>
+          </a:p>
+        </p:txBody>
       </p:sp>
       <p:sp>
         <p:nvSpPr>
@@ -24023,11 +24672,11 @@
                 <a:lnTo>
                   <a:pt x="0" y="50800"/>
                 </a:lnTo>
-                <a:arcTo hR="50800" wR="50800" stAng="10800000" swAng="5400000"/>
+                <a:arcTo wR="50800" hR="50800" stAng="10800000" swAng="5400000"/>
                 <a:lnTo>
                   <a:pt x="1818630" y="0"/>
                 </a:lnTo>
-                <a:arcTo hR="50800" wR="50800" stAng="16200000" swAng="5400000"/>
+                <a:arcTo wR="50800" hR="50800" stAng="16200000" swAng="5400000"/>
                 <a:lnTo>
                   <a:pt x="1869430" y="50800"/>
                 </a:lnTo>
@@ -24043,6 +24692,13 @@
           </a:solidFill>
           <a:ln/>
         </p:spPr>
+        <p:txBody>
+          <a:bodyPr/>
+          <a:lstStyle/>
+          <a:p>
+            <a:endParaRPr lang="en-KE"/>
+          </a:p>
+        </p:txBody>
       </p:sp>
       <p:sp>
         <p:nvSpPr>
@@ -24067,7 +24723,7 @@
           </a:bodyPr>
           <a:lstStyle/>
           <a:p>
-            <a:pPr algn="l" indent="0" marL="0">
+            <a:pPr marL="0" indent="0" algn="l">
               <a:lnSpc>
                 <a:spcPts val="1820"/>
               </a:lnSpc>
@@ -24111,7 +24767,7 @@
           </a:bodyPr>
           <a:lstStyle/>
           <a:p>
-            <a:pPr algn="l" indent="0" marL="0">
+            <a:pPr marL="0" indent="0" algn="l">
               <a:lnSpc>
                 <a:spcPts val="1680"/>
               </a:lnSpc>
@@ -24155,7 +24811,7 @@
           </a:bodyPr>
           <a:lstStyle/>
           <a:p>
-            <a:pPr algn="l" indent="0" marL="0">
+            <a:pPr marL="0" indent="0" algn="l">
               <a:lnSpc>
                 <a:spcPts val="1560"/>
               </a:lnSpc>
@@ -24199,7 +24855,7 @@
           </a:bodyPr>
           <a:lstStyle/>
           <a:p>
-            <a:pPr algn="l" indent="0" marL="0">
+            <a:pPr marL="0" indent="0" algn="l">
               <a:lnSpc>
                 <a:spcPts val="1560"/>
               </a:lnSpc>
@@ -24254,7 +24910,7 @@
           </a:bodyPr>
           <a:lstStyle/>
           <a:p>
-            <a:pPr algn="l" indent="0" marL="0">
+            <a:pPr marL="0" indent="0" algn="l">
               <a:lnSpc>
                 <a:spcPts val="1560"/>
               </a:lnSpc>
@@ -24298,7 +24954,7 @@
           </a:bodyPr>
           <a:lstStyle/>
           <a:p>
-            <a:pPr algn="l" indent="0" marL="0">
+            <a:pPr marL="0" indent="0" algn="l">
               <a:lnSpc>
                 <a:spcPts val="1560"/>
               </a:lnSpc>
@@ -24321,7 +24977,7 @@
       </p:sp>
       <p:pic>
         <p:nvPicPr>
-          <p:cNvPr id="32" name="Image 2" descr="arrow-right">    </p:cNvPr>
+          <p:cNvPr id="32" name="Image 2" descr="arrow-right"/>
           <p:cNvPicPr>
             <a:picLocks noChangeAspect="1"/>
           </p:cNvPicPr>
@@ -24329,7 +24985,7 @@
         </p:nvPicPr>
         <p:blipFill>
           <a:blip r:embed="rId3"/>
-          <a:srcRect l="0" r="0" t="0" b="0"/>
+          <a:srcRect/>
           <a:stretch/>
         </p:blipFill>
         <p:spPr>
@@ -24363,6 +25019,13 @@
           </a:solidFill>
           <a:ln/>
         </p:spPr>
+        <p:txBody>
+          <a:bodyPr/>
+          <a:lstStyle/>
+          <a:p>
+            <a:endParaRPr lang="en-KE"/>
+          </a:p>
+        </p:txBody>
       </p:sp>
       <p:sp>
         <p:nvSpPr>
@@ -24389,11 +25052,11 @@
                 <a:lnTo>
                   <a:pt x="0" y="50800"/>
                 </a:lnTo>
-                <a:arcTo hR="50800" wR="50800" stAng="10800000" swAng="5400000"/>
+                <a:arcTo wR="50800" hR="50800" stAng="10800000" swAng="5400000"/>
                 <a:lnTo>
                   <a:pt x="1818630" y="0"/>
                 </a:lnTo>
-                <a:arcTo hR="50800" wR="50800" stAng="16200000" swAng="5400000"/>
+                <a:arcTo wR="50800" hR="50800" stAng="16200000" swAng="5400000"/>
                 <a:lnTo>
                   <a:pt x="1869430" y="50800"/>
                 </a:lnTo>
@@ -24409,6 +25072,13 @@
           </a:solidFill>
           <a:ln/>
         </p:spPr>
+        <p:txBody>
+          <a:bodyPr/>
+          <a:lstStyle/>
+          <a:p>
+            <a:endParaRPr lang="en-KE"/>
+          </a:p>
+        </p:txBody>
       </p:sp>
       <p:sp>
         <p:nvSpPr>
@@ -24433,7 +25103,7 @@
           </a:bodyPr>
           <a:lstStyle/>
           <a:p>
-            <a:pPr algn="l" indent="0" marL="0">
+            <a:pPr marL="0" indent="0" algn="l">
               <a:lnSpc>
                 <a:spcPts val="1820"/>
               </a:lnSpc>
@@ -24477,7 +25147,7 @@
           </a:bodyPr>
           <a:lstStyle/>
           <a:p>
-            <a:pPr algn="l" indent="0" marL="0">
+            <a:pPr marL="0" indent="0" algn="l">
               <a:lnSpc>
                 <a:spcPts val="1680"/>
               </a:lnSpc>
@@ -24521,7 +25191,7 @@
           </a:bodyPr>
           <a:lstStyle/>
           <a:p>
-            <a:pPr algn="l" indent="0" marL="0">
+            <a:pPr marL="0" indent="0" algn="l">
               <a:lnSpc>
                 <a:spcPts val="1560"/>
               </a:lnSpc>
@@ -24565,7 +25235,7 @@
           </a:bodyPr>
           <a:lstStyle/>
           <a:p>
-            <a:pPr algn="l" indent="0" marL="0">
+            <a:pPr marL="0" indent="0" algn="l">
               <a:lnSpc>
                 <a:spcPts val="1560"/>
               </a:lnSpc>
@@ -24609,7 +25279,7 @@
           </a:bodyPr>
           <a:lstStyle/>
           <a:p>
-            <a:pPr algn="l" indent="0" marL="0">
+            <a:pPr marL="0" indent="0" algn="l">
               <a:lnSpc>
                 <a:spcPts val="1560"/>
               </a:lnSpc>
@@ -24653,7 +25323,7 @@
           </a:bodyPr>
           <a:lstStyle/>
           <a:p>
-            <a:pPr algn="l" indent="0" marL="0">
+            <a:pPr marL="0" indent="0" algn="l">
               <a:lnSpc>
                 <a:spcPts val="1560"/>
               </a:lnSpc>
@@ -24676,15 +25346,15 @@
       </p:sp>
       <p:pic>
         <p:nvPicPr>
-          <p:cNvPr id="41" name="Image 3" descr="arrow-right">    </p:cNvPr>
+          <p:cNvPr id="41" name="Image 3" descr="arrow-right"/>
           <p:cNvPicPr>
             <a:picLocks noChangeAspect="1"/>
           </p:cNvPicPr>
           <p:nvPr/>
         </p:nvPicPr>
         <p:blipFill>
-          <a:blip r:embed="rId4"/>
-          <a:srcRect l="0" r="0" t="0" b="0"/>
+          <a:blip r:embed="rId3"/>
+          <a:srcRect/>
           <a:stretch/>
         </p:blipFill>
         <p:spPr>
@@ -24718,6 +25388,13 @@
           </a:solidFill>
           <a:ln/>
         </p:spPr>
+        <p:txBody>
+          <a:bodyPr/>
+          <a:lstStyle/>
+          <a:p>
+            <a:endParaRPr lang="en-KE"/>
+          </a:p>
+        </p:txBody>
       </p:sp>
       <p:sp>
         <p:nvSpPr>
@@ -24744,11 +25421,11 @@
                 <a:lnTo>
                   <a:pt x="0" y="50800"/>
                 </a:lnTo>
-                <a:arcTo hR="50800" wR="50800" stAng="10800000" swAng="5400000"/>
+                <a:arcTo wR="50800" hR="50800" stAng="10800000" swAng="5400000"/>
                 <a:lnTo>
                   <a:pt x="1818630" y="0"/>
                 </a:lnTo>
-                <a:arcTo hR="50800" wR="50800" stAng="16200000" swAng="5400000"/>
+                <a:arcTo wR="50800" hR="50800" stAng="16200000" swAng="5400000"/>
                 <a:lnTo>
                   <a:pt x="1869430" y="50800"/>
                 </a:lnTo>
@@ -24764,6 +25441,13 @@
           </a:solidFill>
           <a:ln/>
         </p:spPr>
+        <p:txBody>
+          <a:bodyPr/>
+          <a:lstStyle/>
+          <a:p>
+            <a:endParaRPr lang="en-KE"/>
+          </a:p>
+        </p:txBody>
       </p:sp>
       <p:sp>
         <p:nvSpPr>
@@ -24788,7 +25472,7 @@
           </a:bodyPr>
           <a:lstStyle/>
           <a:p>
-            <a:pPr algn="l" indent="0" marL="0">
+            <a:pPr marL="0" indent="0" algn="l">
               <a:lnSpc>
                 <a:spcPts val="1820"/>
               </a:lnSpc>
@@ -24832,7 +25516,7 @@
           </a:bodyPr>
           <a:lstStyle/>
           <a:p>
-            <a:pPr algn="l" indent="0" marL="0">
+            <a:pPr marL="0" indent="0" algn="l">
               <a:lnSpc>
                 <a:spcPts val="1680"/>
               </a:lnSpc>
@@ -24876,7 +25560,7 @@
           </a:bodyPr>
           <a:lstStyle/>
           <a:p>
-            <a:pPr algn="l" indent="0" marL="0">
+            <a:pPr marL="0" indent="0" algn="l">
               <a:lnSpc>
                 <a:spcPts val="1560"/>
               </a:lnSpc>
@@ -24920,7 +25604,7 @@
           </a:bodyPr>
           <a:lstStyle/>
           <a:p>
-            <a:pPr algn="l" indent="0" marL="0">
+            <a:pPr marL="0" indent="0" algn="l">
               <a:lnSpc>
                 <a:spcPts val="1560"/>
               </a:lnSpc>
@@ -24971,7 +25655,7 @@
           </a:bodyPr>
           <a:lstStyle/>
           <a:p>
-            <a:pPr algn="l" indent="0" marL="0">
+            <a:pPr marL="0" indent="0" algn="l">
               <a:lnSpc>
                 <a:spcPts val="1560"/>
               </a:lnSpc>
@@ -25033,7 +25717,7 @@
           </a:bodyPr>
           <a:lstStyle/>
           <a:p>
-            <a:pPr algn="l" indent="0" marL="0">
+            <a:pPr marL="0" indent="0" algn="l">
               <a:lnSpc>
                 <a:spcPts val="1560"/>
               </a:lnSpc>
@@ -25067,15 +25751,15 @@
       </p:sp>
       <p:pic>
         <p:nvPicPr>
-          <p:cNvPr id="50" name="Image 4" descr="ILRI and CGIAR logos">    </p:cNvPr>
+          <p:cNvPr id="50" name="Image 4" descr="ILRI and CGIAR logos"/>
           <p:cNvPicPr>
             <a:picLocks noChangeAspect="1"/>
           </p:cNvPicPr>
           <p:nvPr/>
         </p:nvPicPr>
         <p:blipFill>
-          <a:blip r:embed="rId5"/>
-          <a:srcRect l="-56" r="-56" t="0" b="0"/>
+          <a:blip r:embed="rId4"/>
+          <a:srcRect l="-56" r="-56"/>
           <a:stretch/>
         </p:blipFill>
         <p:spPr>
@@ -25111,7 +25795,7 @@
           </a:bodyPr>
           <a:lstStyle/>
           <a:p>
-            <a:pPr algn="l" indent="0" marL="0">
+            <a:pPr marL="0" indent="0" algn="l">
               <a:lnSpc>
                 <a:spcPts val="1680"/>
               </a:lnSpc>
@@ -25155,7 +25839,7 @@
           </a:bodyPr>
           <a:lstStyle/>
           <a:p>
-            <a:pPr algn="r" indent="0" marL="0">
+            <a:pPr marL="0" indent="0" algn="r">
               <a:lnSpc>
                 <a:spcPts val="1680"/>
               </a:lnSpc>
@@ -25192,6 +25876,7 @@
         <a:solidFill>
           <a:srgbClr val="F9F2EA"/>
         </a:solidFill>
+        <a:effectLst/>
       </p:bgPr>
     </p:bg>
     <p:spTree>
@@ -25211,7 +25896,9 @@
       <p:sp>
         <p:nvSpPr>
           <p:cNvPr id="2" name="Text 0"/>
-          <p:cNvSpPr/>
+          <p:cNvSpPr>
+            <a:spLocks noGrp="1"/>
+          </p:cNvSpPr>
           <p:nvPr>
             <p:ph type="title"/>
           </p:nvPr>
@@ -25233,7 +25920,7 @@
           </a:bodyPr>
           <a:lstStyle/>
           <a:p>
-            <a:pPr algn="l" indent="0" marL="0">
+            <a:pPr marL="0" indent="0" algn="l">
               <a:lnSpc>
                 <a:spcPts val="3960"/>
               </a:lnSpc>
@@ -25275,6 +25962,13 @@
           </a:solidFill>
           <a:ln/>
         </p:spPr>
+        <p:txBody>
+          <a:bodyPr/>
+          <a:lstStyle/>
+          <a:p>
+            <a:endParaRPr lang="en-KE"/>
+          </a:p>
+        </p:txBody>
       </p:sp>
       <p:sp>
         <p:nvSpPr>
@@ -25303,7 +25997,7 @@
           </a:bodyPr>
           <a:lstStyle/>
           <a:p>
-            <a:pPr algn="l" indent="0" marL="0">
+            <a:pPr marL="0" indent="0" algn="l">
               <a:lnSpc>
                 <a:spcPts val="1680"/>
               </a:lnSpc>
@@ -25323,7 +26017,7 @@
             <a:endParaRPr lang="en-US" sz="1200" dirty="0"/>
           </a:p>
           <a:p>
-            <a:pPr algn="l" indent="0" marL="0">
+            <a:pPr marL="0" indent="0" algn="l">
               <a:lnSpc>
                 <a:spcPts val="1680"/>
               </a:lnSpc>
@@ -25354,7 +26048,7 @@
             <a:endParaRPr lang="en-US" sz="1200" dirty="0"/>
           </a:p>
           <a:p>
-            <a:pPr algn="l" indent="0" marL="0">
+            <a:pPr marL="0" indent="0" algn="l">
               <a:lnSpc>
                 <a:spcPts val="1680"/>
               </a:lnSpc>
@@ -25385,7 +26079,7 @@
             <a:endParaRPr lang="en-US" sz="1200" dirty="0"/>
           </a:p>
           <a:p>
-            <a:pPr algn="l" indent="0" marL="0">
+            <a:pPr marL="0" indent="0" algn="l">
               <a:lnSpc>
                 <a:spcPts val="1680"/>
               </a:lnSpc>
@@ -25416,7 +26110,7 @@
             <a:endParaRPr lang="en-US" sz="1200" dirty="0"/>
           </a:p>
           <a:p>
-            <a:pPr algn="l" indent="0" marL="0">
+            <a:pPr marL="0" indent="0" algn="l">
               <a:lnSpc>
                 <a:spcPts val="1680"/>
               </a:lnSpc>
@@ -25447,7 +26141,7 @@
             <a:endParaRPr lang="en-US" sz="1200" dirty="0"/>
           </a:p>
           <a:p>
-            <a:pPr algn="l" indent="0" marL="0">
+            <a:pPr marL="0" indent="0" algn="l">
               <a:lnSpc>
                 <a:spcPts val="1680"/>
               </a:lnSpc>
@@ -25467,7 +26161,7 @@
             <a:endParaRPr lang="en-US" sz="1200" dirty="0"/>
           </a:p>
           <a:p>
-            <a:pPr algn="l" indent="0" marL="0">
+            <a:pPr marL="0" indent="0" algn="l">
               <a:lnSpc>
                 <a:spcPts val="1680"/>
               </a:lnSpc>
@@ -25487,7 +26181,7 @@
             <a:endParaRPr lang="en-US" sz="1200" dirty="0"/>
           </a:p>
           <a:p>
-            <a:pPr algn="l" indent="0" marL="0">
+            <a:pPr marL="0" indent="0" algn="l">
               <a:lnSpc>
                 <a:spcPts val="1680"/>
               </a:lnSpc>
@@ -25507,7 +26201,7 @@
             <a:endParaRPr lang="en-US" sz="1200" dirty="0"/>
           </a:p>
           <a:p>
-            <a:pPr algn="l" indent="0" marL="0">
+            <a:pPr marL="0" indent="0" algn="l">
               <a:lnSpc>
                 <a:spcPts val="1680"/>
               </a:lnSpc>
@@ -25527,7 +26221,7 @@
             <a:endParaRPr lang="en-US" sz="1200" dirty="0"/>
           </a:p>
           <a:p>
-            <a:pPr algn="l" indent="0" marL="0">
+            <a:pPr marL="0" indent="0" algn="l">
               <a:lnSpc>
                 <a:spcPts val="1680"/>
               </a:lnSpc>
@@ -25558,7 +26252,7 @@
             <a:endParaRPr lang="en-US" sz="1200" dirty="0"/>
           </a:p>
           <a:p>
-            <a:pPr algn="l" indent="0" marL="0">
+            <a:pPr marL="0" indent="0" algn="l">
               <a:lnSpc>
                 <a:spcPts val="1680"/>
               </a:lnSpc>
@@ -25612,6 +26306,13 @@
             <a:prstDash val="solid"/>
           </a:ln>
         </p:spPr>
+        <p:txBody>
+          <a:bodyPr/>
+          <a:lstStyle/>
+          <a:p>
+            <a:endParaRPr lang="en-KE"/>
+          </a:p>
+        </p:txBody>
       </p:sp>
       <p:sp>
         <p:nvSpPr>
@@ -25636,7 +26337,7 @@
           </a:bodyPr>
           <a:lstStyle/>
           <a:p>
-            <a:pPr algn="l" indent="0" marL="0">
+            <a:pPr marL="0" indent="0" algn="l">
               <a:lnSpc>
                 <a:spcPts val="1800"/>
               </a:lnSpc>
@@ -25680,7 +26381,7 @@
           </a:bodyPr>
           <a:lstStyle/>
           <a:p>
-            <a:pPr algn="l" indent="0" marL="0">
+            <a:pPr marL="0" indent="0" algn="l">
               <a:lnSpc>
                 <a:spcPts val="1755"/>
               </a:lnSpc>
@@ -25778,6 +26479,13 @@
             <a:prstDash val="solid"/>
           </a:ln>
         </p:spPr>
+        <p:txBody>
+          <a:bodyPr/>
+          <a:lstStyle/>
+          <a:p>
+            <a:endParaRPr lang="en-KE"/>
+          </a:p>
+        </p:txBody>
       </p:sp>
       <p:sp>
         <p:nvSpPr>
@@ -25802,7 +26510,7 @@
           </a:bodyPr>
           <a:lstStyle/>
           <a:p>
-            <a:pPr algn="l" indent="0" marL="0">
+            <a:pPr marL="0" indent="0" algn="l">
               <a:lnSpc>
                 <a:spcPts val="1800"/>
               </a:lnSpc>
@@ -25846,7 +26554,7 @@
           </a:bodyPr>
           <a:lstStyle/>
           <a:p>
-            <a:pPr algn="l" indent="0" marL="0">
+            <a:pPr marL="0" indent="0" algn="l">
               <a:lnSpc>
                 <a:spcPts val="1755"/>
               </a:lnSpc>
@@ -25889,6 +26597,13 @@
             <a:prstDash val="solid"/>
           </a:ln>
         </p:spPr>
+        <p:txBody>
+          <a:bodyPr/>
+          <a:lstStyle/>
+          <a:p>
+            <a:endParaRPr lang="en-KE"/>
+          </a:p>
+        </p:txBody>
       </p:sp>
       <p:sp>
         <p:nvSpPr>
@@ -25913,7 +26628,7 @@
           </a:bodyPr>
           <a:lstStyle/>
           <a:p>
-            <a:pPr algn="l" indent="0" marL="0">
+            <a:pPr marL="0" indent="0" algn="l">
               <a:lnSpc>
                 <a:spcPts val="1800"/>
               </a:lnSpc>
@@ -25957,7 +26672,7 @@
           </a:bodyPr>
           <a:lstStyle/>
           <a:p>
-            <a:pPr algn="l" indent="0" marL="0">
+            <a:pPr marL="0" indent="0" algn="l">
               <a:lnSpc>
                 <a:spcPts val="1755"/>
               </a:lnSpc>
@@ -26024,15 +26739,15 @@
       </p:sp>
       <p:pic>
         <p:nvPicPr>
-          <p:cNvPr id="14" name="Image 0" descr="ILRI and CGIAR logos">    </p:cNvPr>
+          <p:cNvPr id="14" name="Image 0" descr="ILRI and CGIAR logos"/>
           <p:cNvPicPr>
             <a:picLocks noChangeAspect="1"/>
           </p:cNvPicPr>
           <p:nvPr/>
         </p:nvPicPr>
         <p:blipFill>
-          <a:blip r:embed="rId1"/>
-          <a:srcRect l="-56" r="-56" t="0" b="0"/>
+          <a:blip r:embed="rId3"/>
+          <a:srcRect l="-56" r="-56"/>
           <a:stretch/>
         </p:blipFill>
         <p:spPr>
@@ -26068,7 +26783,7 @@
           </a:bodyPr>
           <a:lstStyle/>
           <a:p>
-            <a:pPr algn="l" indent="0" marL="0">
+            <a:pPr marL="0" indent="0" algn="l">
               <a:lnSpc>
                 <a:spcPts val="1680"/>
               </a:lnSpc>
@@ -26112,7 +26827,7 @@
           </a:bodyPr>
           <a:lstStyle/>
           <a:p>
-            <a:pPr algn="r" indent="0" marL="0">
+            <a:pPr marL="0" indent="0" algn="r">
               <a:lnSpc>
                 <a:spcPts val="1680"/>
               </a:lnSpc>
@@ -26149,6 +26864,7 @@
         <a:solidFill>
           <a:srgbClr val="F9F2EA"/>
         </a:solidFill>
+        <a:effectLst/>
       </p:bgPr>
     </p:bg>
     <p:spTree>
@@ -26168,7 +26884,9 @@
       <p:sp>
         <p:nvSpPr>
           <p:cNvPr id="2" name="Text 0"/>
-          <p:cNvSpPr/>
+          <p:cNvSpPr>
+            <a:spLocks noGrp="1"/>
+          </p:cNvSpPr>
           <p:nvPr>
             <p:ph type="title"/>
           </p:nvPr>
@@ -26190,7 +26908,7 @@
           </a:bodyPr>
           <a:lstStyle/>
           <a:p>
-            <a:pPr algn="l" indent="0" marL="0">
+            <a:pPr marL="0" indent="0" algn="l">
               <a:lnSpc>
                 <a:spcPts val="3960"/>
               </a:lnSpc>
@@ -26232,6 +26950,13 @@
           </a:solidFill>
           <a:ln/>
         </p:spPr>
+        <p:txBody>
+          <a:bodyPr/>
+          <a:lstStyle/>
+          <a:p>
+            <a:endParaRPr lang="en-KE"/>
+          </a:p>
+        </p:txBody>
       </p:sp>
       <p:sp>
         <p:nvSpPr>
@@ -26256,7 +26981,7 @@
           </a:bodyPr>
           <a:lstStyle/>
           <a:p>
-            <a:pPr algn="l" indent="0" marL="0">
+            <a:pPr marL="0" indent="0" algn="l">
               <a:lnSpc>
                 <a:spcPts val="2025"/>
               </a:lnSpc>
@@ -26366,8 +27091,20 @@
             <a:tbl>
               <a:tblPr/>
               <a:tblGrid>
-                <a:gridCol w="3166110"/>
-                <a:gridCol w="7387590"/>
+                <a:gridCol w="3166110">
+                  <a:extLst>
+                    <a:ext uri="{9D8B030D-6E8A-4147-A177-3AD203B41FA5}">
+                      <a16:colId xmlns:a16="http://schemas.microsoft.com/office/drawing/2014/main" val="20000"/>
+                    </a:ext>
+                  </a:extLst>
+                </a:gridCol>
+                <a:gridCol w="7387590">
+                  <a:extLst>
+                    <a:ext uri="{9D8B030D-6E8A-4147-A177-3AD203B41FA5}">
+                      <a16:colId xmlns:a16="http://schemas.microsoft.com/office/drawing/2014/main" val="20001"/>
+                    </a:ext>
+                  </a:extLst>
+                </a:gridCol>
               </a:tblGrid>
               <a:tr h="412750">
                 <a:tc>
@@ -26375,7 +27112,7 @@
                     <a:bodyPr/>
                     <a:lstStyle/>
                     <a:p>
-                      <a:pPr indent="0" marL="0">
+                      <a:pPr marL="0" indent="0">
                         <a:lnSpc>
                           <a:spcPts val="2100"/>
                         </a:lnSpc>
@@ -26399,7 +27136,7 @@
                       </a:endParaRPr>
                     </a:p>
                   </a:txBody>
-                  <a:tcPr marL="66675" marR="66675" marT="66675" marB="66675" anchor="t">
+                  <a:tcPr marL="66675" marR="66675" marT="66675" marB="66675">
                     <a:lnL w="12700" cap="flat" cmpd="sng" algn="ctr">
                       <a:solidFill>
                         <a:srgbClr val="C7C1BB"/>
@@ -26446,7 +27183,7 @@
                     <a:bodyPr/>
                     <a:lstStyle/>
                     <a:p>
-                      <a:pPr indent="0" marL="0">
+                      <a:pPr marL="0" indent="0">
                         <a:lnSpc>
                           <a:spcPts val="2100"/>
                         </a:lnSpc>
@@ -26470,7 +27207,7 @@
                       </a:endParaRPr>
                     </a:p>
                   </a:txBody>
-                  <a:tcPr marL="66675" marR="66675" marT="66675" marB="66675" anchor="t">
+                  <a:tcPr marL="66675" marR="66675" marT="66675" marB="66675">
                     <a:lnL w="12700" cap="flat" cmpd="sng" algn="ctr">
                       <a:solidFill>
                         <a:srgbClr val="B9B3AD"/>
@@ -26512,6 +27249,11 @@
                     </a:solidFill>
                   </a:tcPr>
                 </a:tc>
+                <a:extLst>
+                  <a:ext uri="{0D108BD9-81ED-4DB2-BD59-A6C34878D82A}">
+                    <a16:rowId xmlns:a16="http://schemas.microsoft.com/office/drawing/2014/main" val="10000"/>
+                  </a:ext>
+                </a:extLst>
               </a:tr>
               <a:tr h="412750">
                 <a:tc>
@@ -26519,7 +27261,7 @@
                     <a:bodyPr/>
                     <a:lstStyle/>
                     <a:p>
-                      <a:pPr indent="0" marL="0">
+                      <a:pPr marL="0" indent="0">
                         <a:lnSpc>
                           <a:spcPts val="2100"/>
                         </a:lnSpc>
@@ -26543,7 +27285,7 @@
                       </a:endParaRPr>
                     </a:p>
                   </a:txBody>
-                  <a:tcPr marL="66675" marR="66675" marT="66675" marB="66675" anchor="t">
+                  <a:tcPr marL="66675" marR="66675" marT="66675" marB="66675">
                     <a:lnL w="12700" cap="flat" cmpd="sng" algn="ctr">
                       <a:solidFill>
                         <a:srgbClr val="C7C1BB"/>
@@ -26587,7 +27329,7 @@
                     <a:bodyPr/>
                     <a:lstStyle/>
                     <a:p>
-                      <a:pPr indent="0" marL="0">
+                      <a:pPr marL="0" indent="0">
                         <a:lnSpc>
                           <a:spcPts val="2100"/>
                         </a:lnSpc>
@@ -26611,7 +27353,7 @@
                       </a:endParaRPr>
                     </a:p>
                   </a:txBody>
-                  <a:tcPr marL="66675" marR="66675" marT="66675" marB="66675" anchor="t">
+                  <a:tcPr marL="66675" marR="66675" marT="66675" marB="66675">
                     <a:lnL w="12700" cap="flat" cmpd="sng" algn="ctr">
                       <a:solidFill>
                         <a:srgbClr val="C7C1BB"/>
@@ -26650,6 +27392,11 @@
                     </a:lnB>
                   </a:tcPr>
                 </a:tc>
+                <a:extLst>
+                  <a:ext uri="{0D108BD9-81ED-4DB2-BD59-A6C34878D82A}">
+                    <a16:rowId xmlns:a16="http://schemas.microsoft.com/office/drawing/2014/main" val="10001"/>
+                  </a:ext>
+                </a:extLst>
               </a:tr>
               <a:tr h="679450">
                 <a:tc>
@@ -26657,7 +27404,7 @@
                     <a:bodyPr/>
                     <a:lstStyle/>
                     <a:p>
-                      <a:pPr indent="0" marL="0">
+                      <a:pPr marL="0" indent="0">
                         <a:lnSpc>
                           <a:spcPts val="2100"/>
                         </a:lnSpc>
@@ -26681,7 +27428,7 @@
                       </a:endParaRPr>
                     </a:p>
                   </a:txBody>
-                  <a:tcPr marL="66675" marR="66675" marT="66675" marB="66675" anchor="t">
+                  <a:tcPr marL="66675" marR="66675" marT="66675" marB="66675">
                     <a:lnL w="12700" cap="flat" cmpd="sng" algn="ctr">
                       <a:solidFill>
                         <a:srgbClr val="C7C1BB"/>
@@ -26728,7 +27475,7 @@
                     <a:bodyPr/>
                     <a:lstStyle/>
                     <a:p>
-                      <a:pPr indent="0" marL="0">
+                      <a:pPr marL="0" indent="0">
                         <a:lnSpc>
                           <a:spcPts val="2100"/>
                         </a:lnSpc>
@@ -26752,7 +27499,7 @@
                       </a:endParaRPr>
                     </a:p>
                   </a:txBody>
-                  <a:tcPr marL="66675" marR="66675" marT="66675" marB="66675" anchor="t">
+                  <a:tcPr marL="66675" marR="66675" marT="66675" marB="66675">
                     <a:lnL w="12700" cap="flat" cmpd="sng" algn="ctr">
                       <a:solidFill>
                         <a:srgbClr val="C0B8AE"/>
@@ -26794,6 +27541,11 @@
                     </a:solidFill>
                   </a:tcPr>
                 </a:tc>
+                <a:extLst>
+                  <a:ext uri="{0D108BD9-81ED-4DB2-BD59-A6C34878D82A}">
+                    <a16:rowId xmlns:a16="http://schemas.microsoft.com/office/drawing/2014/main" val="10002"/>
+                  </a:ext>
+                </a:extLst>
               </a:tr>
             </a:tbl>
           </a:graphicData>
@@ -26826,7 +27578,7 @@
           </a:bodyPr>
           <a:lstStyle/>
           <a:p>
-            <a:pPr algn="l" indent="0" marL="0">
+            <a:pPr marL="0" indent="0" algn="l">
               <a:lnSpc>
                 <a:spcPts val="1680"/>
               </a:lnSpc>
@@ -26846,7 +27598,7 @@
             <a:endParaRPr lang="en-US" sz="1200" dirty="0"/>
           </a:p>
           <a:p>
-            <a:pPr algn="l" indent="0" marL="0">
+            <a:pPr marL="0" indent="0" algn="l">
               <a:lnSpc>
                 <a:spcPts val="1680"/>
               </a:lnSpc>
@@ -26880,15 +27632,15 @@
       </p:sp>
       <p:pic>
         <p:nvPicPr>
-          <p:cNvPr id="7" name="Image 0" descr="ILRI and CGIAR logos">    </p:cNvPr>
+          <p:cNvPr id="7" name="Image 0" descr="ILRI and CGIAR logos"/>
           <p:cNvPicPr>
             <a:picLocks noChangeAspect="1"/>
           </p:cNvPicPr>
           <p:nvPr/>
         </p:nvPicPr>
         <p:blipFill>
-          <a:blip r:embed="rId1"/>
-          <a:srcRect l="-56" r="-56" t="0" b="0"/>
+          <a:blip r:embed="rId3"/>
+          <a:srcRect l="-56" r="-56"/>
           <a:stretch/>
         </p:blipFill>
         <p:spPr>
@@ -26924,7 +27676,7 @@
           </a:bodyPr>
           <a:lstStyle/>
           <a:p>
-            <a:pPr algn="l" indent="0" marL="0">
+            <a:pPr marL="0" indent="0" algn="l">
               <a:lnSpc>
                 <a:spcPts val="1680"/>
               </a:lnSpc>
@@ -26968,7 +27720,7 @@
           </a:bodyPr>
           <a:lstStyle/>
           <a:p>
-            <a:pPr algn="r" indent="0" marL="0">
+            <a:pPr marL="0" indent="0" algn="r">
               <a:lnSpc>
                 <a:spcPts val="1680"/>
               </a:lnSpc>
@@ -27005,6 +27757,7 @@
         <a:solidFill>
           <a:srgbClr val="F9F2EA"/>
         </a:solidFill>
+        <a:effectLst/>
       </p:bgPr>
     </p:bg>
     <p:spTree>
@@ -27024,7 +27777,9 @@
       <p:sp>
         <p:nvSpPr>
           <p:cNvPr id="2" name="Text 0"/>
-          <p:cNvSpPr/>
+          <p:cNvSpPr>
+            <a:spLocks noGrp="1"/>
+          </p:cNvSpPr>
           <p:nvPr>
             <p:ph type="title"/>
           </p:nvPr>
@@ -27046,7 +27801,7 @@
           </a:bodyPr>
           <a:lstStyle/>
           <a:p>
-            <a:pPr algn="l" indent="0" marL="0">
+            <a:pPr marL="0" indent="0" algn="l">
               <a:lnSpc>
                 <a:spcPts val="3960"/>
               </a:lnSpc>
@@ -27088,6 +27843,13 @@
           </a:solidFill>
           <a:ln/>
         </p:spPr>
+        <p:txBody>
+          <a:bodyPr/>
+          <a:lstStyle/>
+          <a:p>
+            <a:endParaRPr lang="en-KE"/>
+          </a:p>
+        </p:txBody>
       </p:sp>
       <p:sp>
         <p:nvSpPr>
@@ -27116,7 +27878,7 @@
           </a:bodyPr>
           <a:lstStyle/>
           <a:p>
-            <a:pPr algn="l" indent="0" marL="0">
+            <a:pPr marL="0" indent="0" algn="l">
               <a:lnSpc>
                 <a:spcPts val="1680"/>
               </a:lnSpc>
@@ -27136,7 +27898,7 @@
             <a:endParaRPr lang="en-US" sz="1200" dirty="0"/>
           </a:p>
           <a:p>
-            <a:pPr algn="l" indent="0" marL="0">
+            <a:pPr marL="0" indent="0" algn="l">
               <a:lnSpc>
                 <a:spcPts val="1680"/>
               </a:lnSpc>
@@ -27156,7 +27918,7 @@
             <a:endParaRPr lang="en-US" sz="1200" dirty="0"/>
           </a:p>
           <a:p>
-            <a:pPr algn="l" indent="0" marL="0">
+            <a:pPr marL="0" indent="0" algn="l">
               <a:lnSpc>
                 <a:spcPts val="1680"/>
               </a:lnSpc>
@@ -27176,7 +27938,7 @@
             <a:endParaRPr lang="en-US" sz="1200" dirty="0"/>
           </a:p>
           <a:p>
-            <a:pPr algn="l" indent="0" marL="0">
+            <a:pPr marL="0" indent="0" algn="l">
               <a:lnSpc>
                 <a:spcPts val="1680"/>
               </a:lnSpc>
@@ -27196,7 +27958,7 @@
             <a:endParaRPr lang="en-US" sz="1200" dirty="0"/>
           </a:p>
           <a:p>
-            <a:pPr algn="l" indent="0" marL="0">
+            <a:pPr marL="0" indent="0" algn="l">
               <a:lnSpc>
                 <a:spcPts val="1680"/>
               </a:lnSpc>
@@ -27205,7 +27967,7 @@
             <a:endParaRPr lang="en-US" sz="1200" dirty="0"/>
           </a:p>
           <a:p>
-            <a:pPr algn="l" indent="0" marL="0">
+            <a:pPr marL="0" indent="0" algn="l">
               <a:lnSpc>
                 <a:spcPts val="1680"/>
               </a:lnSpc>
@@ -27225,7 +27987,7 @@
             <a:endParaRPr lang="en-US" sz="1200" dirty="0"/>
           </a:p>
           <a:p>
-            <a:pPr algn="l" indent="0" marL="0">
+            <a:pPr marL="0" indent="0" algn="l">
               <a:lnSpc>
                 <a:spcPts val="1680"/>
               </a:lnSpc>
@@ -27267,6 +28029,13 @@
           </a:solidFill>
           <a:ln/>
         </p:spPr>
+        <p:txBody>
+          <a:bodyPr/>
+          <a:lstStyle/>
+          <a:p>
+            <a:endParaRPr lang="en-KE"/>
+          </a:p>
+        </p:txBody>
       </p:sp>
       <p:sp>
         <p:nvSpPr>
@@ -27293,11 +28062,11 @@
                 <a:lnTo>
                   <a:pt x="50800" y="1014611"/>
                 </a:lnTo>
-                <a:arcTo hR="50800" wR="50800" stAng="5400000" swAng="5400000"/>
+                <a:arcTo wR="50800" hR="50800" stAng="5400000" swAng="5400000"/>
                 <a:lnTo>
                   <a:pt x="0" y="50800"/>
                 </a:lnTo>
-                <a:arcTo hR="50800" wR="50800" stAng="10800000" swAng="5400000"/>
+                <a:arcTo wR="50800" hR="50800" stAng="10800000" swAng="5400000"/>
                 <a:lnTo>
                   <a:pt x="50800" y="0"/>
                 </a:lnTo>
@@ -27313,6 +28082,13 @@
           </a:solidFill>
           <a:ln/>
         </p:spPr>
+        <p:txBody>
+          <a:bodyPr/>
+          <a:lstStyle/>
+          <a:p>
+            <a:endParaRPr lang="en-KE"/>
+          </a:p>
+        </p:txBody>
       </p:sp>
       <p:sp>
         <p:nvSpPr>
@@ -27337,7 +28113,7 @@
           </a:bodyPr>
           <a:lstStyle/>
           <a:p>
-            <a:pPr algn="l" indent="0" marL="0">
+            <a:pPr marL="0" indent="0" algn="l">
               <a:lnSpc>
                 <a:spcPts val="1680"/>
               </a:lnSpc>
@@ -27381,7 +28157,7 @@
           </a:bodyPr>
           <a:lstStyle/>
           <a:p>
-            <a:pPr algn="l" indent="0" marL="0">
+            <a:pPr marL="0" indent="0" algn="l">
               <a:lnSpc>
                 <a:spcPts val="1755"/>
               </a:lnSpc>
@@ -27423,6 +28199,13 @@
           </a:solidFill>
           <a:ln/>
         </p:spPr>
+        <p:txBody>
+          <a:bodyPr/>
+          <a:lstStyle/>
+          <a:p>
+            <a:endParaRPr lang="en-KE"/>
+          </a:p>
+        </p:txBody>
       </p:sp>
       <p:sp>
         <p:nvSpPr>
@@ -27449,11 +28232,11 @@
                 <a:lnTo>
                   <a:pt x="50800" y="1014611"/>
                 </a:lnTo>
-                <a:arcTo hR="50800" wR="50800" stAng="5400000" swAng="5400000"/>
+                <a:arcTo wR="50800" hR="50800" stAng="5400000" swAng="5400000"/>
                 <a:lnTo>
                   <a:pt x="0" y="50800"/>
                 </a:lnTo>
-                <a:arcTo hR="50800" wR="50800" stAng="10800000" swAng="5400000"/>
+                <a:arcTo wR="50800" hR="50800" stAng="10800000" swAng="5400000"/>
                 <a:lnTo>
                   <a:pt x="50800" y="0"/>
                 </a:lnTo>
@@ -27469,6 +28252,13 @@
           </a:solidFill>
           <a:ln/>
         </p:spPr>
+        <p:txBody>
+          <a:bodyPr/>
+          <a:lstStyle/>
+          <a:p>
+            <a:endParaRPr lang="en-KE"/>
+          </a:p>
+        </p:txBody>
       </p:sp>
       <p:sp>
         <p:nvSpPr>
@@ -27493,7 +28283,7 @@
           </a:bodyPr>
           <a:lstStyle/>
           <a:p>
-            <a:pPr algn="l" indent="0" marL="0">
+            <a:pPr marL="0" indent="0" algn="l">
               <a:lnSpc>
                 <a:spcPts val="1680"/>
               </a:lnSpc>
@@ -27537,7 +28327,7 @@
           </a:bodyPr>
           <a:lstStyle/>
           <a:p>
-            <a:pPr algn="l" indent="0" marL="0">
+            <a:pPr marL="0" indent="0" algn="l">
               <a:lnSpc>
                 <a:spcPts val="1755"/>
               </a:lnSpc>
@@ -27579,6 +28369,13 @@
           </a:solidFill>
           <a:ln/>
         </p:spPr>
+        <p:txBody>
+          <a:bodyPr/>
+          <a:lstStyle/>
+          <a:p>
+            <a:endParaRPr lang="en-KE"/>
+          </a:p>
+        </p:txBody>
       </p:sp>
       <p:sp>
         <p:nvSpPr>
@@ -27605,11 +28402,11 @@
                 <a:lnTo>
                   <a:pt x="50800" y="1014611"/>
                 </a:lnTo>
-                <a:arcTo hR="50800" wR="50800" stAng="5400000" swAng="5400000"/>
+                <a:arcTo wR="50800" hR="50800" stAng="5400000" swAng="5400000"/>
                 <a:lnTo>
                   <a:pt x="0" y="50800"/>
                 </a:lnTo>
-                <a:arcTo hR="50800" wR="50800" stAng="10800000" swAng="5400000"/>
+                <a:arcTo wR="50800" hR="50800" stAng="10800000" swAng="5400000"/>
                 <a:lnTo>
                   <a:pt x="50800" y="0"/>
                 </a:lnTo>
@@ -27625,6 +28422,13 @@
           </a:solidFill>
           <a:ln/>
         </p:spPr>
+        <p:txBody>
+          <a:bodyPr/>
+          <a:lstStyle/>
+          <a:p>
+            <a:endParaRPr lang="en-KE"/>
+          </a:p>
+        </p:txBody>
       </p:sp>
       <p:sp>
         <p:nvSpPr>
@@ -27649,7 +28453,7 @@
           </a:bodyPr>
           <a:lstStyle/>
           <a:p>
-            <a:pPr algn="l" indent="0" marL="0">
+            <a:pPr marL="0" indent="0" algn="l">
               <a:lnSpc>
                 <a:spcPts val="1680"/>
               </a:lnSpc>
@@ -27693,7 +28497,7 @@
           </a:bodyPr>
           <a:lstStyle/>
           <a:p>
-            <a:pPr algn="l" indent="0" marL="0">
+            <a:pPr marL="0" indent="0" algn="l">
               <a:lnSpc>
                 <a:spcPts val="1755"/>
               </a:lnSpc>
@@ -27716,15 +28520,15 @@
       </p:sp>
       <p:pic>
         <p:nvPicPr>
-          <p:cNvPr id="17" name="Image 0" descr="ILRI and CGIAR logos">    </p:cNvPr>
+          <p:cNvPr id="17" name="Image 0" descr="ILRI and CGIAR logos"/>
           <p:cNvPicPr>
             <a:picLocks noChangeAspect="1"/>
           </p:cNvPicPr>
           <p:nvPr/>
         </p:nvPicPr>
         <p:blipFill>
-          <a:blip r:embed="rId1"/>
-          <a:srcRect l="-56" r="-56" t="0" b="0"/>
+          <a:blip r:embed="rId3"/>
+          <a:srcRect l="-56" r="-56"/>
           <a:stretch/>
         </p:blipFill>
         <p:spPr>
@@ -27760,7 +28564,7 @@
           </a:bodyPr>
           <a:lstStyle/>
           <a:p>
-            <a:pPr algn="l" indent="0" marL="0">
+            <a:pPr marL="0" indent="0" algn="l">
               <a:lnSpc>
                 <a:spcPts val="1680"/>
               </a:lnSpc>
@@ -27804,7 +28608,7 @@
           </a:bodyPr>
           <a:lstStyle/>
           <a:p>
-            <a:pPr algn="r" indent="0" marL="0">
+            <a:pPr marL="0" indent="0" algn="r">
               <a:lnSpc>
                 <a:spcPts val="1680"/>
               </a:lnSpc>
@@ -27841,6 +28645,7 @@
         <a:solidFill>
           <a:srgbClr val="F9F2EA"/>
         </a:solidFill>
+        <a:effectLst/>
       </p:bgPr>
     </p:bg>
     <p:spTree>
@@ -27860,7 +28665,9 @@
       <p:sp>
         <p:nvSpPr>
           <p:cNvPr id="2" name="Text 0"/>
-          <p:cNvSpPr/>
+          <p:cNvSpPr>
+            <a:spLocks noGrp="1"/>
+          </p:cNvSpPr>
           <p:nvPr>
             <p:ph type="title"/>
           </p:nvPr>
@@ -27882,7 +28689,7 @@
           </a:bodyPr>
           <a:lstStyle/>
           <a:p>
-            <a:pPr algn="l" indent="0" marL="0">
+            <a:pPr marL="0" indent="0" algn="l">
               <a:lnSpc>
                 <a:spcPts val="3960"/>
               </a:lnSpc>
@@ -27924,6 +28731,13 @@
           </a:solidFill>
           <a:ln/>
         </p:spPr>
+        <p:txBody>
+          <a:bodyPr/>
+          <a:lstStyle/>
+          <a:p>
+            <a:endParaRPr lang="en-KE"/>
+          </a:p>
+        </p:txBody>
       </p:sp>
       <p:sp>
         <p:nvSpPr>
@@ -27952,7 +28766,7 @@
           </a:bodyPr>
           <a:lstStyle/>
           <a:p>
-            <a:pPr algn="l" indent="0" marL="0">
+            <a:pPr marL="0" indent="0" algn="l">
               <a:lnSpc>
                 <a:spcPts val="1680"/>
               </a:lnSpc>
@@ -27972,7 +28786,7 @@
             <a:endParaRPr lang="en-US" sz="1200" dirty="0"/>
           </a:p>
           <a:p>
-            <a:pPr algn="l" indent="0" marL="0">
+            <a:pPr marL="0" indent="0" algn="l">
               <a:lnSpc>
                 <a:spcPts val="1680"/>
               </a:lnSpc>
@@ -27992,7 +28806,7 @@
             <a:endParaRPr lang="en-US" sz="1200" dirty="0"/>
           </a:p>
           <a:p>
-            <a:pPr algn="l" indent="0" marL="0">
+            <a:pPr marL="0" indent="0" algn="l">
               <a:lnSpc>
                 <a:spcPts val="1680"/>
               </a:lnSpc>
@@ -28012,7 +28826,7 @@
             <a:endParaRPr lang="en-US" sz="1200" dirty="0"/>
           </a:p>
           <a:p>
-            <a:pPr algn="l" indent="0" marL="0">
+            <a:pPr marL="0" indent="0" algn="l">
               <a:lnSpc>
                 <a:spcPts val="1680"/>
               </a:lnSpc>
@@ -28032,7 +28846,7 @@
             <a:endParaRPr lang="en-US" sz="1200" dirty="0"/>
           </a:p>
           <a:p>
-            <a:pPr algn="l" indent="0" marL="0">
+            <a:pPr marL="0" indent="0" algn="l">
               <a:lnSpc>
                 <a:spcPts val="1680"/>
               </a:lnSpc>
@@ -28052,7 +28866,7 @@
             <a:endParaRPr lang="en-US" sz="1200" dirty="0"/>
           </a:p>
           <a:p>
-            <a:pPr algn="l" indent="0" marL="0">
+            <a:pPr marL="0" indent="0" algn="l">
               <a:lnSpc>
                 <a:spcPts val="1680"/>
               </a:lnSpc>
@@ -28072,7 +28886,7 @@
             <a:endParaRPr lang="en-US" sz="1200" dirty="0"/>
           </a:p>
           <a:p>
-            <a:pPr algn="l" indent="0" marL="0">
+            <a:pPr marL="0" indent="0" algn="l">
               <a:lnSpc>
                 <a:spcPts val="1680"/>
               </a:lnSpc>
@@ -28092,7 +28906,7 @@
             <a:endParaRPr lang="en-US" sz="1200" dirty="0"/>
           </a:p>
           <a:p>
-            <a:pPr algn="l" indent="0" marL="0">
+            <a:pPr marL="0" indent="0" algn="l">
               <a:lnSpc>
                 <a:spcPts val="1680"/>
               </a:lnSpc>
@@ -28112,7 +28926,7 @@
             <a:endParaRPr lang="en-US" sz="1200" dirty="0"/>
           </a:p>
           <a:p>
-            <a:pPr algn="l" indent="0" marL="0">
+            <a:pPr marL="0" indent="0" algn="l">
               <a:lnSpc>
                 <a:spcPts val="1680"/>
               </a:lnSpc>
@@ -28132,7 +28946,7 @@
             <a:endParaRPr lang="en-US" sz="1200" dirty="0"/>
           </a:p>
           <a:p>
-            <a:pPr algn="l" indent="0" marL="0">
+            <a:pPr marL="0" indent="0" algn="l">
               <a:lnSpc>
                 <a:spcPts val="1680"/>
               </a:lnSpc>
@@ -28152,7 +28966,7 @@
             <a:endParaRPr lang="en-US" sz="1200" dirty="0"/>
           </a:p>
           <a:p>
-            <a:pPr algn="l" indent="0" marL="0">
+            <a:pPr marL="0" indent="0" algn="l">
               <a:lnSpc>
                 <a:spcPts val="1680"/>
               </a:lnSpc>
@@ -28195,6 +29009,13 @@
             <a:prstDash val="solid"/>
           </a:ln>
         </p:spPr>
+        <p:txBody>
+          <a:bodyPr/>
+          <a:lstStyle/>
+          <a:p>
+            <a:endParaRPr lang="en-KE"/>
+          </a:p>
+        </p:txBody>
       </p:sp>
       <p:sp>
         <p:nvSpPr>
@@ -28219,7 +29040,7 @@
           </a:bodyPr>
           <a:lstStyle/>
           <a:p>
-            <a:pPr algn="l" indent="0" marL="0">
+            <a:pPr marL="0" indent="0" algn="l">
               <a:lnSpc>
                 <a:spcPts val="2160"/>
               </a:lnSpc>
@@ -28242,15 +29063,15 @@
       </p:sp>
       <p:pic>
         <p:nvPicPr>
-          <p:cNvPr id="7" name="Image 0" descr="ILRI and CGIAR logos">    </p:cNvPr>
+          <p:cNvPr id="7" name="Image 0" descr="ILRI and CGIAR logos"/>
           <p:cNvPicPr>
             <a:picLocks noChangeAspect="1"/>
           </p:cNvPicPr>
           <p:nvPr/>
         </p:nvPicPr>
         <p:blipFill>
-          <a:blip r:embed="rId1"/>
-          <a:srcRect l="-56" r="-56" t="0" b="0"/>
+          <a:blip r:embed="rId3"/>
+          <a:srcRect l="-56" r="-56"/>
           <a:stretch/>
         </p:blipFill>
         <p:spPr>
@@ -28286,7 +29107,7 @@
           </a:bodyPr>
           <a:lstStyle/>
           <a:p>
-            <a:pPr algn="l" indent="0" marL="0">
+            <a:pPr marL="0" indent="0" algn="l">
               <a:lnSpc>
                 <a:spcPts val="1680"/>
               </a:lnSpc>
@@ -28330,7 +29151,7 @@
           </a:bodyPr>
           <a:lstStyle/>
           <a:p>
-            <a:pPr algn="r" indent="0" marL="0">
+            <a:pPr marL="0" indent="0" algn="r">
               <a:lnSpc>
                 <a:spcPts val="1680"/>
               </a:lnSpc>
@@ -28647,4 +29468,319 @@
   <a:objectDefaults/>
   <a:extraClrSchemeLst/>
 </a:theme>
+</file>
+
+<file path=ppt/theme/theme2.xml><?xml version="1.0" encoding="utf-8"?>
+<a:theme xmlns:a="http://schemas.openxmlformats.org/drawingml/2006/main" name="Office Theme">
+  <a:themeElements>
+    <a:clrScheme name="Office">
+      <a:dk1>
+        <a:sysClr val="windowText" lastClr="000000"/>
+      </a:dk1>
+      <a:lt1>
+        <a:sysClr val="window" lastClr="FFFFFF"/>
+      </a:lt1>
+      <a:dk2>
+        <a:srgbClr val="0E2841"/>
+      </a:dk2>
+      <a:lt2>
+        <a:srgbClr val="E8E8E8"/>
+      </a:lt2>
+      <a:accent1>
+        <a:srgbClr val="156082"/>
+      </a:accent1>
+      <a:accent2>
+        <a:srgbClr val="E97132"/>
+      </a:accent2>
+      <a:accent3>
+        <a:srgbClr val="196B24"/>
+      </a:accent3>
+      <a:accent4>
+        <a:srgbClr val="0F9ED5"/>
+      </a:accent4>
+      <a:accent5>
+        <a:srgbClr val="A02B93"/>
+      </a:accent5>
+      <a:accent6>
+        <a:srgbClr val="4EA72E"/>
+      </a:accent6>
+      <a:hlink>
+        <a:srgbClr val="467886"/>
+      </a:hlink>
+      <a:folHlink>
+        <a:srgbClr val="96607D"/>
+      </a:folHlink>
+    </a:clrScheme>
+    <a:fontScheme name="Office">
+      <a:majorFont>
+        <a:latin typeface="Aptos Display" panose="02110004020202020204"/>
+        <a:ea typeface=""/>
+        <a:cs typeface=""/>
+        <a:font script="Jpan" typeface="游ゴシック Light"/>
+        <a:font script="Hang" typeface="맑은 고딕"/>
+        <a:font script="Hans" typeface="等线 Light"/>
+        <a:font script="Hant" typeface="新細明體"/>
+        <a:font script="Arab" typeface="Times New Roman"/>
+        <a:font script="Hebr" typeface="Times New Roman"/>
+        <a:font script="Thai" typeface="Angsana New"/>
+        <a:font script="Ethi" typeface="Nyala"/>
+        <a:font script="Beng" typeface="Vrinda"/>
+        <a:font script="Gujr" typeface="Shruti"/>
+        <a:font script="Khmr" typeface="MoolBoran"/>
+        <a:font script="Knda" typeface="Tunga"/>
+        <a:font script="Guru" typeface="Raavi"/>
+        <a:font script="Cans" typeface="Euphemia"/>
+        <a:font script="Cher" typeface="Plantagenet Cherokee"/>
+        <a:font script="Yiii" typeface="Microsoft Yi Baiti"/>
+        <a:font script="Tibt" typeface="Microsoft Himalaya"/>
+        <a:font script="Thaa" typeface="MV Boli"/>
+        <a:font script="Deva" typeface="Mangal"/>
+        <a:font script="Telu" typeface="Gautami"/>
+        <a:font script="Taml" typeface="Latha"/>
+        <a:font script="Syrc" typeface="Estrangelo Edessa"/>
+        <a:font script="Orya" typeface="Kalinga"/>
+        <a:font script="Mlym" typeface="Kartika"/>
+        <a:font script="Laoo" typeface="DokChampa"/>
+        <a:font script="Sinh" typeface="Iskoola Pota"/>
+        <a:font script="Mong" typeface="Mongolian Baiti"/>
+        <a:font script="Viet" typeface="Times New Roman"/>
+        <a:font script="Uigh" typeface="Microsoft Uighur"/>
+        <a:font script="Geor" typeface="Sylfaen"/>
+        <a:font script="Armn" typeface="Arial"/>
+        <a:font script="Bugi" typeface="Leelawadee UI"/>
+        <a:font script="Bopo" typeface="Microsoft JhengHei"/>
+        <a:font script="Java" typeface="Javanese Text"/>
+        <a:font script="Lisu" typeface="Segoe UI"/>
+        <a:font script="Mymr" typeface="Myanmar Text"/>
+        <a:font script="Nkoo" typeface="Ebrima"/>
+        <a:font script="Olck" typeface="Nirmala UI"/>
+        <a:font script="Osma" typeface="Ebrima"/>
+        <a:font script="Phag" typeface="Phagspa"/>
+        <a:font script="Syrn" typeface="Estrangelo Edessa"/>
+        <a:font script="Syrj" typeface="Estrangelo Edessa"/>
+        <a:font script="Syre" typeface="Estrangelo Edessa"/>
+        <a:font script="Sora" typeface="Nirmala UI"/>
+        <a:font script="Tale" typeface="Microsoft Tai Le"/>
+        <a:font script="Talu" typeface="Microsoft New Tai Lue"/>
+        <a:font script="Tfng" typeface="Ebrima"/>
+      </a:majorFont>
+      <a:minorFont>
+        <a:latin typeface="Aptos" panose="02110004020202020204"/>
+        <a:ea typeface=""/>
+        <a:cs typeface=""/>
+        <a:font script="Jpan" typeface="游ゴシック"/>
+        <a:font script="Hang" typeface="맑은 고딕"/>
+        <a:font script="Hans" typeface="等线"/>
+        <a:font script="Hant" typeface="新細明體"/>
+        <a:font script="Arab" typeface="Arial"/>
+        <a:font script="Hebr" typeface="Arial"/>
+        <a:font script="Thai" typeface="Cordia New"/>
+        <a:font script="Ethi" typeface="Nyala"/>
+        <a:font script="Beng" typeface="Vrinda"/>
+        <a:font script="Gujr" typeface="Shruti"/>
+        <a:font script="Khmr" typeface="DaunPenh"/>
+        <a:font script="Knda" typeface="Tunga"/>
+        <a:font script="Guru" typeface="Raavi"/>
+        <a:font script="Cans" typeface="Euphemia"/>
+        <a:font script="Cher" typeface="Plantagenet Cherokee"/>
+        <a:font script="Yiii" typeface="Microsoft Yi Baiti"/>
+        <a:font script="Tibt" typeface="Microsoft Himalaya"/>
+        <a:font script="Thaa" typeface="MV Boli"/>
+        <a:font script="Deva" typeface="Mangal"/>
+        <a:font script="Telu" typeface="Gautami"/>
+        <a:font script="Taml" typeface="Latha"/>
+        <a:font script="Syrc" typeface="Estrangelo Edessa"/>
+        <a:font script="Orya" typeface="Kalinga"/>
+        <a:font script="Mlym" typeface="Kartika"/>
+        <a:font script="Laoo" typeface="DokChampa"/>
+        <a:font script="Sinh" typeface="Iskoola Pota"/>
+        <a:font script="Mong" typeface="Mongolian Baiti"/>
+        <a:font script="Viet" typeface="Arial"/>
+        <a:font script="Uigh" typeface="Microsoft Uighur"/>
+        <a:font script="Geor" typeface="Sylfaen"/>
+        <a:font script="Armn" typeface="Arial"/>
+        <a:font script="Bugi" typeface="Leelawadee UI"/>
+        <a:font script="Bopo" typeface="Microsoft JhengHei"/>
+        <a:font script="Java" typeface="Javanese Text"/>
+        <a:font script="Lisu" typeface="Segoe UI"/>
+        <a:font script="Mymr" typeface="Myanmar Text"/>
+        <a:font script="Nkoo" typeface="Ebrima"/>
+        <a:font script="Olck" typeface="Nirmala UI"/>
+        <a:font script="Osma" typeface="Ebrima"/>
+        <a:font script="Phag" typeface="Phagspa"/>
+        <a:font script="Syrn" typeface="Estrangelo Edessa"/>
+        <a:font script="Syrj" typeface="Estrangelo Edessa"/>
+        <a:font script="Syre" typeface="Estrangelo Edessa"/>
+        <a:font script="Sora" typeface="Nirmala UI"/>
+        <a:font script="Tale" typeface="Microsoft Tai Le"/>
+        <a:font script="Talu" typeface="Microsoft New Tai Lue"/>
+        <a:font script="Tfng" typeface="Ebrima"/>
+      </a:minorFont>
+    </a:fontScheme>
+    <a:fmtScheme name="Office">
+      <a:fillStyleLst>
+        <a:solidFill>
+          <a:schemeClr val="phClr"/>
+        </a:solidFill>
+        <a:gradFill rotWithShape="1">
+          <a:gsLst>
+            <a:gs pos="0">
+              <a:schemeClr val="phClr">
+                <a:lumMod val="110000"/>
+                <a:satMod val="105000"/>
+                <a:tint val="67000"/>
+              </a:schemeClr>
+            </a:gs>
+            <a:gs pos="50000">
+              <a:schemeClr val="phClr">
+                <a:lumMod val="105000"/>
+                <a:satMod val="103000"/>
+                <a:tint val="73000"/>
+              </a:schemeClr>
+            </a:gs>
+            <a:gs pos="100000">
+              <a:schemeClr val="phClr">
+                <a:lumMod val="105000"/>
+                <a:satMod val="109000"/>
+                <a:tint val="81000"/>
+              </a:schemeClr>
+            </a:gs>
+          </a:gsLst>
+          <a:lin ang="5400000" scaled="0"/>
+        </a:gradFill>
+        <a:gradFill rotWithShape="1">
+          <a:gsLst>
+            <a:gs pos="0">
+              <a:schemeClr val="phClr">
+                <a:satMod val="103000"/>
+                <a:lumMod val="102000"/>
+                <a:tint val="94000"/>
+              </a:schemeClr>
+            </a:gs>
+            <a:gs pos="50000">
+              <a:schemeClr val="phClr">
+                <a:satMod val="110000"/>
+                <a:lumMod val="100000"/>
+                <a:shade val="100000"/>
+              </a:schemeClr>
+            </a:gs>
+            <a:gs pos="100000">
+              <a:schemeClr val="phClr">
+                <a:lumMod val="99000"/>
+                <a:satMod val="120000"/>
+                <a:shade val="78000"/>
+              </a:schemeClr>
+            </a:gs>
+          </a:gsLst>
+          <a:lin ang="5400000" scaled="0"/>
+        </a:gradFill>
+      </a:fillStyleLst>
+      <a:lnStyleLst>
+        <a:ln w="12700" cap="flat" cmpd="sng" algn="ctr">
+          <a:solidFill>
+            <a:schemeClr val="phClr"/>
+          </a:solidFill>
+          <a:prstDash val="solid"/>
+          <a:miter lim="800000"/>
+        </a:ln>
+        <a:ln w="19050" cap="flat" cmpd="sng" algn="ctr">
+          <a:solidFill>
+            <a:schemeClr val="phClr"/>
+          </a:solidFill>
+          <a:prstDash val="solid"/>
+          <a:miter lim="800000"/>
+        </a:ln>
+        <a:ln w="25400" cap="flat" cmpd="sng" algn="ctr">
+          <a:solidFill>
+            <a:schemeClr val="phClr"/>
+          </a:solidFill>
+          <a:prstDash val="solid"/>
+          <a:miter lim="800000"/>
+        </a:ln>
+      </a:lnStyleLst>
+      <a:effectStyleLst>
+        <a:effectStyle>
+          <a:effectLst/>
+        </a:effectStyle>
+        <a:effectStyle>
+          <a:effectLst/>
+        </a:effectStyle>
+        <a:effectStyle>
+          <a:effectLst>
+            <a:outerShdw blurRad="57150" dist="19050" dir="5400000" algn="ctr" rotWithShape="0">
+              <a:srgbClr val="000000">
+                <a:alpha val="63000"/>
+              </a:srgbClr>
+            </a:outerShdw>
+          </a:effectLst>
+        </a:effectStyle>
+      </a:effectStyleLst>
+      <a:bgFillStyleLst>
+        <a:solidFill>
+          <a:schemeClr val="phClr"/>
+        </a:solidFill>
+        <a:solidFill>
+          <a:schemeClr val="phClr">
+            <a:tint val="95000"/>
+            <a:satMod val="170000"/>
+          </a:schemeClr>
+        </a:solidFill>
+        <a:gradFill rotWithShape="1">
+          <a:gsLst>
+            <a:gs pos="0">
+              <a:schemeClr val="phClr">
+                <a:tint val="93000"/>
+                <a:satMod val="150000"/>
+                <a:shade val="98000"/>
+                <a:lumMod val="102000"/>
+              </a:schemeClr>
+            </a:gs>
+            <a:gs pos="50000">
+              <a:schemeClr val="phClr">
+                <a:tint val="98000"/>
+                <a:satMod val="130000"/>
+                <a:shade val="90000"/>
+                <a:lumMod val="103000"/>
+              </a:schemeClr>
+            </a:gs>
+            <a:gs pos="100000">
+              <a:schemeClr val="phClr">
+                <a:shade val="63000"/>
+                <a:satMod val="120000"/>
+              </a:schemeClr>
+            </a:gs>
+          </a:gsLst>
+          <a:lin ang="5400000" scaled="0"/>
+        </a:gradFill>
+      </a:bgFillStyleLst>
+    </a:fmtScheme>
+  </a:themeElements>
+  <a:objectDefaults>
+    <a:lnDef>
+      <a:spPr/>
+      <a:bodyPr/>
+      <a:lstStyle/>
+      <a:style>
+        <a:lnRef idx="2">
+          <a:schemeClr val="accent1"/>
+        </a:lnRef>
+        <a:fillRef idx="0">
+          <a:schemeClr val="accent1"/>
+        </a:fillRef>
+        <a:effectRef idx="1">
+          <a:schemeClr val="accent1"/>
+        </a:effectRef>
+        <a:fontRef idx="minor">
+          <a:schemeClr val="tx1"/>
+        </a:fontRef>
+      </a:style>
+    </a:lnDef>
+  </a:objectDefaults>
+  <a:extraClrSchemeLst/>
+  <a:extLst>
+    <a:ext uri="{05A4C25C-085E-4340-85A3-A5531E510DB2}">
+      <thm15:themeFamily xmlns:thm15="http://schemas.microsoft.com/office/thememl/2012/main" name="Office Theme" id="{2E142A2C-CD16-42D6-873A-C26D2A0506FA}" vid="{1BDDFF52-6CD6-40A5-AB3C-68EB2F1E4D0A}"/>
+    </a:ext>
+  </a:extLst>
+</a:theme>
 </file>